--- a/data/template/slide_template_new.pptx
+++ b/data/template/slide_template_new.pptx
@@ -3,21 +3,23 @@
 <p:presentation xmlns:a="http://schemas.openxmlformats.org/drawingml/2006/main" xmlns:r="http://schemas.openxmlformats.org/officeDocument/2006/relationships" xmlns:p="http://schemas.openxmlformats.org/presentationml/2006/main" saveSubsetFonts="1" autoCompressPictures="0">
   <p:sldMasterIdLst>
     <p:sldMasterId id="2147483660" r:id="rId4"/>
+    <p:sldMasterId id="2147483691" r:id="rId5"/>
   </p:sldMasterIdLst>
   <p:notesMasterIdLst>
-    <p:notesMasterId r:id="rId10"/>
+    <p:notesMasterId r:id="rId12"/>
   </p:notesMasterIdLst>
   <p:sldIdLst>
-    <p:sldId id="264" r:id="rId5"/>
-    <p:sldId id="261" r:id="rId6"/>
-    <p:sldId id="1695" r:id="rId7"/>
-    <p:sldId id="1683" r:id="rId8"/>
-    <p:sldId id="1687" r:id="rId9"/>
+    <p:sldId id="264" r:id="rId6"/>
+    <p:sldId id="261" r:id="rId7"/>
+    <p:sldId id="1695" r:id="rId8"/>
+    <p:sldId id="1696" r:id="rId9"/>
+    <p:sldId id="1687" r:id="rId10"/>
+    <p:sldId id="1682" r:id="rId11"/>
   </p:sldIdLst>
   <p:sldSz cx="12192000" cy="6858000"/>
   <p:notesSz cx="6858000" cy="9144000"/>
   <p:custDataLst>
-    <p:tags r:id="rId11"/>
+    <p:tags r:id="rId13"/>
   </p:custDataLst>
   <p:defaultTextStyle>
     <a:defPPr>
@@ -129,6 +131,9 @@
         </p15:guide>
       </p15:sldGuideLst>
     </p:ext>
+    <p:ext uri="{2D200454-40CA-4A62-9FC3-DE9A4176ACB9}">
+      <p15:notesGuideLst xmlns:p15="http://schemas.microsoft.com/office/powerpoint/2012/main"/>
+    </p:ext>
   </p:extLst>
 </p:presentation>
 </file>
@@ -187,6 +192,14 @@
 </p:cmAuthorLst>
 </file>
 
+<file path=ppt/revisionInfo.xml><?xml version="1.0" encoding="utf-8"?>
+<p1510:revInfo xmlns:a="http://schemas.openxmlformats.org/drawingml/2006/main" xmlns:r="http://schemas.openxmlformats.org/officeDocument/2006/relationships" xmlns:p1510="http://schemas.microsoft.com/office/powerpoint/2015/10/main">
+  <p1510:revLst>
+    <p1510:client id="{F9CBF65E-B61E-40D9-98B4-369EB0A2DD33}" v="37" dt="2026-01-28T14:31:12.623"/>
+  </p1510:revLst>
+</p1510:revInfo>
+</file>
+
 <file path=ppt/notesMasters/notesMaster1.xml><?xml version="1.0" encoding="utf-8"?>
 <p:notesMaster xmlns:a="http://schemas.openxmlformats.org/drawingml/2006/main" xmlns:r="http://schemas.openxmlformats.org/officeDocument/2006/relationships" xmlns:p="http://schemas.openxmlformats.org/presentationml/2006/main">
   <p:cSld>
@@ -269,7 +282,7 @@
           <a:p>
             <a:fld id="{24E658D3-4880-405C-9625-3D8D1B8E7BAF}" type="datetimeFigureOut">
               <a:rPr lang="en-US" smtClean="0"/>
-              <a:t>11/4/2025</a:t>
+              <a:t>2/11/2026</a:t>
             </a:fld>
             <a:endParaRPr lang="en-US"/>
           </a:p>
@@ -553,39 +566,58 @@
           <a:chExt cx="0" cy="0"/>
         </a:xfrm>
       </p:grpSpPr>
-      <p:pic>
-        <p:nvPicPr>
-          <p:cNvPr id="4" name="Picture 3">
+      <p:sp>
+        <p:nvSpPr>
+          <p:cNvPr id="2" name="Rectangle 1">
             <a:extLst>
               <a:ext uri="{FF2B5EF4-FFF2-40B4-BE49-F238E27FC236}">
-                <a16:creationId xmlns:a16="http://schemas.microsoft.com/office/drawing/2014/main" id="{F983F63A-D927-FEDB-46A7-00B49B707F91}"/>
-              </a:ext>
-              <a:ext uri="{C183D7F6-B498-43B3-948B-1728B52AA6E4}">
-                <adec:decorative xmlns:adec="http://schemas.microsoft.com/office/drawing/2017/decorative" val="1"/>
+                <a16:creationId xmlns:a16="http://schemas.microsoft.com/office/drawing/2014/main" id="{B55D3C0C-AEBA-E86E-8B6F-0FF83D0FC697}"/>
               </a:ext>
             </a:extLst>
           </p:cNvPr>
-          <p:cNvPicPr>
-            <a:picLocks noChangeAspect="1"/>
-          </p:cNvPicPr>
+          <p:cNvSpPr/>
           <p:nvPr userDrawn="1"/>
-        </p:nvPicPr>
-        <p:blipFill>
-          <a:blip r:embed="rId2"/>
-          <a:stretch>
-            <a:fillRect/>
-          </a:stretch>
-        </p:blipFill>
-        <p:spPr>
-          <a:xfrm>
-            <a:off x="0" y="306267"/>
-            <a:ext cx="12192000" cy="3962400"/>
+        </p:nvSpPr>
+        <p:spPr>
+          <a:xfrm>
+            <a:off x="0" y="484909"/>
+            <a:ext cx="12192000" cy="3783758"/>
           </a:xfrm>
           <a:prstGeom prst="rect">
             <a:avLst/>
           </a:prstGeom>
-        </p:spPr>
-      </p:pic>
+          <a:solidFill>
+            <a:srgbClr val="003366"/>
+          </a:solidFill>
+          <a:ln>
+            <a:noFill/>
+          </a:ln>
+        </p:spPr>
+        <p:style>
+          <a:lnRef idx="2">
+            <a:schemeClr val="accent1">
+              <a:shade val="15000"/>
+            </a:schemeClr>
+          </a:lnRef>
+          <a:fillRef idx="1">
+            <a:schemeClr val="accent1"/>
+          </a:fillRef>
+          <a:effectRef idx="0">
+            <a:schemeClr val="accent1"/>
+          </a:effectRef>
+          <a:fontRef idx="minor">
+            <a:schemeClr val="lt1"/>
+          </a:fontRef>
+        </p:style>
+        <p:txBody>
+          <a:bodyPr rtlCol="0" anchor="ctr"/>
+          <a:lstStyle/>
+          <a:p>
+            <a:pPr algn="ctr"/>
+            <a:endParaRPr lang="fr-FR"/>
+          </a:p>
+        </p:txBody>
+      </p:sp>
       <p:sp>
         <p:nvSpPr>
           <p:cNvPr id="6" name="Subtitle 1">
@@ -684,7 +716,30 @@
           <p:nvPr userDrawn="1"/>
         </p:nvPicPr>
         <p:blipFill>
-          <a:blip r:embed="rId2"/>
+          <a:blip r:embed="rId2">
+            <a:clrChange>
+              <a:clrFrom>
+                <a:srgbClr val="6C6C6C"/>
+              </a:clrFrom>
+              <a:clrTo>
+                <a:srgbClr val="6C6C6C">
+                  <a:alpha val="0"/>
+                </a:srgbClr>
+              </a:clrTo>
+            </a:clrChange>
+            <a:biLevel thresh="25000"/>
+            <a:extLst>
+              <a:ext uri="{BEBA8EAE-BF5A-486C-A8C5-ECC9F3942E4B}">
+                <a14:imgProps xmlns:a14="http://schemas.microsoft.com/office/drawing/2010/main">
+                  <a14:imgLayer r:embed="rId3">
+                    <a14:imgEffect>
+                      <a14:saturation sat="0"/>
+                    </a14:imgEffect>
+                  </a14:imgLayer>
+                </a14:imgProps>
+              </a:ext>
+            </a:extLst>
+          </a:blip>
           <a:stretch>
             <a:fillRect/>
           </a:stretch>
@@ -1062,7 +1117,7 @@
           <a:p>
             <a:fld id="{34D34F35-57AC-4AAB-AFB8-8AD2BF1D474A}" type="datetime1">
               <a:rPr lang="en-US" smtClean="0"/>
-              <a:t>11/4/2025</a:t>
+              <a:t>2/11/2026</a:t>
             </a:fld>
             <a:endParaRPr lang="en-US"/>
           </a:p>
@@ -1180,7 +1235,7 @@
           <a:p>
             <a:fld id="{1C6CF003-7403-4364-812A-C53D3E68CF64}" type="datetime1">
               <a:rPr lang="en-US" smtClean="0"/>
-              <a:t>11/4/2025</a:t>
+              <a:t>2/11/2026</a:t>
             </a:fld>
             <a:endParaRPr lang="en-US"/>
           </a:p>
@@ -1298,7 +1353,7 @@
           <a:p>
             <a:fld id="{D79C06E5-F2B0-47D3-A6E8-A52CDE214C35}" type="datetime1">
               <a:rPr lang="en-US" smtClean="0"/>
-              <a:t>11/4/2025</a:t>
+              <a:t>2/11/2026</a:t>
             </a:fld>
             <a:endParaRPr lang="en-US"/>
           </a:p>
@@ -1532,7 +1587,7 @@
           <a:p>
             <a:fld id="{39ACB58B-10F4-424C-A445-BF4374629C10}" type="datetime1">
               <a:rPr lang="en-US" smtClean="0"/>
-              <a:t>11/4/2025</a:t>
+              <a:t>2/11/2026</a:t>
             </a:fld>
             <a:endParaRPr lang="en-US"/>
           </a:p>
@@ -1823,7 +1878,7 @@
           <a:p>
             <a:fld id="{8035C2C3-DEFB-4B02-975D-80572CA7EC68}" type="datetime1">
               <a:rPr lang="en-US" smtClean="0"/>
-              <a:t>11/4/2025</a:t>
+              <a:t>2/11/2026</a:t>
             </a:fld>
             <a:endParaRPr lang="en-US"/>
           </a:p>
@@ -1959,7 +2014,7 @@
           <a:p>
             <a:fld id="{6CD7B941-69E9-485A-A9E3-D4284E128DFE}" type="datetime1">
               <a:rPr lang="en-US" smtClean="0"/>
-              <a:t>11/4/2025</a:t>
+              <a:t>2/11/2026</a:t>
             </a:fld>
             <a:endParaRPr lang="en-US"/>
           </a:p>
@@ -2137,7 +2192,7 @@
           <a:p>
             <a:fld id="{6C0063D3-2A43-4DB9-8D47-89A6771FB05A}" type="datetime1">
               <a:rPr lang="en-US" smtClean="0"/>
-              <a:t>11/4/2025</a:t>
+              <a:t>2/11/2026</a:t>
             </a:fld>
             <a:endParaRPr lang="en-US"/>
           </a:p>
@@ -2309,7 +2364,7 @@
           <a:p>
             <a:fld id="{77ACC131-13CF-4DFC-9B0D-CFEF39A54BC4}" type="datetime1">
               <a:rPr lang="en-US" smtClean="0"/>
-              <a:t>11/4/2025</a:t>
+              <a:t>2/11/2026</a:t>
             </a:fld>
             <a:endParaRPr lang="en-US"/>
           </a:p>
@@ -2555,7 +2610,7 @@
           <a:p>
             <a:fld id="{D1284D54-D95C-4925-AA43-1C4AD3526BE4}" type="datetime1">
               <a:rPr lang="en-US" smtClean="0"/>
-              <a:t>11/4/2025</a:t>
+              <a:t>2/11/2026</a:t>
             </a:fld>
             <a:endParaRPr lang="en-US"/>
           </a:p>
@@ -2736,7 +2791,7 @@
           <a:p>
             <a:fld id="{6A82D370-C2FB-4F50-A2B2-FFE2C3631AA0}" type="datetime1">
               <a:rPr lang="en-US" smtClean="0"/>
-              <a:t>11/4/2025</a:t>
+              <a:t>2/11/2026</a:t>
             </a:fld>
             <a:endParaRPr lang="en-US"/>
           </a:p>
@@ -2997,7 +3052,7 @@
           <a:p>
             <a:fld id="{4780838C-3F0F-4C56-A54B-E75BFAEF3EBF}" type="datetime1">
               <a:rPr lang="en-US" smtClean="0"/>
-              <a:t>11/4/2025</a:t>
+              <a:t>2/11/2026</a:t>
             </a:fld>
             <a:endParaRPr lang="en-US"/>
           </a:p>
@@ -3179,7 +3234,7 @@
           <a:p>
             <a:fld id="{8FE7647C-A8DA-4535-9F06-83401DD8669E}" type="datetime1">
               <a:rPr lang="en-US" smtClean="0"/>
-              <a:t>11/4/2025</a:t>
+              <a:t>2/11/2026</a:t>
             </a:fld>
             <a:endParaRPr lang="en-US"/>
           </a:p>
@@ -3449,7 +3504,7 @@
           <a:p>
             <a:fld id="{745A7203-D5A1-404D-8437-D635E03A7299}" type="datetime1">
               <a:rPr lang="en-US" smtClean="0"/>
-              <a:t>11/4/2025</a:t>
+              <a:t>2/11/2026</a:t>
             </a:fld>
             <a:endParaRPr lang="en-US"/>
           </a:p>
@@ -3898,7 +3953,7 @@
           <a:p>
             <a:fld id="{0BFD1247-DCC1-486C-82A5-541CCEF1F3A5}" type="datetime1">
               <a:rPr lang="en-US" smtClean="0"/>
-              <a:t>11/4/2025</a:t>
+              <a:t>2/11/2026</a:t>
             </a:fld>
             <a:endParaRPr lang="en-US"/>
           </a:p>
@@ -4391,7 +4446,7 @@
           <a:p>
             <a:fld id="{28B0BFEB-9524-4D59-9A4D-06779128F7EF}" type="datetime1">
               <a:rPr lang="en-US" smtClean="0"/>
-              <a:t>11/4/2025</a:t>
+              <a:t>2/11/2026</a:t>
             </a:fld>
             <a:endParaRPr lang="en-US"/>
           </a:p>
@@ -4749,7 +4804,7 @@
           <a:p>
             <a:fld id="{2053FF58-67C2-42AA-A944-B4637ED5D3E3}" type="datetime1">
               <a:rPr lang="en-US" smtClean="0"/>
-              <a:t>11/4/2025</a:t>
+              <a:t>2/11/2026</a:t>
             </a:fld>
             <a:endParaRPr lang="en-US"/>
           </a:p>
@@ -5205,7 +5260,7 @@
           <a:p>
             <a:fld id="{3A90985E-7D06-474A-B35F-C7E47130AC86}" type="datetime1">
               <a:rPr lang="en-US" smtClean="0"/>
-              <a:t>11/4/2025</a:t>
+              <a:t>2/11/2026</a:t>
             </a:fld>
             <a:endParaRPr lang="en-US"/>
           </a:p>
@@ -5357,7 +5412,434 @@
 </p:sldLayout>
 </file>
 
-<file path=ppt/slideLayouts/slideLayout3.xml><?xml version="1.0" encoding="utf-8"?>
+<file path=ppt/slideLayouts/slideLayout26.xml><?xml version="1.0" encoding="utf-8"?>
+<p:sldLayout xmlns:a="http://schemas.openxmlformats.org/drawingml/2006/main" xmlns:r="http://schemas.openxmlformats.org/officeDocument/2006/relationships" xmlns:p="http://schemas.openxmlformats.org/presentationml/2006/main" preserve="1" userDrawn="1">
+  <p:cSld name="Title Layout">
+    <p:spTree>
+      <p:nvGrpSpPr>
+        <p:cNvPr id="1" name=""/>
+        <p:cNvGrpSpPr/>
+        <p:nvPr/>
+      </p:nvGrpSpPr>
+      <p:grpSpPr>
+        <a:xfrm>
+          <a:off x="0" y="0"/>
+          <a:ext cx="0" cy="0"/>
+          <a:chOff x="0" y="0"/>
+          <a:chExt cx="0" cy="0"/>
+        </a:xfrm>
+      </p:grpSpPr>
+      <p:sp>
+        <p:nvSpPr>
+          <p:cNvPr id="2" name="Rectangle 1">
+            <a:extLst>
+              <a:ext uri="{FF2B5EF4-FFF2-40B4-BE49-F238E27FC236}">
+                <a16:creationId xmlns:a16="http://schemas.microsoft.com/office/drawing/2014/main" id="{B55D3C0C-AEBA-E86E-8B6F-0FF83D0FC697}"/>
+              </a:ext>
+            </a:extLst>
+          </p:cNvPr>
+          <p:cNvSpPr/>
+          <p:nvPr userDrawn="1"/>
+        </p:nvSpPr>
+        <p:spPr>
+          <a:xfrm>
+            <a:off x="0" y="484909"/>
+            <a:ext cx="12192000" cy="3783758"/>
+          </a:xfrm>
+          <a:prstGeom prst="rect">
+            <a:avLst/>
+          </a:prstGeom>
+          <a:solidFill>
+            <a:srgbClr val="003366"/>
+          </a:solidFill>
+          <a:ln>
+            <a:noFill/>
+          </a:ln>
+        </p:spPr>
+        <p:style>
+          <a:lnRef idx="2">
+            <a:schemeClr val="accent1">
+              <a:shade val="15000"/>
+            </a:schemeClr>
+          </a:lnRef>
+          <a:fillRef idx="1">
+            <a:schemeClr val="accent1"/>
+          </a:fillRef>
+          <a:effectRef idx="0">
+            <a:schemeClr val="accent1"/>
+          </a:effectRef>
+          <a:fontRef idx="minor">
+            <a:schemeClr val="lt1"/>
+          </a:fontRef>
+        </p:style>
+        <p:txBody>
+          <a:bodyPr rtlCol="0" anchor="ctr"/>
+          <a:lstStyle/>
+          <a:p>
+            <a:pPr algn="ctr"/>
+            <a:endParaRPr lang="fr-FR"/>
+          </a:p>
+        </p:txBody>
+      </p:sp>
+      <p:sp>
+        <p:nvSpPr>
+          <p:cNvPr id="6" name="Subtitle 1">
+            <a:extLst>
+              <a:ext uri="{FF2B5EF4-FFF2-40B4-BE49-F238E27FC236}">
+                <a16:creationId xmlns:a16="http://schemas.microsoft.com/office/drawing/2014/main" id="{64C2CEE0-D7BB-4FF5-8100-D77091DA031B}"/>
+              </a:ext>
+            </a:extLst>
+          </p:cNvPr>
+          <p:cNvSpPr>
+            <a:spLocks noGrp="1"/>
+          </p:cNvSpPr>
+          <p:nvPr>
+            <p:ph type="body" sz="quarter" idx="10"/>
+          </p:nvPr>
+        </p:nvSpPr>
+        <p:spPr>
+          <a:xfrm>
+            <a:off x="783024" y="3062978"/>
+            <a:ext cx="6874596" cy="914400"/>
+          </a:xfrm>
+        </p:spPr>
+        <p:txBody>
+          <a:bodyPr/>
+          <a:lstStyle>
+            <a:lvl1pPr marL="0" indent="0">
+              <a:buNone/>
+              <a:defRPr>
+                <a:solidFill>
+                  <a:schemeClr val="bg1"/>
+                </a:solidFill>
+              </a:defRPr>
+            </a:lvl1pPr>
+          </a:lstStyle>
+          <a:p>
+            <a:pPr lvl="0"/>
+            <a:r>
+              <a:rPr lang="en-US" dirty="0"/>
+              <a:t>Click to edit Master text styles</a:t>
+            </a:r>
+          </a:p>
+        </p:txBody>
+      </p:sp>
+      <p:sp>
+        <p:nvSpPr>
+          <p:cNvPr id="8" name="Title 1">
+            <a:extLst>
+              <a:ext uri="{FF2B5EF4-FFF2-40B4-BE49-F238E27FC236}">
+                <a16:creationId xmlns:a16="http://schemas.microsoft.com/office/drawing/2014/main" id="{6ED94B88-53B3-4369-845C-02659BC1E760}"/>
+              </a:ext>
+            </a:extLst>
+          </p:cNvPr>
+          <p:cNvSpPr>
+            <a:spLocks noGrp="1"/>
+          </p:cNvSpPr>
+          <p:nvPr>
+            <p:ph type="title"/>
+          </p:nvPr>
+        </p:nvSpPr>
+        <p:spPr>
+          <a:xfrm>
+            <a:off x="609600" y="1836738"/>
+            <a:ext cx="10972800" cy="1143000"/>
+          </a:xfrm>
+        </p:spPr>
+        <p:txBody>
+          <a:bodyPr/>
+          <a:lstStyle>
+            <a:lvl1pPr>
+              <a:defRPr/>
+            </a:lvl1pPr>
+          </a:lstStyle>
+          <a:p>
+            <a:r>
+              <a:rPr lang="en-US" dirty="0"/>
+              <a:t>Click to edit Master title style</a:t>
+            </a:r>
+          </a:p>
+        </p:txBody>
+      </p:sp>
+      <p:pic>
+        <p:nvPicPr>
+          <p:cNvPr id="3" name="Picture 2">
+            <a:extLst>
+              <a:ext uri="{FF2B5EF4-FFF2-40B4-BE49-F238E27FC236}">
+                <a16:creationId xmlns:a16="http://schemas.microsoft.com/office/drawing/2014/main" id="{5A1F4DD4-D91B-58FD-E74E-D15A8967EF33}"/>
+              </a:ext>
+              <a:ext uri="{C183D7F6-B498-43B3-948B-1728B52AA6E4}">
+                <adec:decorative xmlns:adec="http://schemas.microsoft.com/office/drawing/2017/decorative" val="1"/>
+              </a:ext>
+            </a:extLst>
+          </p:cNvPr>
+          <p:cNvPicPr>
+            <a:picLocks noChangeAspect="1"/>
+          </p:cNvPicPr>
+          <p:nvPr userDrawn="1"/>
+        </p:nvPicPr>
+        <p:blipFill>
+          <a:blip r:embed="rId2">
+            <a:clrChange>
+              <a:clrFrom>
+                <a:srgbClr val="6C6C6C"/>
+              </a:clrFrom>
+              <a:clrTo>
+                <a:srgbClr val="6C6C6C">
+                  <a:alpha val="0"/>
+                </a:srgbClr>
+              </a:clrTo>
+            </a:clrChange>
+            <a:biLevel thresh="25000"/>
+            <a:extLst>
+              <a:ext uri="{BEBA8EAE-BF5A-486C-A8C5-ECC9F3942E4B}">
+                <a14:imgProps xmlns:a14="http://schemas.microsoft.com/office/drawing/2010/main">
+                  <a14:imgLayer r:embed="rId3">
+                    <a14:imgEffect>
+                      <a14:saturation sat="0"/>
+                    </a14:imgEffect>
+                  </a14:imgLayer>
+                </a14:imgProps>
+              </a:ext>
+            </a:extLst>
+          </a:blip>
+          <a:stretch>
+            <a:fillRect/>
+          </a:stretch>
+        </p:blipFill>
+        <p:spPr>
+          <a:xfrm>
+            <a:off x="609600" y="3031497"/>
+            <a:ext cx="8241792" cy="1143000"/>
+          </a:xfrm>
+          <a:prstGeom prst="rect">
+            <a:avLst/>
+          </a:prstGeom>
+        </p:spPr>
+      </p:pic>
+    </p:spTree>
+    <p:extLst>
+      <p:ext uri="{BB962C8B-B14F-4D97-AF65-F5344CB8AC3E}">
+        <p14:creationId xmlns:p14="http://schemas.microsoft.com/office/powerpoint/2010/main" val="2095223895"/>
+      </p:ext>
+    </p:extLst>
+  </p:cSld>
+  <p:clrMapOvr>
+    <a:masterClrMapping/>
+  </p:clrMapOvr>
+</p:sldLayout>
+</file>
+
+<file path=ppt/slideLayouts/slideLayout27.xml><?xml version="1.0" encoding="utf-8"?>
+<p:sldLayout xmlns:a="http://schemas.openxmlformats.org/drawingml/2006/main" xmlns:r="http://schemas.openxmlformats.org/officeDocument/2006/relationships" xmlns:p="http://schemas.openxmlformats.org/presentationml/2006/main" preserve="1" userDrawn="1">
+  <p:cSld name="Title and Content">
+    <p:spTree>
+      <p:nvGrpSpPr>
+        <p:cNvPr id="1" name=""/>
+        <p:cNvGrpSpPr/>
+        <p:nvPr/>
+      </p:nvGrpSpPr>
+      <p:grpSpPr>
+        <a:xfrm>
+          <a:off x="0" y="0"/>
+          <a:ext cx="0" cy="0"/>
+          <a:chOff x="0" y="0"/>
+          <a:chExt cx="0" cy="0"/>
+        </a:xfrm>
+      </p:grpSpPr>
+      <p:sp>
+        <p:nvSpPr>
+          <p:cNvPr id="3" name="Content Placeholder 2"/>
+          <p:cNvSpPr>
+            <a:spLocks noGrp="1"/>
+          </p:cNvSpPr>
+          <p:nvPr>
+            <p:ph idx="1"/>
+          </p:nvPr>
+        </p:nvSpPr>
+        <p:spPr/>
+        <p:txBody>
+          <a:bodyPr/>
+          <a:lstStyle>
+            <a:lvl1pPr>
+              <a:defRPr sz="1800" b="0">
+                <a:solidFill>
+                  <a:schemeClr val="tx1"/>
+                </a:solidFill>
+              </a:defRPr>
+            </a:lvl1pPr>
+            <a:lvl2pPr>
+              <a:defRPr sz="1500" b="0">
+                <a:solidFill>
+                  <a:schemeClr val="tx1"/>
+                </a:solidFill>
+              </a:defRPr>
+            </a:lvl2pPr>
+            <a:lvl3pPr>
+              <a:defRPr sz="1350" b="0">
+                <a:solidFill>
+                  <a:schemeClr val="tx1"/>
+                </a:solidFill>
+              </a:defRPr>
+            </a:lvl3pPr>
+            <a:lvl4pPr>
+              <a:defRPr>
+                <a:solidFill>
+                  <a:schemeClr val="tx1"/>
+                </a:solidFill>
+              </a:defRPr>
+            </a:lvl4pPr>
+            <a:lvl5pPr>
+              <a:defRPr>
+                <a:solidFill>
+                  <a:schemeClr val="tx1"/>
+                </a:solidFill>
+              </a:defRPr>
+            </a:lvl5pPr>
+          </a:lstStyle>
+          <a:p>
+            <a:pPr lvl="0"/>
+            <a:r>
+              <a:rPr lang="en-US"/>
+              <a:t>Edit Master text styles</a:t>
+            </a:r>
+          </a:p>
+          <a:p>
+            <a:pPr lvl="1"/>
+            <a:r>
+              <a:rPr lang="en-US"/>
+              <a:t>Second level</a:t>
+            </a:r>
+          </a:p>
+          <a:p>
+            <a:pPr lvl="2"/>
+            <a:r>
+              <a:rPr lang="en-US"/>
+              <a:t>Third level</a:t>
+            </a:r>
+          </a:p>
+          <a:p>
+            <a:pPr lvl="3"/>
+            <a:r>
+              <a:rPr lang="en-US"/>
+              <a:t>Fourth level</a:t>
+            </a:r>
+          </a:p>
+          <a:p>
+            <a:pPr lvl="4"/>
+            <a:r>
+              <a:rPr lang="en-US"/>
+              <a:t>Fifth level</a:t>
+            </a:r>
+            <a:endParaRPr lang="en-GB" dirty="0"/>
+          </a:p>
+        </p:txBody>
+      </p:sp>
+      <p:sp>
+        <p:nvSpPr>
+          <p:cNvPr id="4" name="Date Placeholder 3"/>
+          <p:cNvSpPr>
+            <a:spLocks noGrp="1"/>
+          </p:cNvSpPr>
+          <p:nvPr>
+            <p:ph type="dt" sz="half" idx="10"/>
+          </p:nvPr>
+        </p:nvSpPr>
+        <p:spPr>
+          <a:xfrm>
+            <a:off x="8880309" y="44624"/>
+            <a:ext cx="2844800" cy="365125"/>
+          </a:xfrm>
+          <a:prstGeom prst="rect">
+            <a:avLst/>
+          </a:prstGeom>
+        </p:spPr>
+        <p:txBody>
+          <a:bodyPr/>
+          <a:lstStyle/>
+          <a:p>
+            <a:fld id="{4780838C-3F0F-4C56-A54B-E75BFAEF3EBF}" type="datetime1">
+              <a:rPr lang="en-US" smtClean="0"/>
+              <a:t>2/11/2026</a:t>
+            </a:fld>
+            <a:endParaRPr lang="en-US"/>
+          </a:p>
+        </p:txBody>
+      </p:sp>
+      <p:sp>
+        <p:nvSpPr>
+          <p:cNvPr id="6" name="Slide Number Placeholder 5"/>
+          <p:cNvSpPr>
+            <a:spLocks noGrp="1"/>
+          </p:cNvSpPr>
+          <p:nvPr>
+            <p:ph type="sldNum" sz="quarter" idx="12"/>
+          </p:nvPr>
+        </p:nvSpPr>
+        <p:spPr/>
+        <p:txBody>
+          <a:bodyPr/>
+          <a:lstStyle/>
+          <a:p>
+            <a:fld id="{C5EF2332-01BF-834F-8236-50238282D533}" type="slidenum">
+              <a:rPr lang="en-US" smtClean="0"/>
+              <a:t>‹#›</a:t>
+            </a:fld>
+            <a:endParaRPr lang="en-US" dirty="0"/>
+          </a:p>
+        </p:txBody>
+      </p:sp>
+      <p:sp>
+        <p:nvSpPr>
+          <p:cNvPr id="7" name="Title 1">
+            <a:extLst>
+              <a:ext uri="{FF2B5EF4-FFF2-40B4-BE49-F238E27FC236}">
+                <a16:creationId xmlns:a16="http://schemas.microsoft.com/office/drawing/2014/main" id="{6E4CAB20-DFBA-4C8C-96F6-ED6B2E1DA1FD}"/>
+              </a:ext>
+            </a:extLst>
+          </p:cNvPr>
+          <p:cNvSpPr>
+            <a:spLocks noGrp="1"/>
+          </p:cNvSpPr>
+          <p:nvPr>
+            <p:ph type="title"/>
+          </p:nvPr>
+        </p:nvSpPr>
+        <p:spPr>
+          <a:xfrm>
+            <a:off x="609600" y="161904"/>
+            <a:ext cx="10972800" cy="1143000"/>
+          </a:xfrm>
+        </p:spPr>
+        <p:txBody>
+          <a:bodyPr/>
+          <a:lstStyle/>
+          <a:p>
+            <a:r>
+              <a:rPr lang="en-US" dirty="0"/>
+              <a:t>Click to edit Master title style</a:t>
+            </a:r>
+            <a:endParaRPr lang="en-FI" dirty="0"/>
+          </a:p>
+        </p:txBody>
+      </p:sp>
+    </p:spTree>
+    <p:custDataLst>
+      <p:tags r:id="rId1"/>
+    </p:custDataLst>
+    <p:extLst>
+      <p:ext uri="{BB962C8B-B14F-4D97-AF65-F5344CB8AC3E}">
+        <p14:creationId xmlns:p14="http://schemas.microsoft.com/office/powerpoint/2010/main" val="3646604512"/>
+      </p:ext>
+    </p:extLst>
+  </p:cSld>
+  <p:clrMapOvr>
+    <a:masterClrMapping/>
+  </p:clrMapOvr>
+</p:sldLayout>
+</file>
+
+<file path=ppt/slideLayouts/slideLayout28.xml><?xml version="1.0" encoding="utf-8"?>
 <p:sldLayout xmlns:a="http://schemas.openxmlformats.org/drawingml/2006/main" xmlns:r="http://schemas.openxmlformats.org/officeDocument/2006/relationships" xmlns:p="http://schemas.openxmlformats.org/presentationml/2006/main" preserve="1" userDrawn="1">
   <p:cSld name="Title and Content Custom">
     <p:spTree>
@@ -5488,7 +5970,7 @@
           <a:p>
             <a:fld id="{868C4E2E-3E78-4EB0-8872-48B82637C03A}" type="datetime1">
               <a:rPr lang="en-US" smtClean="0"/>
-              <a:t>11/4/2025</a:t>
+              <a:t>2/11/2026</a:t>
             </a:fld>
             <a:endParaRPr lang="en-US"/>
           </a:p>
@@ -5557,7 +6039,7 @@
     </p:custDataLst>
     <p:extLst>
       <p:ext uri="{BB962C8B-B14F-4D97-AF65-F5344CB8AC3E}">
-        <p14:creationId xmlns:p14="http://schemas.microsoft.com/office/powerpoint/2010/main" val="1954247218"/>
+        <p14:creationId xmlns:p14="http://schemas.microsoft.com/office/powerpoint/2010/main" val="4161459353"/>
       </p:ext>
     </p:extLst>
   </p:cSld>
@@ -5567,7 +6049,7 @@
 </p:sldLayout>
 </file>
 
-<file path=ppt/slideLayouts/slideLayout4.xml><?xml version="1.0" encoding="utf-8"?>
+<file path=ppt/slideLayouts/slideLayout29.xml><?xml version="1.0" encoding="utf-8"?>
 <p:sldLayout xmlns:a="http://schemas.openxmlformats.org/drawingml/2006/main" xmlns:r="http://schemas.openxmlformats.org/officeDocument/2006/relationships" xmlns:p="http://schemas.openxmlformats.org/presentationml/2006/main" preserve="1" userDrawn="1">
   <p:cSld name="Title and Table + Legend Custom">
     <p:spTree>
@@ -5703,7 +6185,7 @@
           <a:p>
             <a:fld id="{A2811E2C-04DE-4A46-9DBA-B7D0553EFCE2}" type="datetime1">
               <a:rPr lang="en-US" smtClean="0"/>
-              <a:t>11/4/2025</a:t>
+              <a:t>2/11/2026</a:t>
             </a:fld>
             <a:endParaRPr lang="en-US" dirty="0"/>
           </a:p>
@@ -5872,7 +6354,7 @@
     </p:custDataLst>
     <p:extLst>
       <p:ext uri="{BB962C8B-B14F-4D97-AF65-F5344CB8AC3E}">
-        <p14:creationId xmlns:p14="http://schemas.microsoft.com/office/powerpoint/2010/main" val="2441131338"/>
+        <p14:creationId xmlns:p14="http://schemas.microsoft.com/office/powerpoint/2010/main" val="1137079151"/>
       </p:ext>
     </p:extLst>
   </p:cSld>
@@ -5882,9 +6364,9 @@
 </p:sldLayout>
 </file>
 
-<file path=ppt/slideLayouts/slideLayout5.xml><?xml version="1.0" encoding="utf-8"?>
+<file path=ppt/slideLayouts/slideLayout3.xml><?xml version="1.0" encoding="utf-8"?>
 <p:sldLayout xmlns:a="http://schemas.openxmlformats.org/drawingml/2006/main" xmlns:r="http://schemas.openxmlformats.org/officeDocument/2006/relationships" xmlns:p="http://schemas.openxmlformats.org/presentationml/2006/main" preserve="1" userDrawn="1">
-  <p:cSld name="Title and Image Custom">
+  <p:cSld name="Title and Content Custom">
     <p:spTree>
       <p:nvGrpSpPr>
         <p:cNvPr id="1" name=""/>
@@ -5901,7 +6383,7 @@
       </p:grpSpPr>
       <p:sp>
         <p:nvSpPr>
-          <p:cNvPr id="3" name="Content Placeholder 2"/>
+          <p:cNvPr id="3" name="text_body"/>
           <p:cNvSpPr>
             <a:spLocks noGrp="1"/>
           </p:cNvSpPr>
@@ -5909,12 +6391,7 @@
             <p:ph idx="1"/>
           </p:nvPr>
         </p:nvSpPr>
-        <p:spPr>
-          <a:xfrm>
-            <a:off x="609600" y="1036320"/>
-            <a:ext cx="10972800" cy="4924865"/>
-          </a:xfrm>
-        </p:spPr>
+        <p:spPr/>
         <p:txBody>
           <a:bodyPr/>
           <a:lstStyle>
@@ -6005,7 +6482,7 @@
         </p:nvSpPr>
         <p:spPr>
           <a:xfrm>
-            <a:off x="8125157" y="1108273"/>
+            <a:off x="8880309" y="44624"/>
             <a:ext cx="2844800" cy="365125"/>
           </a:xfrm>
           <a:prstGeom prst="rect">
@@ -6016,9 +6493,9 @@
           <a:bodyPr/>
           <a:lstStyle/>
           <a:p>
-            <a:fld id="{593788E6-9A74-4943-A0AF-90283E3D6202}" type="datetime1">
+            <a:fld id="{868C4E2E-3E78-4EB0-8872-48B82637C03A}" type="datetime1">
               <a:rPr lang="en-US" smtClean="0"/>
-              <a:t>11/4/2025</a:t>
+              <a:t>2/11/2026</a:t>
             </a:fld>
             <a:endParaRPr lang="en-US"/>
           </a:p>
@@ -6052,7 +6529,7 @@
           <p:cNvPr id="7" name="Title 1">
             <a:extLst>
               <a:ext uri="{FF2B5EF4-FFF2-40B4-BE49-F238E27FC236}">
-                <a16:creationId xmlns:a16="http://schemas.microsoft.com/office/drawing/2014/main" id="{EDAC0E46-F1A5-4422-A5E2-124A22C145CD}"/>
+                <a16:creationId xmlns:a16="http://schemas.microsoft.com/office/drawing/2014/main" id="{CCFA2143-B3B9-4EC7-BC35-3ABFA6F994ED}"/>
               </a:ext>
             </a:extLst>
           </p:cNvPr>
@@ -6065,7 +6542,7 @@
         </p:nvSpPr>
         <p:spPr>
           <a:xfrm>
-            <a:off x="609600" y="147836"/>
+            <a:off x="609600" y="161904"/>
             <a:ext cx="10972800" cy="1143000"/>
           </a:xfrm>
         </p:spPr>
@@ -6087,7 +6564,7 @@
     </p:custDataLst>
     <p:extLst>
       <p:ext uri="{BB962C8B-B14F-4D97-AF65-F5344CB8AC3E}">
-        <p14:creationId xmlns:p14="http://schemas.microsoft.com/office/powerpoint/2010/main" val="3037613738"/>
+        <p14:creationId xmlns:p14="http://schemas.microsoft.com/office/powerpoint/2010/main" val="1954247218"/>
       </p:ext>
     </p:extLst>
   </p:cSld>
@@ -6097,7 +6574,222 @@
 </p:sldLayout>
 </file>
 
-<file path=ppt/slideLayouts/slideLayout6.xml><?xml version="1.0" encoding="utf-8"?>
+<file path=ppt/slideLayouts/slideLayout30.xml><?xml version="1.0" encoding="utf-8"?>
+<p:sldLayout xmlns:a="http://schemas.openxmlformats.org/drawingml/2006/main" xmlns:r="http://schemas.openxmlformats.org/officeDocument/2006/relationships" xmlns:p="http://schemas.openxmlformats.org/presentationml/2006/main" preserve="1" userDrawn="1">
+  <p:cSld name="Title and Image Custom">
+    <p:spTree>
+      <p:nvGrpSpPr>
+        <p:cNvPr id="1" name=""/>
+        <p:cNvGrpSpPr/>
+        <p:nvPr/>
+      </p:nvGrpSpPr>
+      <p:grpSpPr>
+        <a:xfrm>
+          <a:off x="0" y="0"/>
+          <a:ext cx="0" cy="0"/>
+          <a:chOff x="0" y="0"/>
+          <a:chExt cx="0" cy="0"/>
+        </a:xfrm>
+      </p:grpSpPr>
+      <p:sp>
+        <p:nvSpPr>
+          <p:cNvPr id="3" name="Content Placeholder 2"/>
+          <p:cNvSpPr>
+            <a:spLocks noGrp="1"/>
+          </p:cNvSpPr>
+          <p:nvPr>
+            <p:ph idx="1"/>
+          </p:nvPr>
+        </p:nvSpPr>
+        <p:spPr>
+          <a:xfrm>
+            <a:off x="609600" y="1036320"/>
+            <a:ext cx="10972800" cy="4924865"/>
+          </a:xfrm>
+        </p:spPr>
+        <p:txBody>
+          <a:bodyPr/>
+          <a:lstStyle>
+            <a:lvl1pPr marL="0" indent="0">
+              <a:buNone/>
+              <a:defRPr sz="1800" b="0">
+                <a:solidFill>
+                  <a:schemeClr val="tx1"/>
+                </a:solidFill>
+              </a:defRPr>
+            </a:lvl1pPr>
+            <a:lvl2pPr>
+              <a:defRPr sz="1500" b="0">
+                <a:solidFill>
+                  <a:schemeClr val="tx1"/>
+                </a:solidFill>
+              </a:defRPr>
+            </a:lvl2pPr>
+            <a:lvl3pPr>
+              <a:defRPr sz="1350" b="0">
+                <a:solidFill>
+                  <a:schemeClr val="tx1"/>
+                </a:solidFill>
+              </a:defRPr>
+            </a:lvl3pPr>
+            <a:lvl4pPr>
+              <a:defRPr>
+                <a:solidFill>
+                  <a:schemeClr val="tx1"/>
+                </a:solidFill>
+              </a:defRPr>
+            </a:lvl4pPr>
+            <a:lvl5pPr>
+              <a:defRPr>
+                <a:solidFill>
+                  <a:schemeClr val="tx1"/>
+                </a:solidFill>
+              </a:defRPr>
+            </a:lvl5pPr>
+          </a:lstStyle>
+          <a:p>
+            <a:pPr lvl="0"/>
+            <a:r>
+              <a:rPr lang="en-US" dirty="0"/>
+              <a:t>Edit Master text styles</a:t>
+            </a:r>
+          </a:p>
+          <a:p>
+            <a:pPr lvl="1"/>
+            <a:r>
+              <a:rPr lang="en-US" dirty="0"/>
+              <a:t>Second level</a:t>
+            </a:r>
+          </a:p>
+          <a:p>
+            <a:pPr lvl="2"/>
+            <a:r>
+              <a:rPr lang="en-US" dirty="0"/>
+              <a:t>Third level</a:t>
+            </a:r>
+          </a:p>
+          <a:p>
+            <a:pPr lvl="3"/>
+            <a:r>
+              <a:rPr lang="en-US" dirty="0"/>
+              <a:t>Fourth level</a:t>
+            </a:r>
+          </a:p>
+          <a:p>
+            <a:pPr lvl="4"/>
+            <a:r>
+              <a:rPr lang="en-US" dirty="0"/>
+              <a:t>Fifth level</a:t>
+            </a:r>
+            <a:endParaRPr lang="en-GB" dirty="0"/>
+          </a:p>
+        </p:txBody>
+      </p:sp>
+      <p:sp>
+        <p:nvSpPr>
+          <p:cNvPr id="4" name="Date Placeholder 3"/>
+          <p:cNvSpPr>
+            <a:spLocks noGrp="1"/>
+          </p:cNvSpPr>
+          <p:nvPr>
+            <p:ph type="dt" sz="half" idx="10"/>
+          </p:nvPr>
+        </p:nvSpPr>
+        <p:spPr>
+          <a:xfrm>
+            <a:off x="8125157" y="1108273"/>
+            <a:ext cx="2844800" cy="365125"/>
+          </a:xfrm>
+          <a:prstGeom prst="rect">
+            <a:avLst/>
+          </a:prstGeom>
+        </p:spPr>
+        <p:txBody>
+          <a:bodyPr/>
+          <a:lstStyle/>
+          <a:p>
+            <a:fld id="{593788E6-9A74-4943-A0AF-90283E3D6202}" type="datetime1">
+              <a:rPr lang="en-US" smtClean="0"/>
+              <a:t>2/11/2026</a:t>
+            </a:fld>
+            <a:endParaRPr lang="en-US"/>
+          </a:p>
+        </p:txBody>
+      </p:sp>
+      <p:sp>
+        <p:nvSpPr>
+          <p:cNvPr id="6" name="Slide Number Placeholder 5"/>
+          <p:cNvSpPr>
+            <a:spLocks noGrp="1"/>
+          </p:cNvSpPr>
+          <p:nvPr>
+            <p:ph type="sldNum" sz="quarter" idx="12"/>
+          </p:nvPr>
+        </p:nvSpPr>
+        <p:spPr/>
+        <p:txBody>
+          <a:bodyPr/>
+          <a:lstStyle/>
+          <a:p>
+            <a:fld id="{C5EF2332-01BF-834F-8236-50238282D533}" type="slidenum">
+              <a:rPr lang="en-US" smtClean="0"/>
+              <a:t>‹#›</a:t>
+            </a:fld>
+            <a:endParaRPr lang="en-US"/>
+          </a:p>
+        </p:txBody>
+      </p:sp>
+      <p:sp>
+        <p:nvSpPr>
+          <p:cNvPr id="7" name="Title 1">
+            <a:extLst>
+              <a:ext uri="{FF2B5EF4-FFF2-40B4-BE49-F238E27FC236}">
+                <a16:creationId xmlns:a16="http://schemas.microsoft.com/office/drawing/2014/main" id="{EDAC0E46-F1A5-4422-A5E2-124A22C145CD}"/>
+              </a:ext>
+            </a:extLst>
+          </p:cNvPr>
+          <p:cNvSpPr>
+            <a:spLocks noGrp="1"/>
+          </p:cNvSpPr>
+          <p:nvPr>
+            <p:ph type="title"/>
+          </p:nvPr>
+        </p:nvSpPr>
+        <p:spPr>
+          <a:xfrm>
+            <a:off x="609600" y="147836"/>
+            <a:ext cx="10972800" cy="1143000"/>
+          </a:xfrm>
+        </p:spPr>
+        <p:txBody>
+          <a:bodyPr/>
+          <a:lstStyle/>
+          <a:p>
+            <a:r>
+              <a:rPr lang="en-US" dirty="0"/>
+              <a:t>Click to edit Master title style</a:t>
+            </a:r>
+            <a:endParaRPr lang="en-FI" dirty="0"/>
+          </a:p>
+        </p:txBody>
+      </p:sp>
+    </p:spTree>
+    <p:custDataLst>
+      <p:tags r:id="rId1"/>
+    </p:custDataLst>
+    <p:extLst>
+      <p:ext uri="{BB962C8B-B14F-4D97-AF65-F5344CB8AC3E}">
+        <p14:creationId xmlns:p14="http://schemas.microsoft.com/office/powerpoint/2010/main" val="2767629290"/>
+      </p:ext>
+    </p:extLst>
+  </p:cSld>
+  <p:clrMapOvr>
+    <a:masterClrMapping/>
+  </p:clrMapOvr>
+</p:sldLayout>
+</file>
+
+<file path=ppt/slideLayouts/slideLayout31.xml><?xml version="1.0" encoding="utf-8"?>
 <p:sldLayout xmlns:a="http://schemas.openxmlformats.org/drawingml/2006/main" xmlns:r="http://schemas.openxmlformats.org/officeDocument/2006/relationships" xmlns:p="http://schemas.openxmlformats.org/presentationml/2006/main" type="secHead" preserve="1">
   <p:cSld name="Section Header">
     <p:spTree>
@@ -6298,7 +6990,7 @@
     </p:spTree>
     <p:extLst>
       <p:ext uri="{BB962C8B-B14F-4D97-AF65-F5344CB8AC3E}">
-        <p14:creationId xmlns:p14="http://schemas.microsoft.com/office/powerpoint/2010/main" val="1525264900"/>
+        <p14:creationId xmlns:p14="http://schemas.microsoft.com/office/powerpoint/2010/main" val="258335231"/>
       </p:ext>
     </p:extLst>
   </p:cSld>
@@ -6308,7 +7000,7 @@
 </p:sldLayout>
 </file>
 
-<file path=ppt/slideLayouts/slideLayout7.xml><?xml version="1.0" encoding="utf-8"?>
+<file path=ppt/slideLayouts/slideLayout32.xml><?xml version="1.0" encoding="utf-8"?>
 <p:sldLayout xmlns:a="http://schemas.openxmlformats.org/drawingml/2006/main" xmlns:r="http://schemas.openxmlformats.org/officeDocument/2006/relationships" xmlns:p="http://schemas.openxmlformats.org/presentationml/2006/main" preserve="1" userDrawn="1">
   <p:cSld name="Two Content">
     <p:spTree>
@@ -6520,7 +7212,6057 @@
           <a:p>
             <a:fld id="{C820DED6-3765-4534-B532-0657F89EB4C9}" type="datetime1">
               <a:rPr lang="en-US" smtClean="0"/>
-              <a:t>11/4/2025</a:t>
+              <a:t>2/11/2026</a:t>
+            </a:fld>
+            <a:endParaRPr lang="en-US"/>
+          </a:p>
+        </p:txBody>
+      </p:sp>
+      <p:sp>
+        <p:nvSpPr>
+          <p:cNvPr id="7" name="Slide Number Placeholder 6"/>
+          <p:cNvSpPr>
+            <a:spLocks noGrp="1"/>
+          </p:cNvSpPr>
+          <p:nvPr>
+            <p:ph type="sldNum" sz="quarter" idx="12"/>
+          </p:nvPr>
+        </p:nvSpPr>
+        <p:spPr/>
+        <p:txBody>
+          <a:bodyPr/>
+          <a:lstStyle/>
+          <a:p>
+            <a:fld id="{C5EF2332-01BF-834F-8236-50238282D533}" type="slidenum">
+              <a:rPr lang="en-US" smtClean="0"/>
+              <a:t>‹#›</a:t>
+            </a:fld>
+            <a:endParaRPr lang="en-US"/>
+          </a:p>
+        </p:txBody>
+      </p:sp>
+      <p:sp>
+        <p:nvSpPr>
+          <p:cNvPr id="8" name="Title 1">
+            <a:extLst>
+              <a:ext uri="{FF2B5EF4-FFF2-40B4-BE49-F238E27FC236}">
+                <a16:creationId xmlns:a16="http://schemas.microsoft.com/office/drawing/2014/main" id="{B50E7B5A-8A94-4419-B81A-97E029AE4A8C}"/>
+              </a:ext>
+            </a:extLst>
+          </p:cNvPr>
+          <p:cNvSpPr>
+            <a:spLocks noGrp="1"/>
+          </p:cNvSpPr>
+          <p:nvPr>
+            <p:ph type="title"/>
+          </p:nvPr>
+        </p:nvSpPr>
+        <p:spPr>
+          <a:xfrm>
+            <a:off x="466891" y="116632"/>
+            <a:ext cx="11258218" cy="1143000"/>
+          </a:xfrm>
+          <a:prstGeom prst="rect">
+            <a:avLst/>
+          </a:prstGeom>
+        </p:spPr>
+        <p:txBody>
+          <a:bodyPr>
+            <a:normAutofit/>
+          </a:bodyPr>
+          <a:lstStyle>
+            <a:lvl1pPr>
+              <a:defRPr sz="2700"/>
+            </a:lvl1pPr>
+          </a:lstStyle>
+          <a:p>
+            <a:r>
+              <a:rPr lang="en-US" dirty="0"/>
+              <a:t>Click to edit Master title style</a:t>
+            </a:r>
+            <a:endParaRPr lang="en-GB" dirty="0"/>
+          </a:p>
+        </p:txBody>
+      </p:sp>
+    </p:spTree>
+    <p:extLst>
+      <p:ext uri="{BB962C8B-B14F-4D97-AF65-F5344CB8AC3E}">
+        <p14:creationId xmlns:p14="http://schemas.microsoft.com/office/powerpoint/2010/main" val="3701875383"/>
+      </p:ext>
+    </p:extLst>
+  </p:cSld>
+  <p:clrMapOvr>
+    <a:masterClrMapping/>
+  </p:clrMapOvr>
+</p:sldLayout>
+</file>
+
+<file path=ppt/slideLayouts/slideLayout33.xml><?xml version="1.0" encoding="utf-8"?>
+<p:sldLayout xmlns:a="http://schemas.openxmlformats.org/drawingml/2006/main" xmlns:r="http://schemas.openxmlformats.org/officeDocument/2006/relationships" xmlns:p="http://schemas.openxmlformats.org/presentationml/2006/main" preserve="1" userDrawn="1">
+  <p:cSld name="Two Content Custom">
+    <p:spTree>
+      <p:nvGrpSpPr>
+        <p:cNvPr id="1" name=""/>
+        <p:cNvGrpSpPr/>
+        <p:nvPr/>
+      </p:nvGrpSpPr>
+      <p:grpSpPr>
+        <a:xfrm>
+          <a:off x="0" y="0"/>
+          <a:ext cx="0" cy="0"/>
+          <a:chOff x="0" y="0"/>
+          <a:chExt cx="0" cy="0"/>
+        </a:xfrm>
+      </p:grpSpPr>
+      <p:sp>
+        <p:nvSpPr>
+          <p:cNvPr id="3" name="Content Placeholder 2"/>
+          <p:cNvSpPr>
+            <a:spLocks noGrp="1"/>
+          </p:cNvSpPr>
+          <p:nvPr>
+            <p:ph sz="half" idx="1"/>
+          </p:nvPr>
+        </p:nvSpPr>
+        <p:spPr>
+          <a:xfrm>
+            <a:off x="609600" y="1600203"/>
+            <a:ext cx="5384800" cy="4525963"/>
+          </a:xfrm>
+        </p:spPr>
+        <p:txBody>
+          <a:bodyPr/>
+          <a:lstStyle>
+            <a:lvl1pPr>
+              <a:defRPr sz="2100" b="0"/>
+            </a:lvl1pPr>
+            <a:lvl2pPr>
+              <a:defRPr sz="1800" b="0"/>
+            </a:lvl2pPr>
+            <a:lvl3pPr>
+              <a:defRPr sz="1500" b="0"/>
+            </a:lvl3pPr>
+            <a:lvl4pPr>
+              <a:defRPr sz="1350" b="0"/>
+            </a:lvl4pPr>
+            <a:lvl5pPr>
+              <a:defRPr sz="1350" b="0"/>
+            </a:lvl5pPr>
+            <a:lvl6pPr>
+              <a:defRPr sz="1350"/>
+            </a:lvl6pPr>
+            <a:lvl7pPr>
+              <a:defRPr sz="1350"/>
+            </a:lvl7pPr>
+            <a:lvl8pPr>
+              <a:defRPr sz="1350"/>
+            </a:lvl8pPr>
+            <a:lvl9pPr>
+              <a:defRPr sz="1350"/>
+            </a:lvl9pPr>
+          </a:lstStyle>
+          <a:p>
+            <a:pPr lvl="0"/>
+            <a:r>
+              <a:rPr lang="en-US" dirty="0"/>
+              <a:t>Edit Master text styles</a:t>
+            </a:r>
+          </a:p>
+          <a:p>
+            <a:pPr lvl="1"/>
+            <a:r>
+              <a:rPr lang="en-US" dirty="0"/>
+              <a:t>Second level</a:t>
+            </a:r>
+          </a:p>
+          <a:p>
+            <a:pPr lvl="2"/>
+            <a:r>
+              <a:rPr lang="en-US" dirty="0"/>
+              <a:t>Third level</a:t>
+            </a:r>
+          </a:p>
+          <a:p>
+            <a:pPr lvl="3"/>
+            <a:r>
+              <a:rPr lang="en-US" dirty="0"/>
+              <a:t>Fourth level</a:t>
+            </a:r>
+          </a:p>
+          <a:p>
+            <a:pPr lvl="4"/>
+            <a:r>
+              <a:rPr lang="en-US" dirty="0"/>
+              <a:t>Fifth level</a:t>
+            </a:r>
+            <a:endParaRPr lang="en-GB" dirty="0"/>
+          </a:p>
+        </p:txBody>
+      </p:sp>
+      <p:sp>
+        <p:nvSpPr>
+          <p:cNvPr id="4" name="Content Placeholder 3"/>
+          <p:cNvSpPr>
+            <a:spLocks noGrp="1"/>
+          </p:cNvSpPr>
+          <p:nvPr>
+            <p:ph sz="half" idx="2"/>
+          </p:nvPr>
+        </p:nvSpPr>
+        <p:spPr>
+          <a:xfrm>
+            <a:off x="6197600" y="1600203"/>
+            <a:ext cx="5384800" cy="4525963"/>
+          </a:xfrm>
+        </p:spPr>
+        <p:txBody>
+          <a:bodyPr/>
+          <a:lstStyle>
+            <a:lvl1pPr>
+              <a:defRPr sz="2100" b="0"/>
+            </a:lvl1pPr>
+            <a:lvl2pPr>
+              <a:defRPr sz="1800" b="0"/>
+            </a:lvl2pPr>
+            <a:lvl3pPr>
+              <a:defRPr sz="1500" b="0"/>
+            </a:lvl3pPr>
+            <a:lvl4pPr>
+              <a:defRPr sz="1350" b="0"/>
+            </a:lvl4pPr>
+            <a:lvl5pPr>
+              <a:defRPr sz="1350" b="0"/>
+            </a:lvl5pPr>
+            <a:lvl6pPr>
+              <a:defRPr sz="1350"/>
+            </a:lvl6pPr>
+            <a:lvl7pPr>
+              <a:defRPr sz="1350"/>
+            </a:lvl7pPr>
+            <a:lvl8pPr>
+              <a:defRPr sz="1350"/>
+            </a:lvl8pPr>
+            <a:lvl9pPr>
+              <a:defRPr sz="1350"/>
+            </a:lvl9pPr>
+          </a:lstStyle>
+          <a:p>
+            <a:pPr lvl="0"/>
+            <a:r>
+              <a:rPr lang="en-US" dirty="0"/>
+              <a:t>Edit Master text styles</a:t>
+            </a:r>
+          </a:p>
+          <a:p>
+            <a:pPr lvl="1"/>
+            <a:r>
+              <a:rPr lang="en-US" dirty="0"/>
+              <a:t>Second level</a:t>
+            </a:r>
+          </a:p>
+          <a:p>
+            <a:pPr lvl="2"/>
+            <a:r>
+              <a:rPr lang="en-US" dirty="0"/>
+              <a:t>Third level</a:t>
+            </a:r>
+          </a:p>
+          <a:p>
+            <a:pPr lvl="3"/>
+            <a:r>
+              <a:rPr lang="en-US" dirty="0"/>
+              <a:t>Fourth level</a:t>
+            </a:r>
+          </a:p>
+          <a:p>
+            <a:pPr lvl="4"/>
+            <a:r>
+              <a:rPr lang="en-US" dirty="0"/>
+              <a:t>Fifth level</a:t>
+            </a:r>
+            <a:endParaRPr lang="en-GB" dirty="0"/>
+          </a:p>
+        </p:txBody>
+      </p:sp>
+      <p:sp>
+        <p:nvSpPr>
+          <p:cNvPr id="5" name="Date Placeholder 4"/>
+          <p:cNvSpPr>
+            <a:spLocks noGrp="1"/>
+          </p:cNvSpPr>
+          <p:nvPr>
+            <p:ph type="dt" sz="half" idx="10"/>
+          </p:nvPr>
+        </p:nvSpPr>
+        <p:spPr>
+          <a:xfrm>
+            <a:off x="8880000" y="36001"/>
+            <a:ext cx="2844800" cy="365125"/>
+          </a:xfrm>
+          <a:prstGeom prst="rect">
+            <a:avLst/>
+          </a:prstGeom>
+        </p:spPr>
+        <p:txBody>
+          <a:bodyPr/>
+          <a:lstStyle/>
+          <a:p>
+            <a:fld id="{3BEE57D4-7D8E-4CAC-A6F8-EA8D2D023BF8}" type="datetime1">
+              <a:rPr lang="en-US" smtClean="0"/>
+              <a:t>2/11/2026</a:t>
+            </a:fld>
+            <a:endParaRPr lang="en-US"/>
+          </a:p>
+        </p:txBody>
+      </p:sp>
+      <p:sp>
+        <p:nvSpPr>
+          <p:cNvPr id="7" name="Slide Number Placeholder 6"/>
+          <p:cNvSpPr>
+            <a:spLocks noGrp="1"/>
+          </p:cNvSpPr>
+          <p:nvPr>
+            <p:ph type="sldNum" sz="quarter" idx="12"/>
+          </p:nvPr>
+        </p:nvSpPr>
+        <p:spPr/>
+        <p:txBody>
+          <a:bodyPr/>
+          <a:lstStyle/>
+          <a:p>
+            <a:fld id="{C5EF2332-01BF-834F-8236-50238282D533}" type="slidenum">
+              <a:rPr lang="en-US" smtClean="0"/>
+              <a:t>‹#›</a:t>
+            </a:fld>
+            <a:endParaRPr lang="en-US"/>
+          </a:p>
+        </p:txBody>
+      </p:sp>
+      <p:sp>
+        <p:nvSpPr>
+          <p:cNvPr id="9" name="Title 1">
+            <a:extLst>
+              <a:ext uri="{FF2B5EF4-FFF2-40B4-BE49-F238E27FC236}">
+                <a16:creationId xmlns:a16="http://schemas.microsoft.com/office/drawing/2014/main" id="{3CBAC482-A8EE-46B0-8692-517A7423EF00}"/>
+              </a:ext>
+            </a:extLst>
+          </p:cNvPr>
+          <p:cNvSpPr>
+            <a:spLocks noGrp="1"/>
+          </p:cNvSpPr>
+          <p:nvPr>
+            <p:ph type="title"/>
+          </p:nvPr>
+        </p:nvSpPr>
+        <p:spPr>
+          <a:xfrm>
+            <a:off x="609600" y="161904"/>
+            <a:ext cx="10972800" cy="1143000"/>
+          </a:xfrm>
+        </p:spPr>
+        <p:txBody>
+          <a:bodyPr/>
+          <a:lstStyle/>
+          <a:p>
+            <a:r>
+              <a:rPr lang="en-US" dirty="0"/>
+              <a:t>Click to edit Master title style</a:t>
+            </a:r>
+            <a:endParaRPr lang="en-FI" dirty="0"/>
+          </a:p>
+        </p:txBody>
+      </p:sp>
+    </p:spTree>
+    <p:extLst>
+      <p:ext uri="{BB962C8B-B14F-4D97-AF65-F5344CB8AC3E}">
+        <p14:creationId xmlns:p14="http://schemas.microsoft.com/office/powerpoint/2010/main" val="2350457780"/>
+      </p:ext>
+    </p:extLst>
+  </p:cSld>
+  <p:clrMapOvr>
+    <a:masterClrMapping/>
+  </p:clrMapOvr>
+</p:sldLayout>
+</file>
+
+<file path=ppt/slideLayouts/slideLayout34.xml><?xml version="1.0" encoding="utf-8"?>
+<p:sldLayout xmlns:a="http://schemas.openxmlformats.org/drawingml/2006/main" xmlns:r="http://schemas.openxmlformats.org/officeDocument/2006/relationships" xmlns:p="http://schemas.openxmlformats.org/presentationml/2006/main" preserve="1" userDrawn="1">
+  <p:cSld name="Two Content 2 Custom">
+    <p:spTree>
+      <p:nvGrpSpPr>
+        <p:cNvPr id="1" name=""/>
+        <p:cNvGrpSpPr/>
+        <p:nvPr/>
+      </p:nvGrpSpPr>
+      <p:grpSpPr>
+        <a:xfrm>
+          <a:off x="0" y="0"/>
+          <a:ext cx="0" cy="0"/>
+          <a:chOff x="0" y="0"/>
+          <a:chExt cx="0" cy="0"/>
+        </a:xfrm>
+      </p:grpSpPr>
+      <p:sp>
+        <p:nvSpPr>
+          <p:cNvPr id="3" name="Content Placeholder 2"/>
+          <p:cNvSpPr>
+            <a:spLocks noGrp="1"/>
+          </p:cNvSpPr>
+          <p:nvPr>
+            <p:ph sz="half" idx="1"/>
+          </p:nvPr>
+        </p:nvSpPr>
+        <p:spPr>
+          <a:xfrm>
+            <a:off x="609600" y="1399898"/>
+            <a:ext cx="10972800" cy="1828797"/>
+          </a:xfrm>
+        </p:spPr>
+        <p:txBody>
+          <a:bodyPr/>
+          <a:lstStyle>
+            <a:lvl1pPr>
+              <a:defRPr sz="2100" b="0"/>
+            </a:lvl1pPr>
+            <a:lvl2pPr>
+              <a:defRPr sz="1800" b="0"/>
+            </a:lvl2pPr>
+            <a:lvl3pPr>
+              <a:defRPr sz="1500" b="0"/>
+            </a:lvl3pPr>
+            <a:lvl4pPr>
+              <a:defRPr sz="1350" b="0"/>
+            </a:lvl4pPr>
+            <a:lvl5pPr>
+              <a:defRPr sz="1350" b="0"/>
+            </a:lvl5pPr>
+            <a:lvl6pPr>
+              <a:defRPr sz="1350"/>
+            </a:lvl6pPr>
+            <a:lvl7pPr>
+              <a:defRPr sz="1350"/>
+            </a:lvl7pPr>
+            <a:lvl8pPr>
+              <a:defRPr sz="1350"/>
+            </a:lvl8pPr>
+            <a:lvl9pPr>
+              <a:defRPr sz="1350"/>
+            </a:lvl9pPr>
+          </a:lstStyle>
+          <a:p>
+            <a:pPr lvl="0"/>
+            <a:r>
+              <a:rPr lang="en-US" dirty="0"/>
+              <a:t>Edit Master text styles</a:t>
+            </a:r>
+          </a:p>
+          <a:p>
+            <a:pPr lvl="1"/>
+            <a:r>
+              <a:rPr lang="en-US" dirty="0"/>
+              <a:t>Second level</a:t>
+            </a:r>
+          </a:p>
+          <a:p>
+            <a:pPr lvl="2"/>
+            <a:r>
+              <a:rPr lang="en-US" dirty="0"/>
+              <a:t>Third level</a:t>
+            </a:r>
+          </a:p>
+          <a:p>
+            <a:pPr lvl="3"/>
+            <a:r>
+              <a:rPr lang="en-US" dirty="0"/>
+              <a:t>Fourth level</a:t>
+            </a:r>
+          </a:p>
+          <a:p>
+            <a:pPr lvl="4"/>
+            <a:r>
+              <a:rPr lang="en-US" dirty="0"/>
+              <a:t>Fifth level</a:t>
+            </a:r>
+            <a:endParaRPr lang="en-GB" dirty="0"/>
+          </a:p>
+        </p:txBody>
+      </p:sp>
+      <p:sp>
+        <p:nvSpPr>
+          <p:cNvPr id="4" name="Content Placeholder 3"/>
+          <p:cNvSpPr>
+            <a:spLocks noGrp="1"/>
+          </p:cNvSpPr>
+          <p:nvPr>
+            <p:ph sz="half" idx="2"/>
+          </p:nvPr>
+        </p:nvSpPr>
+        <p:spPr>
+          <a:xfrm>
+            <a:off x="609600" y="3611565"/>
+            <a:ext cx="10972800" cy="2514601"/>
+          </a:xfrm>
+        </p:spPr>
+        <p:txBody>
+          <a:bodyPr/>
+          <a:lstStyle>
+            <a:lvl1pPr>
+              <a:defRPr sz="2100" b="0"/>
+            </a:lvl1pPr>
+            <a:lvl2pPr>
+              <a:defRPr sz="1800" b="0"/>
+            </a:lvl2pPr>
+            <a:lvl3pPr>
+              <a:defRPr sz="1500" b="0"/>
+            </a:lvl3pPr>
+            <a:lvl4pPr>
+              <a:defRPr sz="1350" b="0"/>
+            </a:lvl4pPr>
+            <a:lvl5pPr>
+              <a:defRPr sz="1350" b="0"/>
+            </a:lvl5pPr>
+            <a:lvl6pPr>
+              <a:defRPr sz="1350"/>
+            </a:lvl6pPr>
+            <a:lvl7pPr>
+              <a:defRPr sz="1350"/>
+            </a:lvl7pPr>
+            <a:lvl8pPr>
+              <a:defRPr sz="1350"/>
+            </a:lvl8pPr>
+            <a:lvl9pPr>
+              <a:defRPr sz="1350"/>
+            </a:lvl9pPr>
+          </a:lstStyle>
+          <a:p>
+            <a:pPr lvl="0"/>
+            <a:r>
+              <a:rPr lang="en-US" dirty="0"/>
+              <a:t>Edit Master text styles</a:t>
+            </a:r>
+          </a:p>
+          <a:p>
+            <a:pPr lvl="1"/>
+            <a:r>
+              <a:rPr lang="en-US" dirty="0"/>
+              <a:t>Second level</a:t>
+            </a:r>
+          </a:p>
+          <a:p>
+            <a:pPr lvl="2"/>
+            <a:r>
+              <a:rPr lang="en-US" dirty="0"/>
+              <a:t>Third level</a:t>
+            </a:r>
+          </a:p>
+          <a:p>
+            <a:pPr lvl="3"/>
+            <a:r>
+              <a:rPr lang="en-US" dirty="0"/>
+              <a:t>Fourth level</a:t>
+            </a:r>
+          </a:p>
+          <a:p>
+            <a:pPr lvl="4"/>
+            <a:r>
+              <a:rPr lang="en-US" dirty="0"/>
+              <a:t>Fifth level</a:t>
+            </a:r>
+            <a:endParaRPr lang="en-GB" dirty="0"/>
+          </a:p>
+        </p:txBody>
+      </p:sp>
+      <p:sp>
+        <p:nvSpPr>
+          <p:cNvPr id="5" name="Date Placeholder 4"/>
+          <p:cNvSpPr>
+            <a:spLocks noGrp="1"/>
+          </p:cNvSpPr>
+          <p:nvPr>
+            <p:ph type="dt" sz="half" idx="10"/>
+          </p:nvPr>
+        </p:nvSpPr>
+        <p:spPr>
+          <a:xfrm>
+            <a:off x="8880000" y="36001"/>
+            <a:ext cx="2844800" cy="365125"/>
+          </a:xfrm>
+          <a:prstGeom prst="rect">
+            <a:avLst/>
+          </a:prstGeom>
+        </p:spPr>
+        <p:txBody>
+          <a:bodyPr/>
+          <a:lstStyle/>
+          <a:p>
+            <a:fld id="{36DC5657-96FF-4603-9E96-6547A1338115}" type="datetime1">
+              <a:rPr lang="en-US" smtClean="0"/>
+              <a:t>2/11/2026</a:t>
+            </a:fld>
+            <a:endParaRPr lang="en-US"/>
+          </a:p>
+        </p:txBody>
+      </p:sp>
+      <p:sp>
+        <p:nvSpPr>
+          <p:cNvPr id="7" name="Slide Number Placeholder 6"/>
+          <p:cNvSpPr>
+            <a:spLocks noGrp="1"/>
+          </p:cNvSpPr>
+          <p:nvPr>
+            <p:ph type="sldNum" sz="quarter" idx="12"/>
+          </p:nvPr>
+        </p:nvSpPr>
+        <p:spPr/>
+        <p:txBody>
+          <a:bodyPr/>
+          <a:lstStyle/>
+          <a:p>
+            <a:fld id="{C5EF2332-01BF-834F-8236-50238282D533}" type="slidenum">
+              <a:rPr lang="en-US" smtClean="0"/>
+              <a:t>‹#›</a:t>
+            </a:fld>
+            <a:endParaRPr lang="en-US"/>
+          </a:p>
+        </p:txBody>
+      </p:sp>
+      <p:sp>
+        <p:nvSpPr>
+          <p:cNvPr id="9" name="Title 1">
+            <a:extLst>
+              <a:ext uri="{FF2B5EF4-FFF2-40B4-BE49-F238E27FC236}">
+                <a16:creationId xmlns:a16="http://schemas.microsoft.com/office/drawing/2014/main" id="{2726C164-E959-4FFE-83BE-0B5745E96A4C}"/>
+              </a:ext>
+            </a:extLst>
+          </p:cNvPr>
+          <p:cNvSpPr>
+            <a:spLocks noGrp="1"/>
+          </p:cNvSpPr>
+          <p:nvPr>
+            <p:ph type="title"/>
+          </p:nvPr>
+        </p:nvSpPr>
+        <p:spPr>
+          <a:xfrm>
+            <a:off x="609600" y="161904"/>
+            <a:ext cx="10972800" cy="1143000"/>
+          </a:xfrm>
+        </p:spPr>
+        <p:txBody>
+          <a:bodyPr/>
+          <a:lstStyle/>
+          <a:p>
+            <a:r>
+              <a:rPr lang="en-US" dirty="0"/>
+              <a:t>Click to edit Master title style</a:t>
+            </a:r>
+            <a:endParaRPr lang="en-FI" dirty="0"/>
+          </a:p>
+        </p:txBody>
+      </p:sp>
+    </p:spTree>
+    <p:extLst>
+      <p:ext uri="{BB962C8B-B14F-4D97-AF65-F5344CB8AC3E}">
+        <p14:creationId xmlns:p14="http://schemas.microsoft.com/office/powerpoint/2010/main" val="305536998"/>
+      </p:ext>
+    </p:extLst>
+  </p:cSld>
+  <p:clrMapOvr>
+    <a:masterClrMapping/>
+  </p:clrMapOvr>
+</p:sldLayout>
+</file>
+
+<file path=ppt/slideLayouts/slideLayout35.xml><?xml version="1.0" encoding="utf-8"?>
+<p:sldLayout xmlns:a="http://schemas.openxmlformats.org/drawingml/2006/main" xmlns:r="http://schemas.openxmlformats.org/officeDocument/2006/relationships" xmlns:p="http://schemas.openxmlformats.org/presentationml/2006/main" preserve="1" userDrawn="1">
+  <p:cSld name="Comparison">
+    <p:spTree>
+      <p:nvGrpSpPr>
+        <p:cNvPr id="1" name=""/>
+        <p:cNvGrpSpPr/>
+        <p:nvPr/>
+      </p:nvGrpSpPr>
+      <p:grpSpPr>
+        <a:xfrm>
+          <a:off x="0" y="0"/>
+          <a:ext cx="0" cy="0"/>
+          <a:chOff x="0" y="0"/>
+          <a:chExt cx="0" cy="0"/>
+        </a:xfrm>
+      </p:grpSpPr>
+      <p:sp>
+        <p:nvSpPr>
+          <p:cNvPr id="3" name="Text Placeholder 2"/>
+          <p:cNvSpPr>
+            <a:spLocks noGrp="1"/>
+          </p:cNvSpPr>
+          <p:nvPr>
+            <p:ph type="body" idx="1"/>
+          </p:nvPr>
+        </p:nvSpPr>
+        <p:spPr>
+          <a:xfrm>
+            <a:off x="609600" y="1535113"/>
+            <a:ext cx="5386917" cy="639762"/>
+          </a:xfrm>
+        </p:spPr>
+        <p:txBody>
+          <a:bodyPr anchor="b"/>
+          <a:lstStyle>
+            <a:lvl1pPr marL="0" indent="0">
+              <a:buNone/>
+              <a:defRPr sz="1800" b="1">
+                <a:solidFill>
+                  <a:srgbClr val="0070C0"/>
+                </a:solidFill>
+              </a:defRPr>
+            </a:lvl1pPr>
+            <a:lvl2pPr marL="342900" indent="0">
+              <a:buNone/>
+              <a:defRPr sz="1500" b="1"/>
+            </a:lvl2pPr>
+            <a:lvl3pPr marL="685800" indent="0">
+              <a:buNone/>
+              <a:defRPr sz="1350" b="1"/>
+            </a:lvl3pPr>
+            <a:lvl4pPr marL="1028700" indent="0">
+              <a:buNone/>
+              <a:defRPr sz="1200" b="1"/>
+            </a:lvl4pPr>
+            <a:lvl5pPr marL="1371600" indent="0">
+              <a:buNone/>
+              <a:defRPr sz="1200" b="1"/>
+            </a:lvl5pPr>
+            <a:lvl6pPr marL="1714500" indent="0">
+              <a:buNone/>
+              <a:defRPr sz="1200" b="1"/>
+            </a:lvl6pPr>
+            <a:lvl7pPr marL="2057400" indent="0">
+              <a:buNone/>
+              <a:defRPr sz="1200" b="1"/>
+            </a:lvl7pPr>
+            <a:lvl8pPr marL="2400300" indent="0">
+              <a:buNone/>
+              <a:defRPr sz="1200" b="1"/>
+            </a:lvl8pPr>
+            <a:lvl9pPr marL="2743200" indent="0">
+              <a:buNone/>
+              <a:defRPr sz="1200" b="1"/>
+            </a:lvl9pPr>
+          </a:lstStyle>
+          <a:p>
+            <a:pPr lvl="0"/>
+            <a:r>
+              <a:rPr lang="en-US"/>
+              <a:t>Edit Master text styles</a:t>
+            </a:r>
+          </a:p>
+        </p:txBody>
+      </p:sp>
+      <p:sp>
+        <p:nvSpPr>
+          <p:cNvPr id="4" name="Content Placeholder 3"/>
+          <p:cNvSpPr>
+            <a:spLocks noGrp="1"/>
+          </p:cNvSpPr>
+          <p:nvPr>
+            <p:ph sz="half" idx="2"/>
+          </p:nvPr>
+        </p:nvSpPr>
+        <p:spPr>
+          <a:xfrm>
+            <a:off x="609600" y="2174875"/>
+            <a:ext cx="5386917" cy="3951288"/>
+          </a:xfrm>
+        </p:spPr>
+        <p:txBody>
+          <a:bodyPr/>
+          <a:lstStyle>
+            <a:lvl1pPr>
+              <a:defRPr sz="1800"/>
+            </a:lvl1pPr>
+            <a:lvl2pPr>
+              <a:defRPr sz="1500"/>
+            </a:lvl2pPr>
+            <a:lvl3pPr>
+              <a:defRPr sz="1350"/>
+            </a:lvl3pPr>
+            <a:lvl4pPr>
+              <a:defRPr sz="1200"/>
+            </a:lvl4pPr>
+            <a:lvl5pPr>
+              <a:defRPr sz="1200"/>
+            </a:lvl5pPr>
+            <a:lvl6pPr>
+              <a:defRPr sz="1200"/>
+            </a:lvl6pPr>
+            <a:lvl7pPr>
+              <a:defRPr sz="1200"/>
+            </a:lvl7pPr>
+            <a:lvl8pPr>
+              <a:defRPr sz="1200"/>
+            </a:lvl8pPr>
+            <a:lvl9pPr>
+              <a:defRPr sz="1200"/>
+            </a:lvl9pPr>
+          </a:lstStyle>
+          <a:p>
+            <a:pPr lvl="0"/>
+            <a:r>
+              <a:rPr lang="en-US" dirty="0"/>
+              <a:t>Edit Master text styles</a:t>
+            </a:r>
+          </a:p>
+          <a:p>
+            <a:pPr lvl="1"/>
+            <a:r>
+              <a:rPr lang="en-US" dirty="0"/>
+              <a:t>Second level</a:t>
+            </a:r>
+          </a:p>
+          <a:p>
+            <a:pPr lvl="2"/>
+            <a:r>
+              <a:rPr lang="en-US" dirty="0"/>
+              <a:t>Third level</a:t>
+            </a:r>
+          </a:p>
+          <a:p>
+            <a:pPr lvl="3"/>
+            <a:r>
+              <a:rPr lang="en-US" dirty="0"/>
+              <a:t>Fourth level</a:t>
+            </a:r>
+          </a:p>
+          <a:p>
+            <a:pPr lvl="4"/>
+            <a:r>
+              <a:rPr lang="en-US" dirty="0"/>
+              <a:t>Fifth level</a:t>
+            </a:r>
+            <a:endParaRPr lang="en-GB" dirty="0"/>
+          </a:p>
+        </p:txBody>
+      </p:sp>
+      <p:sp>
+        <p:nvSpPr>
+          <p:cNvPr id="5" name="Text Placeholder 4"/>
+          <p:cNvSpPr>
+            <a:spLocks noGrp="1"/>
+          </p:cNvSpPr>
+          <p:nvPr>
+            <p:ph type="body" sz="quarter" idx="3"/>
+          </p:nvPr>
+        </p:nvSpPr>
+        <p:spPr>
+          <a:xfrm>
+            <a:off x="6193369" y="1535113"/>
+            <a:ext cx="5389033" cy="639762"/>
+          </a:xfrm>
+        </p:spPr>
+        <p:txBody>
+          <a:bodyPr anchor="b"/>
+          <a:lstStyle>
+            <a:lvl1pPr marL="0" indent="0">
+              <a:buNone/>
+              <a:defRPr sz="1800" b="1">
+                <a:solidFill>
+                  <a:srgbClr val="0070C0"/>
+                </a:solidFill>
+              </a:defRPr>
+            </a:lvl1pPr>
+            <a:lvl2pPr marL="342900" indent="0">
+              <a:buNone/>
+              <a:defRPr sz="1500" b="1"/>
+            </a:lvl2pPr>
+            <a:lvl3pPr marL="685800" indent="0">
+              <a:buNone/>
+              <a:defRPr sz="1350" b="1"/>
+            </a:lvl3pPr>
+            <a:lvl4pPr marL="1028700" indent="0">
+              <a:buNone/>
+              <a:defRPr sz="1200" b="1"/>
+            </a:lvl4pPr>
+            <a:lvl5pPr marL="1371600" indent="0">
+              <a:buNone/>
+              <a:defRPr sz="1200" b="1"/>
+            </a:lvl5pPr>
+            <a:lvl6pPr marL="1714500" indent="0">
+              <a:buNone/>
+              <a:defRPr sz="1200" b="1"/>
+            </a:lvl6pPr>
+            <a:lvl7pPr marL="2057400" indent="0">
+              <a:buNone/>
+              <a:defRPr sz="1200" b="1"/>
+            </a:lvl7pPr>
+            <a:lvl8pPr marL="2400300" indent="0">
+              <a:buNone/>
+              <a:defRPr sz="1200" b="1"/>
+            </a:lvl8pPr>
+            <a:lvl9pPr marL="2743200" indent="0">
+              <a:buNone/>
+              <a:defRPr sz="1200" b="1"/>
+            </a:lvl9pPr>
+          </a:lstStyle>
+          <a:p>
+            <a:pPr lvl="0"/>
+            <a:r>
+              <a:rPr lang="en-US"/>
+              <a:t>Edit Master text styles</a:t>
+            </a:r>
+          </a:p>
+        </p:txBody>
+      </p:sp>
+      <p:sp>
+        <p:nvSpPr>
+          <p:cNvPr id="6" name="Content Placeholder 5"/>
+          <p:cNvSpPr>
+            <a:spLocks noGrp="1"/>
+          </p:cNvSpPr>
+          <p:nvPr>
+            <p:ph sz="quarter" idx="4"/>
+          </p:nvPr>
+        </p:nvSpPr>
+        <p:spPr>
+          <a:xfrm>
+            <a:off x="6193369" y="2174875"/>
+            <a:ext cx="5389033" cy="3951288"/>
+          </a:xfrm>
+        </p:spPr>
+        <p:txBody>
+          <a:bodyPr/>
+          <a:lstStyle>
+            <a:lvl1pPr>
+              <a:defRPr sz="1800"/>
+            </a:lvl1pPr>
+            <a:lvl2pPr>
+              <a:defRPr sz="1500"/>
+            </a:lvl2pPr>
+            <a:lvl3pPr>
+              <a:defRPr sz="1350"/>
+            </a:lvl3pPr>
+            <a:lvl4pPr>
+              <a:defRPr sz="1200"/>
+            </a:lvl4pPr>
+            <a:lvl5pPr>
+              <a:defRPr sz="1200"/>
+            </a:lvl5pPr>
+            <a:lvl6pPr>
+              <a:defRPr sz="1200"/>
+            </a:lvl6pPr>
+            <a:lvl7pPr>
+              <a:defRPr sz="1200"/>
+            </a:lvl7pPr>
+            <a:lvl8pPr>
+              <a:defRPr sz="1200"/>
+            </a:lvl8pPr>
+            <a:lvl9pPr>
+              <a:defRPr sz="1200"/>
+            </a:lvl9pPr>
+          </a:lstStyle>
+          <a:p>
+            <a:pPr lvl="0"/>
+            <a:r>
+              <a:rPr lang="en-US"/>
+              <a:t>Edit Master text styles</a:t>
+            </a:r>
+          </a:p>
+          <a:p>
+            <a:pPr lvl="1"/>
+            <a:r>
+              <a:rPr lang="en-US"/>
+              <a:t>Second level</a:t>
+            </a:r>
+          </a:p>
+          <a:p>
+            <a:pPr lvl="2"/>
+            <a:r>
+              <a:rPr lang="en-US"/>
+              <a:t>Third level</a:t>
+            </a:r>
+          </a:p>
+          <a:p>
+            <a:pPr lvl="3"/>
+            <a:r>
+              <a:rPr lang="en-US"/>
+              <a:t>Fourth level</a:t>
+            </a:r>
+          </a:p>
+          <a:p>
+            <a:pPr lvl="4"/>
+            <a:r>
+              <a:rPr lang="en-US"/>
+              <a:t>Fifth level</a:t>
+            </a:r>
+            <a:endParaRPr lang="en-GB"/>
+          </a:p>
+        </p:txBody>
+      </p:sp>
+      <p:sp>
+        <p:nvSpPr>
+          <p:cNvPr id="7" name="Date Placeholder 6"/>
+          <p:cNvSpPr>
+            <a:spLocks noGrp="1"/>
+          </p:cNvSpPr>
+          <p:nvPr>
+            <p:ph type="dt" sz="half" idx="10"/>
+          </p:nvPr>
+        </p:nvSpPr>
+        <p:spPr>
+          <a:xfrm>
+            <a:off x="8880000" y="36001"/>
+            <a:ext cx="2844800" cy="365125"/>
+          </a:xfrm>
+          <a:prstGeom prst="rect">
+            <a:avLst/>
+          </a:prstGeom>
+        </p:spPr>
+        <p:txBody>
+          <a:bodyPr/>
+          <a:lstStyle/>
+          <a:p>
+            <a:fld id="{34D34F35-57AC-4AAB-AFB8-8AD2BF1D474A}" type="datetime1">
+              <a:rPr lang="en-US" smtClean="0"/>
+              <a:t>2/11/2026</a:t>
+            </a:fld>
+            <a:endParaRPr lang="en-US"/>
+          </a:p>
+        </p:txBody>
+      </p:sp>
+      <p:sp>
+        <p:nvSpPr>
+          <p:cNvPr id="9" name="Slide Number Placeholder 8"/>
+          <p:cNvSpPr>
+            <a:spLocks noGrp="1"/>
+          </p:cNvSpPr>
+          <p:nvPr>
+            <p:ph type="sldNum" sz="quarter" idx="12"/>
+          </p:nvPr>
+        </p:nvSpPr>
+        <p:spPr/>
+        <p:txBody>
+          <a:bodyPr/>
+          <a:lstStyle/>
+          <a:p>
+            <a:fld id="{C5EF2332-01BF-834F-8236-50238282D533}" type="slidenum">
+              <a:rPr lang="en-US" smtClean="0"/>
+              <a:t>‹#›</a:t>
+            </a:fld>
+            <a:endParaRPr lang="en-US"/>
+          </a:p>
+        </p:txBody>
+      </p:sp>
+      <p:sp>
+        <p:nvSpPr>
+          <p:cNvPr id="11" name="Title 1">
+            <a:extLst>
+              <a:ext uri="{FF2B5EF4-FFF2-40B4-BE49-F238E27FC236}">
+                <a16:creationId xmlns:a16="http://schemas.microsoft.com/office/drawing/2014/main" id="{C8C00DE5-D6C4-4453-9FB6-84EB61F43BE9}"/>
+              </a:ext>
+            </a:extLst>
+          </p:cNvPr>
+          <p:cNvSpPr>
+            <a:spLocks noGrp="1"/>
+          </p:cNvSpPr>
+          <p:nvPr>
+            <p:ph type="title"/>
+          </p:nvPr>
+        </p:nvSpPr>
+        <p:spPr>
+          <a:xfrm>
+            <a:off x="609600" y="161904"/>
+            <a:ext cx="10972800" cy="1143000"/>
+          </a:xfrm>
+        </p:spPr>
+        <p:txBody>
+          <a:bodyPr/>
+          <a:lstStyle/>
+          <a:p>
+            <a:r>
+              <a:rPr lang="en-US" dirty="0"/>
+              <a:t>Click to edit Master title style</a:t>
+            </a:r>
+            <a:endParaRPr lang="en-FI" dirty="0"/>
+          </a:p>
+        </p:txBody>
+      </p:sp>
+    </p:spTree>
+    <p:extLst>
+      <p:ext uri="{BB962C8B-B14F-4D97-AF65-F5344CB8AC3E}">
+        <p14:creationId xmlns:p14="http://schemas.microsoft.com/office/powerpoint/2010/main" val="3190656918"/>
+      </p:ext>
+    </p:extLst>
+  </p:cSld>
+  <p:clrMapOvr>
+    <a:masterClrMapping/>
+  </p:clrMapOvr>
+</p:sldLayout>
+</file>
+
+<file path=ppt/slideLayouts/slideLayout36.xml><?xml version="1.0" encoding="utf-8"?>
+<p:sldLayout xmlns:a="http://schemas.openxmlformats.org/drawingml/2006/main" xmlns:r="http://schemas.openxmlformats.org/officeDocument/2006/relationships" xmlns:p="http://schemas.openxmlformats.org/presentationml/2006/main" preserve="1" userDrawn="1">
+  <p:cSld name="Title Only">
+    <p:spTree>
+      <p:nvGrpSpPr>
+        <p:cNvPr id="1" name=""/>
+        <p:cNvGrpSpPr/>
+        <p:nvPr/>
+      </p:nvGrpSpPr>
+      <p:grpSpPr>
+        <a:xfrm>
+          <a:off x="0" y="0"/>
+          <a:ext cx="0" cy="0"/>
+          <a:chOff x="0" y="0"/>
+          <a:chExt cx="0" cy="0"/>
+        </a:xfrm>
+      </p:grpSpPr>
+      <p:sp>
+        <p:nvSpPr>
+          <p:cNvPr id="3" name="Date Placeholder 2"/>
+          <p:cNvSpPr>
+            <a:spLocks noGrp="1"/>
+          </p:cNvSpPr>
+          <p:nvPr>
+            <p:ph type="dt" sz="half" idx="10"/>
+          </p:nvPr>
+        </p:nvSpPr>
+        <p:spPr>
+          <a:xfrm>
+            <a:off x="8880000" y="36001"/>
+            <a:ext cx="2844800" cy="365125"/>
+          </a:xfrm>
+          <a:prstGeom prst="rect">
+            <a:avLst/>
+          </a:prstGeom>
+        </p:spPr>
+        <p:txBody>
+          <a:bodyPr/>
+          <a:lstStyle/>
+          <a:p>
+            <a:fld id="{1C6CF003-7403-4364-812A-C53D3E68CF64}" type="datetime1">
+              <a:rPr lang="en-US" smtClean="0"/>
+              <a:t>2/11/2026</a:t>
+            </a:fld>
+            <a:endParaRPr lang="en-US"/>
+          </a:p>
+        </p:txBody>
+      </p:sp>
+      <p:sp>
+        <p:nvSpPr>
+          <p:cNvPr id="5" name="Slide Number Placeholder 4"/>
+          <p:cNvSpPr>
+            <a:spLocks noGrp="1"/>
+          </p:cNvSpPr>
+          <p:nvPr>
+            <p:ph type="sldNum" sz="quarter" idx="12"/>
+          </p:nvPr>
+        </p:nvSpPr>
+        <p:spPr/>
+        <p:txBody>
+          <a:bodyPr/>
+          <a:lstStyle/>
+          <a:p>
+            <a:fld id="{C5EF2332-01BF-834F-8236-50238282D533}" type="slidenum">
+              <a:rPr lang="en-US" smtClean="0"/>
+              <a:t>‹#›</a:t>
+            </a:fld>
+            <a:endParaRPr lang="en-US"/>
+          </a:p>
+        </p:txBody>
+      </p:sp>
+      <p:sp>
+        <p:nvSpPr>
+          <p:cNvPr id="7" name="Title 1">
+            <a:extLst>
+              <a:ext uri="{FF2B5EF4-FFF2-40B4-BE49-F238E27FC236}">
+                <a16:creationId xmlns:a16="http://schemas.microsoft.com/office/drawing/2014/main" id="{F768BD67-5475-42A8-A4B4-36BD4F066A4E}"/>
+              </a:ext>
+            </a:extLst>
+          </p:cNvPr>
+          <p:cNvSpPr>
+            <a:spLocks noGrp="1"/>
+          </p:cNvSpPr>
+          <p:nvPr>
+            <p:ph type="title"/>
+          </p:nvPr>
+        </p:nvSpPr>
+        <p:spPr>
+          <a:xfrm>
+            <a:off x="609600" y="161904"/>
+            <a:ext cx="10972800" cy="1143000"/>
+          </a:xfrm>
+        </p:spPr>
+        <p:txBody>
+          <a:bodyPr/>
+          <a:lstStyle/>
+          <a:p>
+            <a:r>
+              <a:rPr lang="en-US" dirty="0"/>
+              <a:t>Click to edit Master title style</a:t>
+            </a:r>
+            <a:endParaRPr lang="en-FI" dirty="0"/>
+          </a:p>
+        </p:txBody>
+      </p:sp>
+    </p:spTree>
+    <p:extLst>
+      <p:ext uri="{BB962C8B-B14F-4D97-AF65-F5344CB8AC3E}">
+        <p14:creationId xmlns:p14="http://schemas.microsoft.com/office/powerpoint/2010/main" val="3955846283"/>
+      </p:ext>
+    </p:extLst>
+  </p:cSld>
+  <p:clrMapOvr>
+    <a:masterClrMapping/>
+  </p:clrMapOvr>
+</p:sldLayout>
+</file>
+
+<file path=ppt/slideLayouts/slideLayout37.xml><?xml version="1.0" encoding="utf-8"?>
+<p:sldLayout xmlns:a="http://schemas.openxmlformats.org/drawingml/2006/main" xmlns:r="http://schemas.openxmlformats.org/officeDocument/2006/relationships" xmlns:p="http://schemas.openxmlformats.org/presentationml/2006/main" type="blank" preserve="1">
+  <p:cSld name="Blank">
+    <p:spTree>
+      <p:nvGrpSpPr>
+        <p:cNvPr id="1" name=""/>
+        <p:cNvGrpSpPr/>
+        <p:nvPr/>
+      </p:nvGrpSpPr>
+      <p:grpSpPr>
+        <a:xfrm>
+          <a:off x="0" y="0"/>
+          <a:ext cx="0" cy="0"/>
+          <a:chOff x="0" y="0"/>
+          <a:chExt cx="0" cy="0"/>
+        </a:xfrm>
+      </p:grpSpPr>
+      <p:sp>
+        <p:nvSpPr>
+          <p:cNvPr id="2" name="Date Placeholder 1"/>
+          <p:cNvSpPr>
+            <a:spLocks noGrp="1"/>
+          </p:cNvSpPr>
+          <p:nvPr>
+            <p:ph type="dt" sz="half" idx="10"/>
+          </p:nvPr>
+        </p:nvSpPr>
+        <p:spPr>
+          <a:xfrm>
+            <a:off x="8880000" y="36001"/>
+            <a:ext cx="2844800" cy="365125"/>
+          </a:xfrm>
+          <a:prstGeom prst="rect">
+            <a:avLst/>
+          </a:prstGeom>
+        </p:spPr>
+        <p:txBody>
+          <a:bodyPr/>
+          <a:lstStyle/>
+          <a:p>
+            <a:fld id="{D79C06E5-F2B0-47D3-A6E8-A52CDE214C35}" type="datetime1">
+              <a:rPr lang="en-US" smtClean="0"/>
+              <a:t>2/11/2026</a:t>
+            </a:fld>
+            <a:endParaRPr lang="en-US"/>
+          </a:p>
+        </p:txBody>
+      </p:sp>
+      <p:sp>
+        <p:nvSpPr>
+          <p:cNvPr id="4" name="Slide Number Placeholder 3"/>
+          <p:cNvSpPr>
+            <a:spLocks noGrp="1"/>
+          </p:cNvSpPr>
+          <p:nvPr>
+            <p:ph type="sldNum" sz="quarter" idx="12"/>
+          </p:nvPr>
+        </p:nvSpPr>
+        <p:spPr/>
+        <p:txBody>
+          <a:bodyPr/>
+          <a:lstStyle/>
+          <a:p>
+            <a:fld id="{C5EF2332-01BF-834F-8236-50238282D533}" type="slidenum">
+              <a:rPr lang="en-US" smtClean="0"/>
+              <a:t>‹#›</a:t>
+            </a:fld>
+            <a:endParaRPr lang="en-US"/>
+          </a:p>
+        </p:txBody>
+      </p:sp>
+    </p:spTree>
+    <p:extLst>
+      <p:ext uri="{BB962C8B-B14F-4D97-AF65-F5344CB8AC3E}">
+        <p14:creationId xmlns:p14="http://schemas.microsoft.com/office/powerpoint/2010/main" val="994048502"/>
+      </p:ext>
+    </p:extLst>
+  </p:cSld>
+  <p:clrMapOvr>
+    <a:masterClrMapping/>
+  </p:clrMapOvr>
+</p:sldLayout>
+</file>
+
+<file path=ppt/slideLayouts/slideLayout38.xml><?xml version="1.0" encoding="utf-8"?>
+<p:sldLayout xmlns:a="http://schemas.openxmlformats.org/drawingml/2006/main" xmlns:r="http://schemas.openxmlformats.org/officeDocument/2006/relationships" xmlns:p="http://schemas.openxmlformats.org/presentationml/2006/main" preserve="1" userDrawn="1">
+  <p:cSld name="Content with Caption">
+    <p:spTree>
+      <p:nvGrpSpPr>
+        <p:cNvPr id="1" name=""/>
+        <p:cNvGrpSpPr/>
+        <p:nvPr/>
+      </p:nvGrpSpPr>
+      <p:grpSpPr>
+        <a:xfrm>
+          <a:off x="0" y="0"/>
+          <a:ext cx="0" cy="0"/>
+          <a:chOff x="0" y="0"/>
+          <a:chExt cx="0" cy="0"/>
+        </a:xfrm>
+      </p:grpSpPr>
+      <p:sp>
+        <p:nvSpPr>
+          <p:cNvPr id="3" name="Content Placeholder 2"/>
+          <p:cNvSpPr>
+            <a:spLocks noGrp="1"/>
+          </p:cNvSpPr>
+          <p:nvPr>
+            <p:ph idx="1"/>
+          </p:nvPr>
+        </p:nvSpPr>
+        <p:spPr>
+          <a:xfrm>
+            <a:off x="4766733" y="1268760"/>
+            <a:ext cx="6815667" cy="4857403"/>
+          </a:xfrm>
+        </p:spPr>
+        <p:txBody>
+          <a:bodyPr/>
+          <a:lstStyle>
+            <a:lvl1pPr>
+              <a:defRPr sz="2400"/>
+            </a:lvl1pPr>
+            <a:lvl2pPr>
+              <a:defRPr sz="2100"/>
+            </a:lvl2pPr>
+            <a:lvl3pPr>
+              <a:defRPr sz="1800"/>
+            </a:lvl3pPr>
+            <a:lvl4pPr>
+              <a:defRPr sz="1500"/>
+            </a:lvl4pPr>
+            <a:lvl5pPr>
+              <a:defRPr sz="1500"/>
+            </a:lvl5pPr>
+            <a:lvl6pPr>
+              <a:defRPr sz="1500"/>
+            </a:lvl6pPr>
+            <a:lvl7pPr>
+              <a:defRPr sz="1500"/>
+            </a:lvl7pPr>
+            <a:lvl8pPr>
+              <a:defRPr sz="1500"/>
+            </a:lvl8pPr>
+            <a:lvl9pPr>
+              <a:defRPr sz="1500"/>
+            </a:lvl9pPr>
+          </a:lstStyle>
+          <a:p>
+            <a:pPr lvl="0"/>
+            <a:r>
+              <a:rPr lang="en-US" dirty="0"/>
+              <a:t>Edit Master text styles</a:t>
+            </a:r>
+          </a:p>
+          <a:p>
+            <a:pPr lvl="1"/>
+            <a:r>
+              <a:rPr lang="en-US" dirty="0"/>
+              <a:t>Second level</a:t>
+            </a:r>
+          </a:p>
+          <a:p>
+            <a:pPr lvl="2"/>
+            <a:r>
+              <a:rPr lang="en-US" dirty="0"/>
+              <a:t>Third level</a:t>
+            </a:r>
+          </a:p>
+          <a:p>
+            <a:pPr lvl="3"/>
+            <a:r>
+              <a:rPr lang="en-US" dirty="0"/>
+              <a:t>Fourth level</a:t>
+            </a:r>
+          </a:p>
+          <a:p>
+            <a:pPr lvl="4"/>
+            <a:r>
+              <a:rPr lang="en-US" dirty="0"/>
+              <a:t>Fifth level</a:t>
+            </a:r>
+            <a:endParaRPr lang="en-GB" dirty="0"/>
+          </a:p>
+        </p:txBody>
+      </p:sp>
+      <p:sp>
+        <p:nvSpPr>
+          <p:cNvPr id="4" name="Text Placeholder 3"/>
+          <p:cNvSpPr>
+            <a:spLocks noGrp="1"/>
+          </p:cNvSpPr>
+          <p:nvPr>
+            <p:ph type="body" sz="half" idx="2"/>
+          </p:nvPr>
+        </p:nvSpPr>
+        <p:spPr>
+          <a:xfrm>
+            <a:off x="609602" y="1268760"/>
+            <a:ext cx="4011084" cy="4857403"/>
+          </a:xfrm>
+        </p:spPr>
+        <p:txBody>
+          <a:bodyPr/>
+          <a:lstStyle>
+            <a:lvl1pPr marL="0" indent="0">
+              <a:buNone/>
+              <a:defRPr sz="1050"/>
+            </a:lvl1pPr>
+            <a:lvl2pPr marL="342900" indent="0">
+              <a:buNone/>
+              <a:defRPr sz="900"/>
+            </a:lvl2pPr>
+            <a:lvl3pPr marL="685800" indent="0">
+              <a:buNone/>
+              <a:defRPr sz="750"/>
+            </a:lvl3pPr>
+            <a:lvl4pPr marL="1028700" indent="0">
+              <a:buNone/>
+              <a:defRPr sz="675"/>
+            </a:lvl4pPr>
+            <a:lvl5pPr marL="1371600" indent="0">
+              <a:buNone/>
+              <a:defRPr sz="675"/>
+            </a:lvl5pPr>
+            <a:lvl6pPr marL="1714500" indent="0">
+              <a:buNone/>
+              <a:defRPr sz="675"/>
+            </a:lvl6pPr>
+            <a:lvl7pPr marL="2057400" indent="0">
+              <a:buNone/>
+              <a:defRPr sz="675"/>
+            </a:lvl7pPr>
+            <a:lvl8pPr marL="2400300" indent="0">
+              <a:buNone/>
+              <a:defRPr sz="675"/>
+            </a:lvl8pPr>
+            <a:lvl9pPr marL="2743200" indent="0">
+              <a:buNone/>
+              <a:defRPr sz="675"/>
+            </a:lvl9pPr>
+          </a:lstStyle>
+          <a:p>
+            <a:pPr lvl="0"/>
+            <a:r>
+              <a:rPr lang="en-US"/>
+              <a:t>Edit Master text styles</a:t>
+            </a:r>
+          </a:p>
+        </p:txBody>
+      </p:sp>
+      <p:sp>
+        <p:nvSpPr>
+          <p:cNvPr id="5" name="Date Placeholder 4"/>
+          <p:cNvSpPr>
+            <a:spLocks noGrp="1"/>
+          </p:cNvSpPr>
+          <p:nvPr>
+            <p:ph type="dt" sz="half" idx="10"/>
+          </p:nvPr>
+        </p:nvSpPr>
+        <p:spPr>
+          <a:xfrm>
+            <a:off x="8880000" y="36001"/>
+            <a:ext cx="2844800" cy="365125"/>
+          </a:xfrm>
+          <a:prstGeom prst="rect">
+            <a:avLst/>
+          </a:prstGeom>
+        </p:spPr>
+        <p:txBody>
+          <a:bodyPr/>
+          <a:lstStyle/>
+          <a:p>
+            <a:fld id="{39ACB58B-10F4-424C-A445-BF4374629C10}" type="datetime1">
+              <a:rPr lang="en-US" smtClean="0"/>
+              <a:t>2/11/2026</a:t>
+            </a:fld>
+            <a:endParaRPr lang="en-US"/>
+          </a:p>
+        </p:txBody>
+      </p:sp>
+      <p:sp>
+        <p:nvSpPr>
+          <p:cNvPr id="7" name="Slide Number Placeholder 6"/>
+          <p:cNvSpPr>
+            <a:spLocks noGrp="1"/>
+          </p:cNvSpPr>
+          <p:nvPr>
+            <p:ph type="sldNum" sz="quarter" idx="12"/>
+          </p:nvPr>
+        </p:nvSpPr>
+        <p:spPr/>
+        <p:txBody>
+          <a:bodyPr/>
+          <a:lstStyle/>
+          <a:p>
+            <a:fld id="{C5EF2332-01BF-834F-8236-50238282D533}" type="slidenum">
+              <a:rPr lang="en-US" smtClean="0"/>
+              <a:t>‹#›</a:t>
+            </a:fld>
+            <a:endParaRPr lang="en-US"/>
+          </a:p>
+        </p:txBody>
+      </p:sp>
+      <p:sp>
+        <p:nvSpPr>
+          <p:cNvPr id="9" name="Title 1">
+            <a:extLst>
+              <a:ext uri="{FF2B5EF4-FFF2-40B4-BE49-F238E27FC236}">
+                <a16:creationId xmlns:a16="http://schemas.microsoft.com/office/drawing/2014/main" id="{FC7CBFF2-52EA-42FC-9E65-B906936D3BD2}"/>
+              </a:ext>
+            </a:extLst>
+          </p:cNvPr>
+          <p:cNvSpPr>
+            <a:spLocks noGrp="1"/>
+          </p:cNvSpPr>
+          <p:nvPr>
+            <p:ph type="title"/>
+          </p:nvPr>
+        </p:nvSpPr>
+        <p:spPr>
+          <a:xfrm>
+            <a:off x="609600" y="161904"/>
+            <a:ext cx="10972800" cy="1143000"/>
+          </a:xfrm>
+        </p:spPr>
+        <p:txBody>
+          <a:bodyPr/>
+          <a:lstStyle/>
+          <a:p>
+            <a:r>
+              <a:rPr lang="en-US" dirty="0"/>
+              <a:t>Click to edit Master title style</a:t>
+            </a:r>
+            <a:endParaRPr lang="en-FI" dirty="0"/>
+          </a:p>
+        </p:txBody>
+      </p:sp>
+    </p:spTree>
+    <p:extLst>
+      <p:ext uri="{BB962C8B-B14F-4D97-AF65-F5344CB8AC3E}">
+        <p14:creationId xmlns:p14="http://schemas.microsoft.com/office/powerpoint/2010/main" val="2224643866"/>
+      </p:ext>
+    </p:extLst>
+  </p:cSld>
+  <p:clrMapOvr>
+    <a:masterClrMapping/>
+  </p:clrMapOvr>
+</p:sldLayout>
+</file>
+
+<file path=ppt/slideLayouts/slideLayout39.xml><?xml version="1.0" encoding="utf-8"?>
+<p:sldLayout xmlns:a="http://schemas.openxmlformats.org/drawingml/2006/main" xmlns:r="http://schemas.openxmlformats.org/officeDocument/2006/relationships" xmlns:p="http://schemas.openxmlformats.org/presentationml/2006/main" type="picTx" preserve="1">
+  <p:cSld name="Picture with Caption">
+    <p:spTree>
+      <p:nvGrpSpPr>
+        <p:cNvPr id="1" name=""/>
+        <p:cNvGrpSpPr/>
+        <p:nvPr/>
+      </p:nvGrpSpPr>
+      <p:grpSpPr>
+        <a:xfrm>
+          <a:off x="0" y="0"/>
+          <a:ext cx="0" cy="0"/>
+          <a:chOff x="0" y="0"/>
+          <a:chExt cx="0" cy="0"/>
+        </a:xfrm>
+      </p:grpSpPr>
+      <p:sp>
+        <p:nvSpPr>
+          <p:cNvPr id="2" name="Title 1"/>
+          <p:cNvSpPr>
+            <a:spLocks noGrp="1"/>
+          </p:cNvSpPr>
+          <p:nvPr>
+            <p:ph type="title"/>
+          </p:nvPr>
+        </p:nvSpPr>
+        <p:spPr>
+          <a:xfrm>
+            <a:off x="2389717" y="4800600"/>
+            <a:ext cx="7315200" cy="566738"/>
+          </a:xfrm>
+          <a:prstGeom prst="rect">
+            <a:avLst/>
+          </a:prstGeom>
+        </p:spPr>
+        <p:txBody>
+          <a:bodyPr anchor="b"/>
+          <a:lstStyle>
+            <a:lvl1pPr algn="l">
+              <a:defRPr sz="1500" b="1">
+                <a:solidFill>
+                  <a:srgbClr val="0070C0"/>
+                </a:solidFill>
+              </a:defRPr>
+            </a:lvl1pPr>
+          </a:lstStyle>
+          <a:p>
+            <a:r>
+              <a:rPr lang="en-US"/>
+              <a:t>Click to edit Master title style</a:t>
+            </a:r>
+            <a:endParaRPr lang="en-GB"/>
+          </a:p>
+        </p:txBody>
+      </p:sp>
+      <p:sp>
+        <p:nvSpPr>
+          <p:cNvPr id="3" name="Picture Placeholder 2"/>
+          <p:cNvSpPr>
+            <a:spLocks noGrp="1"/>
+          </p:cNvSpPr>
+          <p:nvPr>
+            <p:ph type="pic" idx="1"/>
+          </p:nvPr>
+        </p:nvSpPr>
+        <p:spPr>
+          <a:xfrm>
+            <a:off x="2389717" y="612775"/>
+            <a:ext cx="7315200" cy="4114800"/>
+          </a:xfrm>
+        </p:spPr>
+        <p:txBody>
+          <a:bodyPr/>
+          <a:lstStyle>
+            <a:lvl1pPr marL="0" indent="0">
+              <a:buNone/>
+              <a:defRPr sz="2400">
+                <a:solidFill>
+                  <a:schemeClr val="bg1"/>
+                </a:solidFill>
+              </a:defRPr>
+            </a:lvl1pPr>
+            <a:lvl2pPr marL="342900" indent="0">
+              <a:buNone/>
+              <a:defRPr sz="2100"/>
+            </a:lvl2pPr>
+            <a:lvl3pPr marL="685800" indent="0">
+              <a:buNone/>
+              <a:defRPr sz="1800"/>
+            </a:lvl3pPr>
+            <a:lvl4pPr marL="1028700" indent="0">
+              <a:buNone/>
+              <a:defRPr sz="1500"/>
+            </a:lvl4pPr>
+            <a:lvl5pPr marL="1371600" indent="0">
+              <a:buNone/>
+              <a:defRPr sz="1500"/>
+            </a:lvl5pPr>
+            <a:lvl6pPr marL="1714500" indent="0">
+              <a:buNone/>
+              <a:defRPr sz="1500"/>
+            </a:lvl6pPr>
+            <a:lvl7pPr marL="2057400" indent="0">
+              <a:buNone/>
+              <a:defRPr sz="1500"/>
+            </a:lvl7pPr>
+            <a:lvl8pPr marL="2400300" indent="0">
+              <a:buNone/>
+              <a:defRPr sz="1500"/>
+            </a:lvl8pPr>
+            <a:lvl9pPr marL="2743200" indent="0">
+              <a:buNone/>
+              <a:defRPr sz="1500"/>
+            </a:lvl9pPr>
+          </a:lstStyle>
+          <a:p>
+            <a:r>
+              <a:rPr lang="en-US"/>
+              <a:t>Click icon to add picture</a:t>
+            </a:r>
+            <a:endParaRPr lang="en-GB" dirty="0"/>
+          </a:p>
+        </p:txBody>
+      </p:sp>
+      <p:sp>
+        <p:nvSpPr>
+          <p:cNvPr id="4" name="Text Placeholder 3"/>
+          <p:cNvSpPr>
+            <a:spLocks noGrp="1"/>
+          </p:cNvSpPr>
+          <p:nvPr>
+            <p:ph type="body" sz="half" idx="2"/>
+          </p:nvPr>
+        </p:nvSpPr>
+        <p:spPr>
+          <a:xfrm>
+            <a:off x="2389717" y="5367338"/>
+            <a:ext cx="7315200" cy="581942"/>
+          </a:xfrm>
+        </p:spPr>
+        <p:txBody>
+          <a:bodyPr/>
+          <a:lstStyle>
+            <a:lvl1pPr marL="0" indent="0">
+              <a:buNone/>
+              <a:defRPr sz="1050"/>
+            </a:lvl1pPr>
+            <a:lvl2pPr marL="342900" indent="0">
+              <a:buNone/>
+              <a:defRPr sz="900"/>
+            </a:lvl2pPr>
+            <a:lvl3pPr marL="685800" indent="0">
+              <a:buNone/>
+              <a:defRPr sz="750"/>
+            </a:lvl3pPr>
+            <a:lvl4pPr marL="1028700" indent="0">
+              <a:buNone/>
+              <a:defRPr sz="675"/>
+            </a:lvl4pPr>
+            <a:lvl5pPr marL="1371600" indent="0">
+              <a:buNone/>
+              <a:defRPr sz="675"/>
+            </a:lvl5pPr>
+            <a:lvl6pPr marL="1714500" indent="0">
+              <a:buNone/>
+              <a:defRPr sz="675"/>
+            </a:lvl6pPr>
+            <a:lvl7pPr marL="2057400" indent="0">
+              <a:buNone/>
+              <a:defRPr sz="675"/>
+            </a:lvl7pPr>
+            <a:lvl8pPr marL="2400300" indent="0">
+              <a:buNone/>
+              <a:defRPr sz="675"/>
+            </a:lvl8pPr>
+            <a:lvl9pPr marL="2743200" indent="0">
+              <a:buNone/>
+              <a:defRPr sz="675"/>
+            </a:lvl9pPr>
+          </a:lstStyle>
+          <a:p>
+            <a:pPr lvl="0"/>
+            <a:r>
+              <a:rPr lang="en-US"/>
+              <a:t>Edit Master text styles</a:t>
+            </a:r>
+          </a:p>
+        </p:txBody>
+      </p:sp>
+      <p:sp>
+        <p:nvSpPr>
+          <p:cNvPr id="5" name="Date Placeholder 4"/>
+          <p:cNvSpPr>
+            <a:spLocks noGrp="1"/>
+          </p:cNvSpPr>
+          <p:nvPr>
+            <p:ph type="dt" sz="half" idx="10"/>
+          </p:nvPr>
+        </p:nvSpPr>
+        <p:spPr>
+          <a:xfrm>
+            <a:off x="8880000" y="36001"/>
+            <a:ext cx="2844800" cy="365125"/>
+          </a:xfrm>
+          <a:prstGeom prst="rect">
+            <a:avLst/>
+          </a:prstGeom>
+        </p:spPr>
+        <p:txBody>
+          <a:bodyPr/>
+          <a:lstStyle/>
+          <a:p>
+            <a:fld id="{8035C2C3-DEFB-4B02-975D-80572CA7EC68}" type="datetime1">
+              <a:rPr lang="en-US" smtClean="0"/>
+              <a:t>2/11/2026</a:t>
+            </a:fld>
+            <a:endParaRPr lang="en-US"/>
+          </a:p>
+        </p:txBody>
+      </p:sp>
+      <p:sp>
+        <p:nvSpPr>
+          <p:cNvPr id="7" name="Slide Number Placeholder 6"/>
+          <p:cNvSpPr>
+            <a:spLocks noGrp="1"/>
+          </p:cNvSpPr>
+          <p:nvPr>
+            <p:ph type="sldNum" sz="quarter" idx="12"/>
+          </p:nvPr>
+        </p:nvSpPr>
+        <p:spPr/>
+        <p:txBody>
+          <a:bodyPr/>
+          <a:lstStyle/>
+          <a:p>
+            <a:fld id="{C5EF2332-01BF-834F-8236-50238282D533}" type="slidenum">
+              <a:rPr lang="en-US" smtClean="0"/>
+              <a:t>‹#›</a:t>
+            </a:fld>
+            <a:endParaRPr lang="en-US"/>
+          </a:p>
+        </p:txBody>
+      </p:sp>
+    </p:spTree>
+    <p:extLst>
+      <p:ext uri="{BB962C8B-B14F-4D97-AF65-F5344CB8AC3E}">
+        <p14:creationId xmlns:p14="http://schemas.microsoft.com/office/powerpoint/2010/main" val="3635018924"/>
+      </p:ext>
+    </p:extLst>
+  </p:cSld>
+  <p:clrMapOvr>
+    <a:masterClrMapping/>
+  </p:clrMapOvr>
+</p:sldLayout>
+</file>
+
+<file path=ppt/slideLayouts/slideLayout4.xml><?xml version="1.0" encoding="utf-8"?>
+<p:sldLayout xmlns:a="http://schemas.openxmlformats.org/drawingml/2006/main" xmlns:r="http://schemas.openxmlformats.org/officeDocument/2006/relationships" xmlns:p="http://schemas.openxmlformats.org/presentationml/2006/main" preserve="1" userDrawn="1">
+  <p:cSld name="Title and Table + Legend Custom">
+    <p:spTree>
+      <p:nvGrpSpPr>
+        <p:cNvPr id="1" name=""/>
+        <p:cNvGrpSpPr/>
+        <p:nvPr/>
+      </p:nvGrpSpPr>
+      <p:grpSpPr>
+        <a:xfrm>
+          <a:off x="0" y="0"/>
+          <a:ext cx="0" cy="0"/>
+          <a:chOff x="0" y="0"/>
+          <a:chExt cx="0" cy="0"/>
+        </a:xfrm>
+      </p:grpSpPr>
+      <p:sp>
+        <p:nvSpPr>
+          <p:cNvPr id="3" name="Content Placeholder 2"/>
+          <p:cNvSpPr>
+            <a:spLocks noGrp="1"/>
+          </p:cNvSpPr>
+          <p:nvPr>
+            <p:ph idx="1"/>
+          </p:nvPr>
+        </p:nvSpPr>
+        <p:spPr>
+          <a:xfrm>
+            <a:off x="609600" y="1399035"/>
+            <a:ext cx="10972800" cy="4525963"/>
+          </a:xfrm>
+        </p:spPr>
+        <p:txBody>
+          <a:bodyPr/>
+          <a:lstStyle>
+            <a:lvl1pPr marL="0" indent="0">
+              <a:buNone/>
+              <a:defRPr sz="1800" b="0">
+                <a:solidFill>
+                  <a:schemeClr val="tx1"/>
+                </a:solidFill>
+              </a:defRPr>
+            </a:lvl1pPr>
+            <a:lvl2pPr>
+              <a:defRPr sz="1500" b="0">
+                <a:solidFill>
+                  <a:schemeClr val="tx1"/>
+                </a:solidFill>
+              </a:defRPr>
+            </a:lvl2pPr>
+            <a:lvl3pPr>
+              <a:defRPr sz="1350" b="0">
+                <a:solidFill>
+                  <a:schemeClr val="tx1"/>
+                </a:solidFill>
+              </a:defRPr>
+            </a:lvl3pPr>
+            <a:lvl4pPr>
+              <a:defRPr>
+                <a:solidFill>
+                  <a:schemeClr val="tx1"/>
+                </a:solidFill>
+              </a:defRPr>
+            </a:lvl4pPr>
+            <a:lvl5pPr>
+              <a:defRPr>
+                <a:solidFill>
+                  <a:schemeClr val="tx1"/>
+                </a:solidFill>
+              </a:defRPr>
+            </a:lvl5pPr>
+          </a:lstStyle>
+          <a:p>
+            <a:pPr lvl="0"/>
+            <a:r>
+              <a:rPr lang="en-US" dirty="0"/>
+              <a:t>Edit Master text styles</a:t>
+            </a:r>
+          </a:p>
+          <a:p>
+            <a:pPr lvl="1"/>
+            <a:r>
+              <a:rPr lang="en-US" dirty="0"/>
+              <a:t>Second level</a:t>
+            </a:r>
+          </a:p>
+          <a:p>
+            <a:pPr lvl="2"/>
+            <a:r>
+              <a:rPr lang="en-US" dirty="0"/>
+              <a:t>Third level</a:t>
+            </a:r>
+          </a:p>
+          <a:p>
+            <a:pPr lvl="3"/>
+            <a:r>
+              <a:rPr lang="en-US" dirty="0"/>
+              <a:t>Fourth level</a:t>
+            </a:r>
+          </a:p>
+          <a:p>
+            <a:pPr lvl="4"/>
+            <a:r>
+              <a:rPr lang="en-US" dirty="0"/>
+              <a:t>Fifth level</a:t>
+            </a:r>
+            <a:endParaRPr lang="en-GB" dirty="0"/>
+          </a:p>
+        </p:txBody>
+      </p:sp>
+      <p:sp>
+        <p:nvSpPr>
+          <p:cNvPr id="4" name="Date Placeholder 3"/>
+          <p:cNvSpPr>
+            <a:spLocks noGrp="1"/>
+          </p:cNvSpPr>
+          <p:nvPr>
+            <p:ph type="dt" sz="half" idx="10"/>
+          </p:nvPr>
+        </p:nvSpPr>
+        <p:spPr>
+          <a:xfrm>
+            <a:off x="8737600" y="227186"/>
+            <a:ext cx="2844800" cy="365125"/>
+          </a:xfrm>
+          <a:prstGeom prst="rect">
+            <a:avLst/>
+          </a:prstGeom>
+        </p:spPr>
+        <p:txBody>
+          <a:bodyPr/>
+          <a:lstStyle/>
+          <a:p>
+            <a:fld id="{A2811E2C-04DE-4A46-9DBA-B7D0553EFCE2}" type="datetime1">
+              <a:rPr lang="en-US" smtClean="0"/>
+              <a:t>2/11/2026</a:t>
+            </a:fld>
+            <a:endParaRPr lang="en-US" dirty="0"/>
+          </a:p>
+        </p:txBody>
+      </p:sp>
+      <p:sp>
+        <p:nvSpPr>
+          <p:cNvPr id="6" name="Slide Number Placeholder 5"/>
+          <p:cNvSpPr>
+            <a:spLocks noGrp="1"/>
+          </p:cNvSpPr>
+          <p:nvPr>
+            <p:ph type="sldNum" sz="quarter" idx="12"/>
+          </p:nvPr>
+        </p:nvSpPr>
+        <p:spPr/>
+        <p:txBody>
+          <a:bodyPr/>
+          <a:lstStyle/>
+          <a:p>
+            <a:fld id="{C5EF2332-01BF-834F-8236-50238282D533}" type="slidenum">
+              <a:rPr lang="en-US" smtClean="0"/>
+              <a:t>‹#›</a:t>
+            </a:fld>
+            <a:endParaRPr lang="en-US"/>
+          </a:p>
+        </p:txBody>
+      </p:sp>
+      <p:sp>
+        <p:nvSpPr>
+          <p:cNvPr id="7" name="Content Placeholder 2">
+            <a:extLst>
+              <a:ext uri="{FF2B5EF4-FFF2-40B4-BE49-F238E27FC236}">
+                <a16:creationId xmlns:a16="http://schemas.microsoft.com/office/drawing/2014/main" id="{1454253E-E317-4374-BAC4-6FB2A0F0ED8C}"/>
+              </a:ext>
+            </a:extLst>
+          </p:cNvPr>
+          <p:cNvSpPr>
+            <a:spLocks noGrp="1"/>
+          </p:cNvSpPr>
+          <p:nvPr>
+            <p:ph idx="13"/>
+          </p:nvPr>
+        </p:nvSpPr>
+        <p:spPr>
+          <a:xfrm>
+            <a:off x="10872216" y="1508760"/>
+            <a:ext cx="1191221" cy="2218630"/>
+          </a:xfrm>
+        </p:spPr>
+        <p:txBody>
+          <a:bodyPr/>
+          <a:lstStyle>
+            <a:lvl1pPr marL="0" indent="0">
+              <a:buNone/>
+              <a:defRPr sz="1800" b="0">
+                <a:solidFill>
+                  <a:schemeClr val="tx1"/>
+                </a:solidFill>
+              </a:defRPr>
+            </a:lvl1pPr>
+            <a:lvl2pPr>
+              <a:defRPr sz="1500" b="0">
+                <a:solidFill>
+                  <a:schemeClr val="tx1"/>
+                </a:solidFill>
+              </a:defRPr>
+            </a:lvl2pPr>
+            <a:lvl3pPr>
+              <a:defRPr sz="1350" b="0">
+                <a:solidFill>
+                  <a:schemeClr val="tx1"/>
+                </a:solidFill>
+              </a:defRPr>
+            </a:lvl3pPr>
+            <a:lvl4pPr>
+              <a:defRPr>
+                <a:solidFill>
+                  <a:schemeClr val="tx1"/>
+                </a:solidFill>
+              </a:defRPr>
+            </a:lvl4pPr>
+            <a:lvl5pPr>
+              <a:defRPr>
+                <a:solidFill>
+                  <a:schemeClr val="tx1"/>
+                </a:solidFill>
+              </a:defRPr>
+            </a:lvl5pPr>
+          </a:lstStyle>
+          <a:p>
+            <a:pPr lvl="0"/>
+            <a:r>
+              <a:rPr lang="en-US" dirty="0"/>
+              <a:t>Edit Master text styles</a:t>
+            </a:r>
+          </a:p>
+          <a:p>
+            <a:pPr lvl="1"/>
+            <a:r>
+              <a:rPr lang="en-US" dirty="0"/>
+              <a:t>Second level</a:t>
+            </a:r>
+          </a:p>
+          <a:p>
+            <a:pPr lvl="2"/>
+            <a:r>
+              <a:rPr lang="en-US" dirty="0"/>
+              <a:t>Third level</a:t>
+            </a:r>
+          </a:p>
+          <a:p>
+            <a:pPr lvl="3"/>
+            <a:r>
+              <a:rPr lang="en-US" dirty="0"/>
+              <a:t>Fourth level</a:t>
+            </a:r>
+          </a:p>
+          <a:p>
+            <a:pPr lvl="4"/>
+            <a:r>
+              <a:rPr lang="en-US" dirty="0"/>
+              <a:t>Fifth level</a:t>
+            </a:r>
+            <a:endParaRPr lang="en-GB" dirty="0"/>
+          </a:p>
+        </p:txBody>
+      </p:sp>
+      <p:sp>
+        <p:nvSpPr>
+          <p:cNvPr id="8" name="Title 1">
+            <a:extLst>
+              <a:ext uri="{FF2B5EF4-FFF2-40B4-BE49-F238E27FC236}">
+                <a16:creationId xmlns:a16="http://schemas.microsoft.com/office/drawing/2014/main" id="{54F30AE5-142E-4C25-87BA-B8565844BFEF}"/>
+              </a:ext>
+            </a:extLst>
+          </p:cNvPr>
+          <p:cNvSpPr>
+            <a:spLocks noGrp="1"/>
+          </p:cNvSpPr>
+          <p:nvPr>
+            <p:ph type="title"/>
+          </p:nvPr>
+        </p:nvSpPr>
+        <p:spPr>
+          <a:xfrm>
+            <a:off x="609600" y="161904"/>
+            <a:ext cx="10972800" cy="1143000"/>
+          </a:xfrm>
+        </p:spPr>
+        <p:txBody>
+          <a:bodyPr/>
+          <a:lstStyle/>
+          <a:p>
+            <a:r>
+              <a:rPr lang="en-US" dirty="0"/>
+              <a:t>Click to edit Master title style</a:t>
+            </a:r>
+            <a:endParaRPr lang="en-FI" dirty="0"/>
+          </a:p>
+        </p:txBody>
+      </p:sp>
+    </p:spTree>
+    <p:custDataLst>
+      <p:tags r:id="rId1"/>
+    </p:custDataLst>
+    <p:extLst>
+      <p:ext uri="{BB962C8B-B14F-4D97-AF65-F5344CB8AC3E}">
+        <p14:creationId xmlns:p14="http://schemas.microsoft.com/office/powerpoint/2010/main" val="2441131338"/>
+      </p:ext>
+    </p:extLst>
+  </p:cSld>
+  <p:clrMapOvr>
+    <a:masterClrMapping/>
+  </p:clrMapOvr>
+</p:sldLayout>
+</file>
+
+<file path=ppt/slideLayouts/slideLayout40.xml><?xml version="1.0" encoding="utf-8"?>
+<p:sldLayout xmlns:a="http://schemas.openxmlformats.org/drawingml/2006/main" xmlns:r="http://schemas.openxmlformats.org/officeDocument/2006/relationships" xmlns:p="http://schemas.openxmlformats.org/presentationml/2006/main" preserve="1" userDrawn="1">
+  <p:cSld name="Title and Vertical Text">
+    <p:spTree>
+      <p:nvGrpSpPr>
+        <p:cNvPr id="1" name=""/>
+        <p:cNvGrpSpPr/>
+        <p:nvPr/>
+      </p:nvGrpSpPr>
+      <p:grpSpPr>
+        <a:xfrm>
+          <a:off x="0" y="0"/>
+          <a:ext cx="0" cy="0"/>
+          <a:chOff x="0" y="0"/>
+          <a:chExt cx="0" cy="0"/>
+        </a:xfrm>
+      </p:grpSpPr>
+      <p:sp>
+        <p:nvSpPr>
+          <p:cNvPr id="3" name="Vertical Text Placeholder 2"/>
+          <p:cNvSpPr>
+            <a:spLocks noGrp="1"/>
+          </p:cNvSpPr>
+          <p:nvPr>
+            <p:ph type="body" orient="vert" idx="1"/>
+          </p:nvPr>
+        </p:nvSpPr>
+        <p:spPr/>
+        <p:txBody>
+          <a:bodyPr vert="eaVert"/>
+          <a:lstStyle/>
+          <a:p>
+            <a:pPr lvl="0"/>
+            <a:r>
+              <a:rPr lang="en-US"/>
+              <a:t>Edit Master text styles</a:t>
+            </a:r>
+          </a:p>
+          <a:p>
+            <a:pPr lvl="1"/>
+            <a:r>
+              <a:rPr lang="en-US"/>
+              <a:t>Second level</a:t>
+            </a:r>
+          </a:p>
+          <a:p>
+            <a:pPr lvl="2"/>
+            <a:r>
+              <a:rPr lang="en-US"/>
+              <a:t>Third level</a:t>
+            </a:r>
+          </a:p>
+          <a:p>
+            <a:pPr lvl="3"/>
+            <a:r>
+              <a:rPr lang="en-US"/>
+              <a:t>Fourth level</a:t>
+            </a:r>
+          </a:p>
+          <a:p>
+            <a:pPr lvl="4"/>
+            <a:r>
+              <a:rPr lang="en-US"/>
+              <a:t>Fifth level</a:t>
+            </a:r>
+            <a:endParaRPr lang="en-GB"/>
+          </a:p>
+        </p:txBody>
+      </p:sp>
+      <p:sp>
+        <p:nvSpPr>
+          <p:cNvPr id="4" name="Date Placeholder 3"/>
+          <p:cNvSpPr>
+            <a:spLocks noGrp="1"/>
+          </p:cNvSpPr>
+          <p:nvPr>
+            <p:ph type="dt" sz="half" idx="10"/>
+          </p:nvPr>
+        </p:nvSpPr>
+        <p:spPr>
+          <a:xfrm>
+            <a:off x="8880000" y="36001"/>
+            <a:ext cx="2844800" cy="365125"/>
+          </a:xfrm>
+          <a:prstGeom prst="rect">
+            <a:avLst/>
+          </a:prstGeom>
+        </p:spPr>
+        <p:txBody>
+          <a:bodyPr/>
+          <a:lstStyle/>
+          <a:p>
+            <a:fld id="{6CD7B941-69E9-485A-A9E3-D4284E128DFE}" type="datetime1">
+              <a:rPr lang="en-US" smtClean="0"/>
+              <a:t>2/11/2026</a:t>
+            </a:fld>
+            <a:endParaRPr lang="en-US"/>
+          </a:p>
+        </p:txBody>
+      </p:sp>
+      <p:sp>
+        <p:nvSpPr>
+          <p:cNvPr id="6" name="Slide Number Placeholder 5"/>
+          <p:cNvSpPr>
+            <a:spLocks noGrp="1"/>
+          </p:cNvSpPr>
+          <p:nvPr>
+            <p:ph type="sldNum" sz="quarter" idx="12"/>
+          </p:nvPr>
+        </p:nvSpPr>
+        <p:spPr/>
+        <p:txBody>
+          <a:bodyPr/>
+          <a:lstStyle/>
+          <a:p>
+            <a:fld id="{C5EF2332-01BF-834F-8236-50238282D533}" type="slidenum">
+              <a:rPr lang="en-US" smtClean="0"/>
+              <a:t>‹#›</a:t>
+            </a:fld>
+            <a:endParaRPr lang="en-US"/>
+          </a:p>
+        </p:txBody>
+      </p:sp>
+      <p:sp>
+        <p:nvSpPr>
+          <p:cNvPr id="8" name="Title 1">
+            <a:extLst>
+              <a:ext uri="{FF2B5EF4-FFF2-40B4-BE49-F238E27FC236}">
+                <a16:creationId xmlns:a16="http://schemas.microsoft.com/office/drawing/2014/main" id="{8BB2DE76-B807-483C-A205-88E9D939A3FE}"/>
+              </a:ext>
+            </a:extLst>
+          </p:cNvPr>
+          <p:cNvSpPr>
+            <a:spLocks noGrp="1"/>
+          </p:cNvSpPr>
+          <p:nvPr>
+            <p:ph type="title"/>
+          </p:nvPr>
+        </p:nvSpPr>
+        <p:spPr>
+          <a:xfrm>
+            <a:off x="609600" y="161904"/>
+            <a:ext cx="10972800" cy="1143000"/>
+          </a:xfrm>
+        </p:spPr>
+        <p:txBody>
+          <a:bodyPr/>
+          <a:lstStyle/>
+          <a:p>
+            <a:r>
+              <a:rPr lang="en-US" dirty="0"/>
+              <a:t>Click to edit Master title style</a:t>
+            </a:r>
+            <a:endParaRPr lang="en-FI" dirty="0"/>
+          </a:p>
+        </p:txBody>
+      </p:sp>
+    </p:spTree>
+    <p:extLst>
+      <p:ext uri="{BB962C8B-B14F-4D97-AF65-F5344CB8AC3E}">
+        <p14:creationId xmlns:p14="http://schemas.microsoft.com/office/powerpoint/2010/main" val="296230659"/>
+      </p:ext>
+    </p:extLst>
+  </p:cSld>
+  <p:clrMapOvr>
+    <a:masterClrMapping/>
+  </p:clrMapOvr>
+</p:sldLayout>
+</file>
+
+<file path=ppt/slideLayouts/slideLayout41.xml><?xml version="1.0" encoding="utf-8"?>
+<p:sldLayout xmlns:a="http://schemas.openxmlformats.org/drawingml/2006/main" xmlns:r="http://schemas.openxmlformats.org/officeDocument/2006/relationships" xmlns:p="http://schemas.openxmlformats.org/presentationml/2006/main" preserve="1" userDrawn="1">
+  <p:cSld name="Table layout">
+    <p:spTree>
+      <p:nvGrpSpPr>
+        <p:cNvPr id="1" name=""/>
+        <p:cNvGrpSpPr/>
+        <p:nvPr/>
+      </p:nvGrpSpPr>
+      <p:grpSpPr>
+        <a:xfrm>
+          <a:off x="0" y="0"/>
+          <a:ext cx="0" cy="0"/>
+          <a:chOff x="0" y="0"/>
+          <a:chExt cx="0" cy="0"/>
+        </a:xfrm>
+      </p:grpSpPr>
+      <p:sp>
+        <p:nvSpPr>
+          <p:cNvPr id="6" name="Table Placeholder 5"/>
+          <p:cNvSpPr>
+            <a:spLocks noGrp="1"/>
+          </p:cNvSpPr>
+          <p:nvPr>
+            <p:ph type="tbl" sz="quarter" idx="10"/>
+          </p:nvPr>
+        </p:nvSpPr>
+        <p:spPr>
+          <a:xfrm>
+            <a:off x="911425" y="1124747"/>
+            <a:ext cx="10177131" cy="5040559"/>
+          </a:xfrm>
+        </p:spPr>
+        <p:txBody>
+          <a:bodyPr/>
+          <a:lstStyle/>
+          <a:p>
+            <a:r>
+              <a:rPr lang="en-US"/>
+              <a:t>Click icon to add table</a:t>
+            </a:r>
+            <a:endParaRPr lang="en-GB"/>
+          </a:p>
+        </p:txBody>
+      </p:sp>
+      <p:sp>
+        <p:nvSpPr>
+          <p:cNvPr id="4" name="Title 1">
+            <a:extLst>
+              <a:ext uri="{FF2B5EF4-FFF2-40B4-BE49-F238E27FC236}">
+                <a16:creationId xmlns:a16="http://schemas.microsoft.com/office/drawing/2014/main" id="{DDEEBAC8-B1E0-4886-AB2D-153086C29E8F}"/>
+              </a:ext>
+            </a:extLst>
+          </p:cNvPr>
+          <p:cNvSpPr>
+            <a:spLocks noGrp="1"/>
+          </p:cNvSpPr>
+          <p:nvPr>
+            <p:ph type="title"/>
+          </p:nvPr>
+        </p:nvSpPr>
+        <p:spPr>
+          <a:xfrm>
+            <a:off x="609600" y="161904"/>
+            <a:ext cx="10972800" cy="1143000"/>
+          </a:xfrm>
+        </p:spPr>
+        <p:txBody>
+          <a:bodyPr/>
+          <a:lstStyle/>
+          <a:p>
+            <a:r>
+              <a:rPr lang="en-US" dirty="0"/>
+              <a:t>Click to edit Master title style</a:t>
+            </a:r>
+            <a:endParaRPr lang="en-FI" dirty="0"/>
+          </a:p>
+        </p:txBody>
+      </p:sp>
+      <p:sp>
+        <p:nvSpPr>
+          <p:cNvPr id="2" name="Date Placeholder 1">
+            <a:extLst>
+              <a:ext uri="{FF2B5EF4-FFF2-40B4-BE49-F238E27FC236}">
+                <a16:creationId xmlns:a16="http://schemas.microsoft.com/office/drawing/2014/main" id="{E0F40AFA-7E5B-4712-9D56-F8EC8EB9F889}"/>
+              </a:ext>
+            </a:extLst>
+          </p:cNvPr>
+          <p:cNvSpPr>
+            <a:spLocks noGrp="1"/>
+          </p:cNvSpPr>
+          <p:nvPr>
+            <p:ph type="dt" sz="half" idx="11"/>
+          </p:nvPr>
+        </p:nvSpPr>
+        <p:spPr/>
+        <p:txBody>
+          <a:bodyPr/>
+          <a:lstStyle/>
+          <a:p>
+            <a:fld id="{6C0063D3-2A43-4DB9-8D47-89A6771FB05A}" type="datetime1">
+              <a:rPr lang="en-US" smtClean="0"/>
+              <a:t>2/11/2026</a:t>
+            </a:fld>
+            <a:endParaRPr lang="en-US"/>
+          </a:p>
+        </p:txBody>
+      </p:sp>
+      <p:sp>
+        <p:nvSpPr>
+          <p:cNvPr id="3" name="Slide Number Placeholder 2">
+            <a:extLst>
+              <a:ext uri="{FF2B5EF4-FFF2-40B4-BE49-F238E27FC236}">
+                <a16:creationId xmlns:a16="http://schemas.microsoft.com/office/drawing/2014/main" id="{736A8863-5F70-4C97-98BD-09D9B971BC33}"/>
+              </a:ext>
+            </a:extLst>
+          </p:cNvPr>
+          <p:cNvSpPr>
+            <a:spLocks noGrp="1"/>
+          </p:cNvSpPr>
+          <p:nvPr>
+            <p:ph type="sldNum" sz="quarter" idx="12"/>
+          </p:nvPr>
+        </p:nvSpPr>
+        <p:spPr/>
+        <p:txBody>
+          <a:bodyPr/>
+          <a:lstStyle/>
+          <a:p>
+            <a:fld id="{C5EF2332-01BF-834F-8236-50238282D533}" type="slidenum">
+              <a:rPr lang="en-US" smtClean="0"/>
+              <a:pPr/>
+              <a:t>‹#›</a:t>
+            </a:fld>
+            <a:endParaRPr lang="en-US" dirty="0"/>
+          </a:p>
+        </p:txBody>
+      </p:sp>
+    </p:spTree>
+    <p:extLst>
+      <p:ext uri="{BB962C8B-B14F-4D97-AF65-F5344CB8AC3E}">
+        <p14:creationId xmlns:p14="http://schemas.microsoft.com/office/powerpoint/2010/main" val="2554102417"/>
+      </p:ext>
+    </p:extLst>
+  </p:cSld>
+  <p:clrMapOvr>
+    <a:masterClrMapping/>
+  </p:clrMapOvr>
+</p:sldLayout>
+</file>
+
+<file path=ppt/slideLayouts/slideLayout42.xml><?xml version="1.0" encoding="utf-8"?>
+<p:sldLayout xmlns:a="http://schemas.openxmlformats.org/drawingml/2006/main" xmlns:r="http://schemas.openxmlformats.org/officeDocument/2006/relationships" xmlns:p="http://schemas.openxmlformats.org/presentationml/2006/main" preserve="1" userDrawn="1">
+  <p:cSld name="Title and content no lower bar">
+    <p:spTree>
+      <p:nvGrpSpPr>
+        <p:cNvPr id="1" name=""/>
+        <p:cNvGrpSpPr/>
+        <p:nvPr/>
+      </p:nvGrpSpPr>
+      <p:grpSpPr>
+        <a:xfrm>
+          <a:off x="0" y="0"/>
+          <a:ext cx="0" cy="0"/>
+          <a:chOff x="0" y="0"/>
+          <a:chExt cx="0" cy="0"/>
+        </a:xfrm>
+      </p:grpSpPr>
+      <p:sp>
+        <p:nvSpPr>
+          <p:cNvPr id="5" name="Rectangle 4">
+            <a:extLst>
+              <a:ext uri="{FF2B5EF4-FFF2-40B4-BE49-F238E27FC236}">
+                <a16:creationId xmlns:a16="http://schemas.microsoft.com/office/drawing/2014/main" id="{32F60A20-0281-4C43-BE27-B924D0E7ED17}"/>
+              </a:ext>
+            </a:extLst>
+          </p:cNvPr>
+          <p:cNvSpPr/>
+          <p:nvPr userDrawn="1"/>
+        </p:nvSpPr>
+        <p:spPr>
+          <a:xfrm>
+            <a:off x="0" y="5877768"/>
+            <a:ext cx="12192000" cy="980232"/>
+          </a:xfrm>
+          <a:prstGeom prst="rect">
+            <a:avLst/>
+          </a:prstGeom>
+          <a:solidFill>
+            <a:schemeClr val="bg1"/>
+          </a:solidFill>
+          <a:ln>
+            <a:solidFill>
+              <a:schemeClr val="bg1"/>
+            </a:solidFill>
+          </a:ln>
+        </p:spPr>
+        <p:style>
+          <a:lnRef idx="2">
+            <a:schemeClr val="accent1">
+              <a:shade val="50000"/>
+            </a:schemeClr>
+          </a:lnRef>
+          <a:fillRef idx="1">
+            <a:schemeClr val="accent1"/>
+          </a:fillRef>
+          <a:effectRef idx="0">
+            <a:schemeClr val="accent1"/>
+          </a:effectRef>
+          <a:fontRef idx="minor">
+            <a:schemeClr val="lt1"/>
+          </a:fontRef>
+        </p:style>
+        <p:txBody>
+          <a:bodyPr rtlCol="0" anchor="ctr"/>
+          <a:lstStyle/>
+          <a:p>
+            <a:pPr algn="ctr"/>
+            <a:endParaRPr lang="en-FI"/>
+          </a:p>
+        </p:txBody>
+      </p:sp>
+      <p:sp>
+        <p:nvSpPr>
+          <p:cNvPr id="3" name="Slide Number Placeholder 2">
+            <a:extLst>
+              <a:ext uri="{FF2B5EF4-FFF2-40B4-BE49-F238E27FC236}">
+                <a16:creationId xmlns:a16="http://schemas.microsoft.com/office/drawing/2014/main" id="{089F1B26-40E6-4CAE-8C6C-21FFFE4BD390}"/>
+              </a:ext>
+            </a:extLst>
+          </p:cNvPr>
+          <p:cNvSpPr>
+            <a:spLocks noGrp="1"/>
+          </p:cNvSpPr>
+          <p:nvPr>
+            <p:ph type="sldNum" sz="quarter" idx="10"/>
+          </p:nvPr>
+        </p:nvSpPr>
+        <p:spPr/>
+        <p:txBody>
+          <a:bodyPr/>
+          <a:lstStyle/>
+          <a:p>
+            <a:fld id="{C5EF2332-01BF-834F-8236-50238282D533}" type="slidenum">
+              <a:rPr lang="en-US" smtClean="0"/>
+              <a:t>‹#›</a:t>
+            </a:fld>
+            <a:endParaRPr lang="en-US"/>
+          </a:p>
+        </p:txBody>
+      </p:sp>
+      <p:sp>
+        <p:nvSpPr>
+          <p:cNvPr id="4" name="Date Placeholder 3">
+            <a:extLst>
+              <a:ext uri="{FF2B5EF4-FFF2-40B4-BE49-F238E27FC236}">
+                <a16:creationId xmlns:a16="http://schemas.microsoft.com/office/drawing/2014/main" id="{2FD4EB5F-BBDF-43AA-B322-DBC2BE28694D}"/>
+              </a:ext>
+            </a:extLst>
+          </p:cNvPr>
+          <p:cNvSpPr>
+            <a:spLocks noGrp="1"/>
+          </p:cNvSpPr>
+          <p:nvPr>
+            <p:ph type="dt" sz="half" idx="11"/>
+          </p:nvPr>
+        </p:nvSpPr>
+        <p:spPr/>
+        <p:txBody>
+          <a:bodyPr/>
+          <a:lstStyle/>
+          <a:p>
+            <a:fld id="{77ACC131-13CF-4DFC-9B0D-CFEF39A54BC4}" type="datetime1">
+              <a:rPr lang="en-US" smtClean="0"/>
+              <a:t>2/11/2026</a:t>
+            </a:fld>
+            <a:endParaRPr lang="en-US"/>
+          </a:p>
+        </p:txBody>
+      </p:sp>
+      <p:sp>
+        <p:nvSpPr>
+          <p:cNvPr id="7" name="Content Placeholder 2">
+            <a:extLst>
+              <a:ext uri="{FF2B5EF4-FFF2-40B4-BE49-F238E27FC236}">
+                <a16:creationId xmlns:a16="http://schemas.microsoft.com/office/drawing/2014/main" id="{483863AB-DB4E-4C36-8CA5-17ACC71D4FE8}"/>
+              </a:ext>
+            </a:extLst>
+          </p:cNvPr>
+          <p:cNvSpPr>
+            <a:spLocks noGrp="1"/>
+          </p:cNvSpPr>
+          <p:nvPr>
+            <p:ph idx="1"/>
+          </p:nvPr>
+        </p:nvSpPr>
+        <p:spPr>
+          <a:xfrm>
+            <a:off x="609600" y="1600203"/>
+            <a:ext cx="10972800" cy="4525963"/>
+          </a:xfrm>
+        </p:spPr>
+        <p:txBody>
+          <a:bodyPr/>
+          <a:lstStyle>
+            <a:lvl1pPr>
+              <a:defRPr sz="1800" b="0">
+                <a:solidFill>
+                  <a:schemeClr val="tx1"/>
+                </a:solidFill>
+              </a:defRPr>
+            </a:lvl1pPr>
+            <a:lvl2pPr>
+              <a:defRPr sz="1500" b="0">
+                <a:solidFill>
+                  <a:schemeClr val="tx1"/>
+                </a:solidFill>
+              </a:defRPr>
+            </a:lvl2pPr>
+            <a:lvl3pPr>
+              <a:defRPr sz="1350" b="0">
+                <a:solidFill>
+                  <a:schemeClr val="tx1"/>
+                </a:solidFill>
+              </a:defRPr>
+            </a:lvl3pPr>
+            <a:lvl4pPr>
+              <a:defRPr>
+                <a:solidFill>
+                  <a:schemeClr val="tx1"/>
+                </a:solidFill>
+              </a:defRPr>
+            </a:lvl4pPr>
+            <a:lvl5pPr>
+              <a:defRPr>
+                <a:solidFill>
+                  <a:schemeClr val="tx1"/>
+                </a:solidFill>
+              </a:defRPr>
+            </a:lvl5pPr>
+          </a:lstStyle>
+          <a:p>
+            <a:pPr lvl="0"/>
+            <a:r>
+              <a:rPr lang="en-US"/>
+              <a:t>Edit Master text styles</a:t>
+            </a:r>
+          </a:p>
+          <a:p>
+            <a:pPr lvl="1"/>
+            <a:r>
+              <a:rPr lang="en-US"/>
+              <a:t>Second level</a:t>
+            </a:r>
+          </a:p>
+          <a:p>
+            <a:pPr lvl="2"/>
+            <a:r>
+              <a:rPr lang="en-US"/>
+              <a:t>Third level</a:t>
+            </a:r>
+          </a:p>
+          <a:p>
+            <a:pPr lvl="3"/>
+            <a:r>
+              <a:rPr lang="en-US"/>
+              <a:t>Fourth level</a:t>
+            </a:r>
+          </a:p>
+          <a:p>
+            <a:pPr lvl="4"/>
+            <a:r>
+              <a:rPr lang="en-US"/>
+              <a:t>Fifth level</a:t>
+            </a:r>
+            <a:endParaRPr lang="en-GB" dirty="0"/>
+          </a:p>
+        </p:txBody>
+      </p:sp>
+      <p:sp>
+        <p:nvSpPr>
+          <p:cNvPr id="9" name="Title 1">
+            <a:extLst>
+              <a:ext uri="{FF2B5EF4-FFF2-40B4-BE49-F238E27FC236}">
+                <a16:creationId xmlns:a16="http://schemas.microsoft.com/office/drawing/2014/main" id="{FC9FE2E9-EA17-4993-81DE-DC9234476217}"/>
+              </a:ext>
+            </a:extLst>
+          </p:cNvPr>
+          <p:cNvSpPr>
+            <a:spLocks noGrp="1"/>
+          </p:cNvSpPr>
+          <p:nvPr>
+            <p:ph type="title"/>
+          </p:nvPr>
+        </p:nvSpPr>
+        <p:spPr>
+          <a:xfrm>
+            <a:off x="609600" y="161904"/>
+            <a:ext cx="10972800" cy="1143000"/>
+          </a:xfrm>
+        </p:spPr>
+        <p:txBody>
+          <a:bodyPr/>
+          <a:lstStyle/>
+          <a:p>
+            <a:r>
+              <a:rPr lang="en-US" dirty="0"/>
+              <a:t>Click to edit Master title style</a:t>
+            </a:r>
+            <a:endParaRPr lang="en-FI" dirty="0"/>
+          </a:p>
+        </p:txBody>
+      </p:sp>
+    </p:spTree>
+    <p:extLst>
+      <p:ext uri="{BB962C8B-B14F-4D97-AF65-F5344CB8AC3E}">
+        <p14:creationId xmlns:p14="http://schemas.microsoft.com/office/powerpoint/2010/main" val="132044190"/>
+      </p:ext>
+    </p:extLst>
+  </p:cSld>
+  <p:clrMapOvr>
+    <a:masterClrMapping/>
+  </p:clrMapOvr>
+</p:sldLayout>
+</file>
+
+<file path=ppt/slideLayouts/slideLayout43.xml><?xml version="1.0" encoding="utf-8"?>
+<p:sldLayout xmlns:a="http://schemas.openxmlformats.org/drawingml/2006/main" xmlns:r="http://schemas.openxmlformats.org/officeDocument/2006/relationships" xmlns:p="http://schemas.openxmlformats.org/presentationml/2006/main" preserve="1" userDrawn="1">
+  <p:cSld name="Table layout no lower bar">
+    <p:spTree>
+      <p:nvGrpSpPr>
+        <p:cNvPr id="1" name=""/>
+        <p:cNvGrpSpPr/>
+        <p:nvPr/>
+      </p:nvGrpSpPr>
+      <p:grpSpPr>
+        <a:xfrm>
+          <a:off x="0" y="0"/>
+          <a:ext cx="0" cy="0"/>
+          <a:chOff x="0" y="0"/>
+          <a:chExt cx="0" cy="0"/>
+        </a:xfrm>
+      </p:grpSpPr>
+      <p:sp>
+        <p:nvSpPr>
+          <p:cNvPr id="6" name="Rectangle 5">
+            <a:extLst>
+              <a:ext uri="{FF2B5EF4-FFF2-40B4-BE49-F238E27FC236}">
+                <a16:creationId xmlns:a16="http://schemas.microsoft.com/office/drawing/2014/main" id="{A39025CA-D659-4F0E-B2BC-5670EA697D78}"/>
+              </a:ext>
+            </a:extLst>
+          </p:cNvPr>
+          <p:cNvSpPr/>
+          <p:nvPr userDrawn="1"/>
+        </p:nvSpPr>
+        <p:spPr>
+          <a:xfrm>
+            <a:off x="0" y="5877768"/>
+            <a:ext cx="12192000" cy="980232"/>
+          </a:xfrm>
+          <a:prstGeom prst="rect">
+            <a:avLst/>
+          </a:prstGeom>
+          <a:solidFill>
+            <a:schemeClr val="bg1"/>
+          </a:solidFill>
+          <a:ln>
+            <a:solidFill>
+              <a:schemeClr val="bg1"/>
+            </a:solidFill>
+          </a:ln>
+        </p:spPr>
+        <p:style>
+          <a:lnRef idx="2">
+            <a:schemeClr val="accent1">
+              <a:shade val="50000"/>
+            </a:schemeClr>
+          </a:lnRef>
+          <a:fillRef idx="1">
+            <a:schemeClr val="accent1"/>
+          </a:fillRef>
+          <a:effectRef idx="0">
+            <a:schemeClr val="accent1"/>
+          </a:effectRef>
+          <a:fontRef idx="minor">
+            <a:schemeClr val="lt1"/>
+          </a:fontRef>
+        </p:style>
+        <p:txBody>
+          <a:bodyPr rtlCol="0" anchor="ctr"/>
+          <a:lstStyle/>
+          <a:p>
+            <a:pPr algn="ctr"/>
+            <a:endParaRPr lang="en-FI"/>
+          </a:p>
+        </p:txBody>
+      </p:sp>
+      <p:sp>
+        <p:nvSpPr>
+          <p:cNvPr id="4" name="Date Placeholder 3">
+            <a:extLst>
+              <a:ext uri="{FF2B5EF4-FFF2-40B4-BE49-F238E27FC236}">
+                <a16:creationId xmlns:a16="http://schemas.microsoft.com/office/drawing/2014/main" id="{EA1446E3-8C4A-42E7-BE9B-A20FE15EBB4D}"/>
+              </a:ext>
+            </a:extLst>
+          </p:cNvPr>
+          <p:cNvSpPr>
+            <a:spLocks noGrp="1"/>
+          </p:cNvSpPr>
+          <p:nvPr>
+            <p:ph type="dt" sz="half" idx="11"/>
+          </p:nvPr>
+        </p:nvSpPr>
+        <p:spPr/>
+        <p:txBody>
+          <a:bodyPr/>
+          <a:lstStyle/>
+          <a:p>
+            <a:fld id="{D1284D54-D95C-4925-AA43-1C4AD3526BE4}" type="datetime1">
+              <a:rPr lang="en-US" smtClean="0"/>
+              <a:t>2/11/2026</a:t>
+            </a:fld>
+            <a:endParaRPr lang="en-US"/>
+          </a:p>
+        </p:txBody>
+      </p:sp>
+      <p:sp>
+        <p:nvSpPr>
+          <p:cNvPr id="5" name="Table Placeholder 5">
+            <a:extLst>
+              <a:ext uri="{FF2B5EF4-FFF2-40B4-BE49-F238E27FC236}">
+                <a16:creationId xmlns:a16="http://schemas.microsoft.com/office/drawing/2014/main" id="{FA838B6A-6053-4332-A15B-E3F8897A0702}"/>
+              </a:ext>
+            </a:extLst>
+          </p:cNvPr>
+          <p:cNvSpPr>
+            <a:spLocks noGrp="1"/>
+          </p:cNvSpPr>
+          <p:nvPr>
+            <p:ph type="tbl" sz="quarter" idx="12"/>
+          </p:nvPr>
+        </p:nvSpPr>
+        <p:spPr>
+          <a:xfrm>
+            <a:off x="911425" y="1124747"/>
+            <a:ext cx="10177131" cy="5040559"/>
+          </a:xfrm>
+        </p:spPr>
+        <p:txBody>
+          <a:bodyPr/>
+          <a:lstStyle/>
+          <a:p>
+            <a:r>
+              <a:rPr lang="en-US"/>
+              <a:t>Click icon to add table</a:t>
+            </a:r>
+            <a:endParaRPr lang="en-GB"/>
+          </a:p>
+        </p:txBody>
+      </p:sp>
+      <p:sp>
+        <p:nvSpPr>
+          <p:cNvPr id="8" name="Title 1">
+            <a:extLst>
+              <a:ext uri="{FF2B5EF4-FFF2-40B4-BE49-F238E27FC236}">
+                <a16:creationId xmlns:a16="http://schemas.microsoft.com/office/drawing/2014/main" id="{FE78A6AA-4739-4B5C-AD8B-DCA3F0FE9610}"/>
+              </a:ext>
+            </a:extLst>
+          </p:cNvPr>
+          <p:cNvSpPr>
+            <a:spLocks noGrp="1"/>
+          </p:cNvSpPr>
+          <p:nvPr>
+            <p:ph type="title"/>
+          </p:nvPr>
+        </p:nvSpPr>
+        <p:spPr>
+          <a:xfrm>
+            <a:off x="609600" y="161904"/>
+            <a:ext cx="10972800" cy="1143000"/>
+          </a:xfrm>
+        </p:spPr>
+        <p:txBody>
+          <a:bodyPr/>
+          <a:lstStyle/>
+          <a:p>
+            <a:r>
+              <a:rPr lang="en-US" dirty="0"/>
+              <a:t>Click to edit Master title style</a:t>
+            </a:r>
+            <a:endParaRPr lang="en-FI" dirty="0"/>
+          </a:p>
+        </p:txBody>
+      </p:sp>
+    </p:spTree>
+    <p:extLst>
+      <p:ext uri="{BB962C8B-B14F-4D97-AF65-F5344CB8AC3E}">
+        <p14:creationId xmlns:p14="http://schemas.microsoft.com/office/powerpoint/2010/main" val="2909591722"/>
+      </p:ext>
+    </p:extLst>
+  </p:cSld>
+  <p:clrMapOvr>
+    <a:masterClrMapping/>
+  </p:clrMapOvr>
+</p:sldLayout>
+</file>
+
+<file path=ppt/slideLayouts/slideLayout44.xml><?xml version="1.0" encoding="utf-8"?>
+<p:sldLayout xmlns:a="http://schemas.openxmlformats.org/drawingml/2006/main" xmlns:r="http://schemas.openxmlformats.org/officeDocument/2006/relationships" xmlns:p="http://schemas.openxmlformats.org/presentationml/2006/main" preserve="1" userDrawn="1">
+  <p:cSld name="1_Table layout no lower bar with table header">
+    <p:spTree>
+      <p:nvGrpSpPr>
+        <p:cNvPr id="1" name=""/>
+        <p:cNvGrpSpPr/>
+        <p:nvPr/>
+      </p:nvGrpSpPr>
+      <p:grpSpPr>
+        <a:xfrm>
+          <a:off x="0" y="0"/>
+          <a:ext cx="0" cy="0"/>
+          <a:chOff x="0" y="0"/>
+          <a:chExt cx="0" cy="0"/>
+        </a:xfrm>
+      </p:grpSpPr>
+      <p:sp>
+        <p:nvSpPr>
+          <p:cNvPr id="6" name="Rectangle 5">
+            <a:extLst>
+              <a:ext uri="{FF2B5EF4-FFF2-40B4-BE49-F238E27FC236}">
+                <a16:creationId xmlns:a16="http://schemas.microsoft.com/office/drawing/2014/main" id="{A39025CA-D659-4F0E-B2BC-5670EA697D78}"/>
+              </a:ext>
+            </a:extLst>
+          </p:cNvPr>
+          <p:cNvSpPr/>
+          <p:nvPr userDrawn="1"/>
+        </p:nvSpPr>
+        <p:spPr>
+          <a:xfrm>
+            <a:off x="0" y="5877768"/>
+            <a:ext cx="12192000" cy="980232"/>
+          </a:xfrm>
+          <a:prstGeom prst="rect">
+            <a:avLst/>
+          </a:prstGeom>
+          <a:solidFill>
+            <a:schemeClr val="bg1"/>
+          </a:solidFill>
+          <a:ln>
+            <a:solidFill>
+              <a:schemeClr val="bg1"/>
+            </a:solidFill>
+          </a:ln>
+        </p:spPr>
+        <p:style>
+          <a:lnRef idx="2">
+            <a:schemeClr val="accent1">
+              <a:shade val="50000"/>
+            </a:schemeClr>
+          </a:lnRef>
+          <a:fillRef idx="1">
+            <a:schemeClr val="accent1"/>
+          </a:fillRef>
+          <a:effectRef idx="0">
+            <a:schemeClr val="accent1"/>
+          </a:effectRef>
+          <a:fontRef idx="minor">
+            <a:schemeClr val="lt1"/>
+          </a:fontRef>
+        </p:style>
+        <p:txBody>
+          <a:bodyPr rtlCol="0" anchor="ctr"/>
+          <a:lstStyle/>
+          <a:p>
+            <a:pPr algn="ctr"/>
+            <a:endParaRPr lang="en-FI"/>
+          </a:p>
+        </p:txBody>
+      </p:sp>
+      <p:sp>
+        <p:nvSpPr>
+          <p:cNvPr id="4" name="Date Placeholder 3">
+            <a:extLst>
+              <a:ext uri="{FF2B5EF4-FFF2-40B4-BE49-F238E27FC236}">
+                <a16:creationId xmlns:a16="http://schemas.microsoft.com/office/drawing/2014/main" id="{EA1446E3-8C4A-42E7-BE9B-A20FE15EBB4D}"/>
+              </a:ext>
+            </a:extLst>
+          </p:cNvPr>
+          <p:cNvSpPr>
+            <a:spLocks noGrp="1"/>
+          </p:cNvSpPr>
+          <p:nvPr>
+            <p:ph type="dt" sz="half" idx="11"/>
+          </p:nvPr>
+        </p:nvSpPr>
+        <p:spPr/>
+        <p:txBody>
+          <a:bodyPr/>
+          <a:lstStyle/>
+          <a:p>
+            <a:fld id="{6A82D370-C2FB-4F50-A2B2-FFE2C3631AA0}" type="datetime1">
+              <a:rPr lang="en-US" smtClean="0"/>
+              <a:t>2/11/2026</a:t>
+            </a:fld>
+            <a:endParaRPr lang="en-US"/>
+          </a:p>
+        </p:txBody>
+      </p:sp>
+      <p:sp>
+        <p:nvSpPr>
+          <p:cNvPr id="5" name="Table Placeholder 5">
+            <a:extLst>
+              <a:ext uri="{FF2B5EF4-FFF2-40B4-BE49-F238E27FC236}">
+                <a16:creationId xmlns:a16="http://schemas.microsoft.com/office/drawing/2014/main" id="{FA838B6A-6053-4332-A15B-E3F8897A0702}"/>
+              </a:ext>
+            </a:extLst>
+          </p:cNvPr>
+          <p:cNvSpPr>
+            <a:spLocks noGrp="1"/>
+          </p:cNvSpPr>
+          <p:nvPr>
+            <p:ph type="tbl" sz="quarter" idx="12"/>
+          </p:nvPr>
+        </p:nvSpPr>
+        <p:spPr>
+          <a:xfrm>
+            <a:off x="889463" y="2144684"/>
+            <a:ext cx="10199094" cy="4020622"/>
+          </a:xfrm>
+        </p:spPr>
+        <p:txBody>
+          <a:bodyPr/>
+          <a:lstStyle/>
+          <a:p>
+            <a:r>
+              <a:rPr lang="en-US" dirty="0"/>
+              <a:t>Click icon to add table</a:t>
+            </a:r>
+            <a:endParaRPr lang="en-GB" dirty="0"/>
+          </a:p>
+        </p:txBody>
+      </p:sp>
+      <p:sp>
+        <p:nvSpPr>
+          <p:cNvPr id="8" name="Text Placeholder 13">
+            <a:extLst>
+              <a:ext uri="{FF2B5EF4-FFF2-40B4-BE49-F238E27FC236}">
+                <a16:creationId xmlns:a16="http://schemas.microsoft.com/office/drawing/2014/main" id="{57CEFB6B-53C1-42B9-9BF3-642691AACDC8}"/>
+              </a:ext>
+            </a:extLst>
+          </p:cNvPr>
+          <p:cNvSpPr>
+            <a:spLocks noGrp="1"/>
+          </p:cNvSpPr>
+          <p:nvPr>
+            <p:ph type="body" sz="quarter" idx="14"/>
+          </p:nvPr>
+        </p:nvSpPr>
+        <p:spPr>
+          <a:xfrm>
+            <a:off x="609601" y="1469880"/>
+            <a:ext cx="10972800" cy="408794"/>
+          </a:xfrm>
+        </p:spPr>
+        <p:txBody>
+          <a:bodyPr/>
+          <a:lstStyle>
+            <a:lvl1pPr marL="0" indent="0">
+              <a:buNone/>
+              <a:defRPr sz="1400" b="1">
+                <a:solidFill>
+                  <a:schemeClr val="tx1"/>
+                </a:solidFill>
+              </a:defRPr>
+            </a:lvl1pPr>
+          </a:lstStyle>
+          <a:p>
+            <a:pPr lvl="0"/>
+            <a:r>
+              <a:rPr lang="en-US" dirty="0"/>
+              <a:t>Click to edit Master text styles</a:t>
+            </a:r>
+            <a:endParaRPr lang="en-FI" dirty="0"/>
+          </a:p>
+        </p:txBody>
+      </p:sp>
+      <p:sp>
+        <p:nvSpPr>
+          <p:cNvPr id="9" name="Title 1">
+            <a:extLst>
+              <a:ext uri="{FF2B5EF4-FFF2-40B4-BE49-F238E27FC236}">
+                <a16:creationId xmlns:a16="http://schemas.microsoft.com/office/drawing/2014/main" id="{E67739B6-62DA-4225-8C3D-4F7FFB7373BB}"/>
+              </a:ext>
+            </a:extLst>
+          </p:cNvPr>
+          <p:cNvSpPr>
+            <a:spLocks noGrp="1"/>
+          </p:cNvSpPr>
+          <p:nvPr>
+            <p:ph type="title"/>
+          </p:nvPr>
+        </p:nvSpPr>
+        <p:spPr>
+          <a:xfrm>
+            <a:off x="609600" y="161904"/>
+            <a:ext cx="10972800" cy="1143000"/>
+          </a:xfrm>
+        </p:spPr>
+        <p:txBody>
+          <a:bodyPr/>
+          <a:lstStyle/>
+          <a:p>
+            <a:r>
+              <a:rPr lang="en-US" dirty="0"/>
+              <a:t>Click to edit Master title style</a:t>
+            </a:r>
+            <a:endParaRPr lang="en-FI" dirty="0"/>
+          </a:p>
+        </p:txBody>
+      </p:sp>
+    </p:spTree>
+    <p:extLst>
+      <p:ext uri="{BB962C8B-B14F-4D97-AF65-F5344CB8AC3E}">
+        <p14:creationId xmlns:p14="http://schemas.microsoft.com/office/powerpoint/2010/main" val="2965124224"/>
+      </p:ext>
+    </p:extLst>
+  </p:cSld>
+  <p:clrMapOvr>
+    <a:masterClrMapping/>
+  </p:clrMapOvr>
+</p:sldLayout>
+</file>
+
+<file path=ppt/slideLayouts/slideLayout45.xml><?xml version="1.0" encoding="utf-8"?>
+<p:sldLayout xmlns:a="http://schemas.openxmlformats.org/drawingml/2006/main" xmlns:r="http://schemas.openxmlformats.org/officeDocument/2006/relationships" xmlns:p="http://schemas.openxmlformats.org/presentationml/2006/main" preserve="1" userDrawn="1">
+  <p:cSld name="Two Content Narrow Left">
+    <p:spTree>
+      <p:nvGrpSpPr>
+        <p:cNvPr id="1" name=""/>
+        <p:cNvGrpSpPr/>
+        <p:nvPr/>
+      </p:nvGrpSpPr>
+      <p:grpSpPr>
+        <a:xfrm>
+          <a:off x="0" y="0"/>
+          <a:ext cx="0" cy="0"/>
+          <a:chOff x="0" y="0"/>
+          <a:chExt cx="0" cy="0"/>
+        </a:xfrm>
+      </p:grpSpPr>
+      <p:sp>
+        <p:nvSpPr>
+          <p:cNvPr id="2" name="Title 1">
+            <a:extLst>
+              <a:ext uri="{FF2B5EF4-FFF2-40B4-BE49-F238E27FC236}">
+                <a16:creationId xmlns:a16="http://schemas.microsoft.com/office/drawing/2014/main" id="{784A45DB-BEFD-4107-922A-A2B91DA72FE1}"/>
+              </a:ext>
+            </a:extLst>
+          </p:cNvPr>
+          <p:cNvSpPr>
+            <a:spLocks noGrp="1"/>
+          </p:cNvSpPr>
+          <p:nvPr>
+            <p:ph type="title"/>
+          </p:nvPr>
+        </p:nvSpPr>
+        <p:spPr>
+          <a:xfrm>
+            <a:off x="609600" y="161904"/>
+            <a:ext cx="10972800" cy="1143000"/>
+          </a:xfrm>
+        </p:spPr>
+        <p:txBody>
+          <a:bodyPr/>
+          <a:lstStyle/>
+          <a:p>
+            <a:r>
+              <a:rPr lang="en-US" dirty="0"/>
+              <a:t>Click to edit Master title style</a:t>
+            </a:r>
+            <a:endParaRPr lang="en-FI" dirty="0"/>
+          </a:p>
+        </p:txBody>
+      </p:sp>
+      <p:sp>
+        <p:nvSpPr>
+          <p:cNvPr id="3" name="Slide Number Placeholder 2">
+            <a:extLst>
+              <a:ext uri="{FF2B5EF4-FFF2-40B4-BE49-F238E27FC236}">
+                <a16:creationId xmlns:a16="http://schemas.microsoft.com/office/drawing/2014/main" id="{83A92B49-EFFB-4EF1-85ED-7BEBA829EF6B}"/>
+              </a:ext>
+            </a:extLst>
+          </p:cNvPr>
+          <p:cNvSpPr>
+            <a:spLocks noGrp="1"/>
+          </p:cNvSpPr>
+          <p:nvPr>
+            <p:ph type="sldNum" sz="quarter" idx="10"/>
+          </p:nvPr>
+        </p:nvSpPr>
+        <p:spPr/>
+        <p:txBody>
+          <a:bodyPr/>
+          <a:lstStyle/>
+          <a:p>
+            <a:fld id="{C5EF2332-01BF-834F-8236-50238282D533}" type="slidenum">
+              <a:rPr lang="en-US" smtClean="0"/>
+              <a:t>‹#›</a:t>
+            </a:fld>
+            <a:endParaRPr lang="en-US"/>
+          </a:p>
+        </p:txBody>
+      </p:sp>
+      <p:sp>
+        <p:nvSpPr>
+          <p:cNvPr id="4" name="Date Placeholder 3">
+            <a:extLst>
+              <a:ext uri="{FF2B5EF4-FFF2-40B4-BE49-F238E27FC236}">
+                <a16:creationId xmlns:a16="http://schemas.microsoft.com/office/drawing/2014/main" id="{E6BA49CC-5D1D-4EB3-AEFB-0CAF5DA01019}"/>
+              </a:ext>
+            </a:extLst>
+          </p:cNvPr>
+          <p:cNvSpPr>
+            <a:spLocks noGrp="1"/>
+          </p:cNvSpPr>
+          <p:nvPr>
+            <p:ph type="dt" sz="half" idx="11"/>
+          </p:nvPr>
+        </p:nvSpPr>
+        <p:spPr/>
+        <p:txBody>
+          <a:bodyPr/>
+          <a:lstStyle/>
+          <a:p>
+            <a:fld id="{8FE7647C-A8DA-4535-9F06-83401DD8669E}" type="datetime1">
+              <a:rPr lang="en-US" smtClean="0"/>
+              <a:t>2/11/2026</a:t>
+            </a:fld>
+            <a:endParaRPr lang="en-US"/>
+          </a:p>
+        </p:txBody>
+      </p:sp>
+      <p:sp>
+        <p:nvSpPr>
+          <p:cNvPr id="8" name="Content Placeholder 2">
+            <a:extLst>
+              <a:ext uri="{FF2B5EF4-FFF2-40B4-BE49-F238E27FC236}">
+                <a16:creationId xmlns:a16="http://schemas.microsoft.com/office/drawing/2014/main" id="{A238319E-C55C-4C7D-9DE4-DF16081972E8}"/>
+              </a:ext>
+            </a:extLst>
+          </p:cNvPr>
+          <p:cNvSpPr>
+            <a:spLocks noGrp="1"/>
+          </p:cNvSpPr>
+          <p:nvPr>
+            <p:ph sz="half" idx="1"/>
+          </p:nvPr>
+        </p:nvSpPr>
+        <p:spPr>
+          <a:xfrm>
+            <a:off x="3770334" y="1261954"/>
+            <a:ext cx="7812066" cy="4759338"/>
+          </a:xfrm>
+        </p:spPr>
+        <p:txBody>
+          <a:bodyPr/>
+          <a:lstStyle>
+            <a:lvl1pPr>
+              <a:defRPr sz="2100" b="0"/>
+            </a:lvl1pPr>
+            <a:lvl2pPr>
+              <a:defRPr sz="1800" b="0"/>
+            </a:lvl2pPr>
+            <a:lvl3pPr>
+              <a:defRPr sz="1500" b="0"/>
+            </a:lvl3pPr>
+            <a:lvl4pPr>
+              <a:defRPr sz="1350" b="0"/>
+            </a:lvl4pPr>
+            <a:lvl5pPr>
+              <a:defRPr sz="1350" b="0"/>
+            </a:lvl5pPr>
+            <a:lvl6pPr>
+              <a:defRPr sz="1350"/>
+            </a:lvl6pPr>
+            <a:lvl7pPr>
+              <a:defRPr sz="1350"/>
+            </a:lvl7pPr>
+            <a:lvl8pPr>
+              <a:defRPr sz="1350"/>
+            </a:lvl8pPr>
+            <a:lvl9pPr>
+              <a:defRPr sz="1350"/>
+            </a:lvl9pPr>
+          </a:lstStyle>
+          <a:p>
+            <a:pPr lvl="0"/>
+            <a:r>
+              <a:rPr lang="en-US" dirty="0"/>
+              <a:t>Edit Master text styles</a:t>
+            </a:r>
+          </a:p>
+          <a:p>
+            <a:pPr lvl="1"/>
+            <a:r>
+              <a:rPr lang="en-US" dirty="0"/>
+              <a:t>Second level</a:t>
+            </a:r>
+          </a:p>
+          <a:p>
+            <a:pPr lvl="2"/>
+            <a:r>
+              <a:rPr lang="en-US" dirty="0"/>
+              <a:t>Third level</a:t>
+            </a:r>
+          </a:p>
+          <a:p>
+            <a:pPr lvl="3"/>
+            <a:r>
+              <a:rPr lang="en-US" dirty="0"/>
+              <a:t>Fourth level</a:t>
+            </a:r>
+          </a:p>
+          <a:p>
+            <a:pPr lvl="4"/>
+            <a:r>
+              <a:rPr lang="en-US" dirty="0"/>
+              <a:t>Fifth level</a:t>
+            </a:r>
+            <a:endParaRPr lang="en-GB" dirty="0"/>
+          </a:p>
+        </p:txBody>
+      </p:sp>
+      <p:sp>
+        <p:nvSpPr>
+          <p:cNvPr id="9" name="Content Placeholder 2">
+            <a:extLst>
+              <a:ext uri="{FF2B5EF4-FFF2-40B4-BE49-F238E27FC236}">
+                <a16:creationId xmlns:a16="http://schemas.microsoft.com/office/drawing/2014/main" id="{F3E41DED-08E3-4145-AA90-BC9385880CF4}"/>
+              </a:ext>
+            </a:extLst>
+          </p:cNvPr>
+          <p:cNvSpPr>
+            <a:spLocks noGrp="1"/>
+          </p:cNvSpPr>
+          <p:nvPr>
+            <p:ph sz="half" idx="12"/>
+          </p:nvPr>
+        </p:nvSpPr>
+        <p:spPr>
+          <a:xfrm>
+            <a:off x="609601" y="1261954"/>
+            <a:ext cx="2997895" cy="4759338"/>
+          </a:xfrm>
+        </p:spPr>
+        <p:txBody>
+          <a:bodyPr/>
+          <a:lstStyle>
+            <a:lvl1pPr>
+              <a:defRPr sz="2100" b="0"/>
+            </a:lvl1pPr>
+            <a:lvl2pPr>
+              <a:defRPr sz="1800" b="0"/>
+            </a:lvl2pPr>
+            <a:lvl3pPr>
+              <a:defRPr sz="1500" b="0"/>
+            </a:lvl3pPr>
+            <a:lvl4pPr>
+              <a:defRPr sz="1350" b="0"/>
+            </a:lvl4pPr>
+            <a:lvl5pPr>
+              <a:defRPr sz="1350" b="0"/>
+            </a:lvl5pPr>
+            <a:lvl6pPr>
+              <a:defRPr sz="1350"/>
+            </a:lvl6pPr>
+            <a:lvl7pPr>
+              <a:defRPr sz="1350"/>
+            </a:lvl7pPr>
+            <a:lvl8pPr>
+              <a:defRPr sz="1350"/>
+            </a:lvl8pPr>
+            <a:lvl9pPr>
+              <a:defRPr sz="1350"/>
+            </a:lvl9pPr>
+          </a:lstStyle>
+          <a:p>
+            <a:pPr lvl="0"/>
+            <a:r>
+              <a:rPr lang="en-US" dirty="0"/>
+              <a:t>Edit Master text styles</a:t>
+            </a:r>
+          </a:p>
+          <a:p>
+            <a:pPr lvl="1"/>
+            <a:r>
+              <a:rPr lang="en-US" dirty="0"/>
+              <a:t>Second level</a:t>
+            </a:r>
+          </a:p>
+          <a:p>
+            <a:pPr lvl="2"/>
+            <a:r>
+              <a:rPr lang="en-US" dirty="0"/>
+              <a:t>Third level</a:t>
+            </a:r>
+          </a:p>
+          <a:p>
+            <a:pPr lvl="3"/>
+            <a:r>
+              <a:rPr lang="en-US" dirty="0"/>
+              <a:t>Fourth level</a:t>
+            </a:r>
+          </a:p>
+          <a:p>
+            <a:pPr lvl="4"/>
+            <a:r>
+              <a:rPr lang="en-US" dirty="0"/>
+              <a:t>Fifth level</a:t>
+            </a:r>
+            <a:endParaRPr lang="en-GB" dirty="0"/>
+          </a:p>
+        </p:txBody>
+      </p:sp>
+    </p:spTree>
+    <p:extLst>
+      <p:ext uri="{BB962C8B-B14F-4D97-AF65-F5344CB8AC3E}">
+        <p14:creationId xmlns:p14="http://schemas.microsoft.com/office/powerpoint/2010/main" val="385918845"/>
+      </p:ext>
+    </p:extLst>
+  </p:cSld>
+  <p:clrMapOvr>
+    <a:masterClrMapping/>
+  </p:clrMapOvr>
+</p:sldLayout>
+</file>
+
+<file path=ppt/slideLayouts/slideLayout46.xml><?xml version="1.0" encoding="utf-8"?>
+<p:sldLayout xmlns:a="http://schemas.openxmlformats.org/drawingml/2006/main" xmlns:r="http://schemas.openxmlformats.org/officeDocument/2006/relationships" xmlns:p="http://schemas.openxmlformats.org/presentationml/2006/main" preserve="1" userDrawn="1">
+  <p:cSld name="Custom Three Content">
+    <p:spTree>
+      <p:nvGrpSpPr>
+        <p:cNvPr id="1" name=""/>
+        <p:cNvGrpSpPr/>
+        <p:nvPr/>
+      </p:nvGrpSpPr>
+      <p:grpSpPr>
+        <a:xfrm>
+          <a:off x="0" y="0"/>
+          <a:ext cx="0" cy="0"/>
+          <a:chOff x="0" y="0"/>
+          <a:chExt cx="0" cy="0"/>
+        </a:xfrm>
+      </p:grpSpPr>
+      <p:sp>
+        <p:nvSpPr>
+          <p:cNvPr id="3" name="Slide Number Placeholder 2">
+            <a:extLst>
+              <a:ext uri="{FF2B5EF4-FFF2-40B4-BE49-F238E27FC236}">
+                <a16:creationId xmlns:a16="http://schemas.microsoft.com/office/drawing/2014/main" id="{38EA215F-E308-4485-BD7A-A7B7B561240F}"/>
+              </a:ext>
+            </a:extLst>
+          </p:cNvPr>
+          <p:cNvSpPr>
+            <a:spLocks noGrp="1"/>
+          </p:cNvSpPr>
+          <p:nvPr>
+            <p:ph type="sldNum" sz="quarter" idx="10"/>
+          </p:nvPr>
+        </p:nvSpPr>
+        <p:spPr/>
+        <p:txBody>
+          <a:bodyPr/>
+          <a:lstStyle/>
+          <a:p>
+            <a:fld id="{C5EF2332-01BF-834F-8236-50238282D533}" type="slidenum">
+              <a:rPr lang="en-US" smtClean="0"/>
+              <a:t>‹#›</a:t>
+            </a:fld>
+            <a:endParaRPr lang="en-US"/>
+          </a:p>
+        </p:txBody>
+      </p:sp>
+      <p:sp>
+        <p:nvSpPr>
+          <p:cNvPr id="4" name="Date Placeholder 3">
+            <a:extLst>
+              <a:ext uri="{FF2B5EF4-FFF2-40B4-BE49-F238E27FC236}">
+                <a16:creationId xmlns:a16="http://schemas.microsoft.com/office/drawing/2014/main" id="{BCA401B4-EA85-450A-9AD6-B22F81704CBF}"/>
+              </a:ext>
+            </a:extLst>
+          </p:cNvPr>
+          <p:cNvSpPr>
+            <a:spLocks noGrp="1"/>
+          </p:cNvSpPr>
+          <p:nvPr>
+            <p:ph type="dt" sz="half" idx="11"/>
+          </p:nvPr>
+        </p:nvSpPr>
+        <p:spPr/>
+        <p:txBody>
+          <a:bodyPr/>
+          <a:lstStyle/>
+          <a:p>
+            <a:fld id="{745A7203-D5A1-404D-8437-D635E03A7299}" type="datetime1">
+              <a:rPr lang="en-US" smtClean="0"/>
+              <a:t>2/11/2026</a:t>
+            </a:fld>
+            <a:endParaRPr lang="en-US"/>
+          </a:p>
+        </p:txBody>
+      </p:sp>
+      <p:sp>
+        <p:nvSpPr>
+          <p:cNvPr id="5" name="Content Placeholder 2">
+            <a:extLst>
+              <a:ext uri="{FF2B5EF4-FFF2-40B4-BE49-F238E27FC236}">
+                <a16:creationId xmlns:a16="http://schemas.microsoft.com/office/drawing/2014/main" id="{314B0D1C-69A9-4DE5-A2EC-3AE23CBAB864}"/>
+              </a:ext>
+            </a:extLst>
+          </p:cNvPr>
+          <p:cNvSpPr>
+            <a:spLocks noGrp="1"/>
+          </p:cNvSpPr>
+          <p:nvPr>
+            <p:ph sz="half" idx="1"/>
+          </p:nvPr>
+        </p:nvSpPr>
+        <p:spPr>
+          <a:xfrm>
+            <a:off x="6176432" y="1261953"/>
+            <a:ext cx="5669535" cy="5365588"/>
+          </a:xfrm>
+        </p:spPr>
+        <p:txBody>
+          <a:bodyPr/>
+          <a:lstStyle>
+            <a:lvl1pPr>
+              <a:defRPr sz="2100" b="0"/>
+            </a:lvl1pPr>
+            <a:lvl2pPr>
+              <a:defRPr sz="1800" b="0"/>
+            </a:lvl2pPr>
+            <a:lvl3pPr>
+              <a:defRPr sz="1500" b="0"/>
+            </a:lvl3pPr>
+            <a:lvl4pPr>
+              <a:defRPr sz="1350" b="0"/>
+            </a:lvl4pPr>
+            <a:lvl5pPr>
+              <a:defRPr sz="1350" b="0"/>
+            </a:lvl5pPr>
+            <a:lvl6pPr>
+              <a:defRPr sz="1350"/>
+            </a:lvl6pPr>
+            <a:lvl7pPr>
+              <a:defRPr sz="1350"/>
+            </a:lvl7pPr>
+            <a:lvl8pPr>
+              <a:defRPr sz="1350"/>
+            </a:lvl8pPr>
+            <a:lvl9pPr>
+              <a:defRPr sz="1350"/>
+            </a:lvl9pPr>
+          </a:lstStyle>
+          <a:p>
+            <a:pPr lvl="0"/>
+            <a:r>
+              <a:rPr lang="en-US" dirty="0"/>
+              <a:t>Edit Master text styles</a:t>
+            </a:r>
+          </a:p>
+          <a:p>
+            <a:pPr lvl="1"/>
+            <a:r>
+              <a:rPr lang="en-US" dirty="0"/>
+              <a:t>Second level</a:t>
+            </a:r>
+          </a:p>
+          <a:p>
+            <a:pPr lvl="2"/>
+            <a:r>
+              <a:rPr lang="en-US" dirty="0"/>
+              <a:t>Third level</a:t>
+            </a:r>
+          </a:p>
+          <a:p>
+            <a:pPr lvl="3"/>
+            <a:r>
+              <a:rPr lang="en-US" dirty="0"/>
+              <a:t>Fourth level</a:t>
+            </a:r>
+          </a:p>
+          <a:p>
+            <a:pPr lvl="4"/>
+            <a:r>
+              <a:rPr lang="en-US" dirty="0"/>
+              <a:t>Fifth level</a:t>
+            </a:r>
+            <a:endParaRPr lang="en-GB" dirty="0"/>
+          </a:p>
+        </p:txBody>
+      </p:sp>
+      <p:sp>
+        <p:nvSpPr>
+          <p:cNvPr id="9" name="Rectangle 8">
+            <a:extLst>
+              <a:ext uri="{FF2B5EF4-FFF2-40B4-BE49-F238E27FC236}">
+                <a16:creationId xmlns:a16="http://schemas.microsoft.com/office/drawing/2014/main" id="{40E36CC0-0CEE-4F7D-BD64-E12742EC33CD}"/>
+              </a:ext>
+            </a:extLst>
+          </p:cNvPr>
+          <p:cNvSpPr/>
+          <p:nvPr userDrawn="1"/>
+        </p:nvSpPr>
+        <p:spPr>
+          <a:xfrm>
+            <a:off x="0" y="5877768"/>
+            <a:ext cx="12192000" cy="980232"/>
+          </a:xfrm>
+          <a:prstGeom prst="rect">
+            <a:avLst/>
+          </a:prstGeom>
+          <a:solidFill>
+            <a:schemeClr val="bg1"/>
+          </a:solidFill>
+          <a:ln>
+            <a:solidFill>
+              <a:schemeClr val="bg1"/>
+            </a:solidFill>
+          </a:ln>
+        </p:spPr>
+        <p:style>
+          <a:lnRef idx="2">
+            <a:schemeClr val="accent1">
+              <a:shade val="50000"/>
+            </a:schemeClr>
+          </a:lnRef>
+          <a:fillRef idx="1">
+            <a:schemeClr val="accent1"/>
+          </a:fillRef>
+          <a:effectRef idx="0">
+            <a:schemeClr val="accent1"/>
+          </a:effectRef>
+          <a:fontRef idx="minor">
+            <a:schemeClr val="lt1"/>
+          </a:fontRef>
+        </p:style>
+        <p:txBody>
+          <a:bodyPr rtlCol="0" anchor="ctr"/>
+          <a:lstStyle/>
+          <a:p>
+            <a:pPr algn="ctr"/>
+            <a:endParaRPr lang="en-FI"/>
+          </a:p>
+        </p:txBody>
+      </p:sp>
+      <p:sp>
+        <p:nvSpPr>
+          <p:cNvPr id="6" name="Content Placeholder 2">
+            <a:extLst>
+              <a:ext uri="{FF2B5EF4-FFF2-40B4-BE49-F238E27FC236}">
+                <a16:creationId xmlns:a16="http://schemas.microsoft.com/office/drawing/2014/main" id="{3D8B041D-E134-4B62-A4BC-A12CE4E35896}"/>
+              </a:ext>
+            </a:extLst>
+          </p:cNvPr>
+          <p:cNvSpPr>
+            <a:spLocks noGrp="1"/>
+          </p:cNvSpPr>
+          <p:nvPr>
+            <p:ph sz="half" idx="12"/>
+          </p:nvPr>
+        </p:nvSpPr>
+        <p:spPr>
+          <a:xfrm>
+            <a:off x="346033" y="1261955"/>
+            <a:ext cx="5669534" cy="1493945"/>
+          </a:xfrm>
+        </p:spPr>
+        <p:txBody>
+          <a:bodyPr/>
+          <a:lstStyle>
+            <a:lvl1pPr>
+              <a:defRPr sz="2100" b="0"/>
+            </a:lvl1pPr>
+            <a:lvl2pPr>
+              <a:defRPr sz="1800" b="0"/>
+            </a:lvl2pPr>
+            <a:lvl3pPr>
+              <a:defRPr sz="1500" b="0"/>
+            </a:lvl3pPr>
+            <a:lvl4pPr>
+              <a:defRPr sz="1350" b="0"/>
+            </a:lvl4pPr>
+            <a:lvl5pPr>
+              <a:defRPr sz="1350" b="0"/>
+            </a:lvl5pPr>
+            <a:lvl6pPr>
+              <a:defRPr sz="1350"/>
+            </a:lvl6pPr>
+            <a:lvl7pPr>
+              <a:defRPr sz="1350"/>
+            </a:lvl7pPr>
+            <a:lvl8pPr>
+              <a:defRPr sz="1350"/>
+            </a:lvl8pPr>
+            <a:lvl9pPr>
+              <a:defRPr sz="1350"/>
+            </a:lvl9pPr>
+          </a:lstStyle>
+          <a:p>
+            <a:pPr lvl="0"/>
+            <a:r>
+              <a:rPr lang="en-US" dirty="0"/>
+              <a:t>Edit Master text styles</a:t>
+            </a:r>
+          </a:p>
+          <a:p>
+            <a:pPr lvl="1"/>
+            <a:r>
+              <a:rPr lang="en-US" dirty="0"/>
+              <a:t>Second level</a:t>
+            </a:r>
+          </a:p>
+          <a:p>
+            <a:pPr lvl="2"/>
+            <a:r>
+              <a:rPr lang="en-US" dirty="0"/>
+              <a:t>Third level</a:t>
+            </a:r>
+          </a:p>
+          <a:p>
+            <a:pPr lvl="3"/>
+            <a:r>
+              <a:rPr lang="en-US" dirty="0"/>
+              <a:t>Fourth level</a:t>
+            </a:r>
+          </a:p>
+          <a:p>
+            <a:pPr lvl="4"/>
+            <a:r>
+              <a:rPr lang="en-US" dirty="0"/>
+              <a:t>Fifth level</a:t>
+            </a:r>
+            <a:endParaRPr lang="en-GB" dirty="0"/>
+          </a:p>
+        </p:txBody>
+      </p:sp>
+      <p:sp>
+        <p:nvSpPr>
+          <p:cNvPr id="7" name="Content Placeholder 2">
+            <a:extLst>
+              <a:ext uri="{FF2B5EF4-FFF2-40B4-BE49-F238E27FC236}">
+                <a16:creationId xmlns:a16="http://schemas.microsoft.com/office/drawing/2014/main" id="{3ECA7F43-0C57-4B08-B5FB-65BC8E5CFF2C}"/>
+              </a:ext>
+            </a:extLst>
+          </p:cNvPr>
+          <p:cNvSpPr>
+            <a:spLocks noGrp="1"/>
+          </p:cNvSpPr>
+          <p:nvPr>
+            <p:ph sz="half" idx="13"/>
+          </p:nvPr>
+        </p:nvSpPr>
+        <p:spPr>
+          <a:xfrm>
+            <a:off x="346033" y="2826645"/>
+            <a:ext cx="5669534" cy="3800897"/>
+          </a:xfrm>
+        </p:spPr>
+        <p:txBody>
+          <a:bodyPr/>
+          <a:lstStyle>
+            <a:lvl1pPr>
+              <a:defRPr sz="2100" b="0"/>
+            </a:lvl1pPr>
+            <a:lvl2pPr>
+              <a:defRPr sz="1800" b="0"/>
+            </a:lvl2pPr>
+            <a:lvl3pPr>
+              <a:defRPr sz="1500" b="0"/>
+            </a:lvl3pPr>
+            <a:lvl4pPr>
+              <a:defRPr sz="1350" b="0"/>
+            </a:lvl4pPr>
+            <a:lvl5pPr>
+              <a:defRPr sz="1350" b="0"/>
+            </a:lvl5pPr>
+            <a:lvl6pPr>
+              <a:defRPr sz="1350"/>
+            </a:lvl6pPr>
+            <a:lvl7pPr>
+              <a:defRPr sz="1350"/>
+            </a:lvl7pPr>
+            <a:lvl8pPr>
+              <a:defRPr sz="1350"/>
+            </a:lvl8pPr>
+            <a:lvl9pPr>
+              <a:defRPr sz="1350"/>
+            </a:lvl9pPr>
+          </a:lstStyle>
+          <a:p>
+            <a:pPr lvl="0"/>
+            <a:r>
+              <a:rPr lang="en-US" dirty="0"/>
+              <a:t>Edit Master text styles</a:t>
+            </a:r>
+          </a:p>
+          <a:p>
+            <a:pPr lvl="1"/>
+            <a:r>
+              <a:rPr lang="en-US" dirty="0"/>
+              <a:t>Second level</a:t>
+            </a:r>
+          </a:p>
+          <a:p>
+            <a:pPr lvl="2"/>
+            <a:r>
+              <a:rPr lang="en-US" dirty="0"/>
+              <a:t>Third level</a:t>
+            </a:r>
+          </a:p>
+          <a:p>
+            <a:pPr lvl="3"/>
+            <a:r>
+              <a:rPr lang="en-US" dirty="0"/>
+              <a:t>Fourth level</a:t>
+            </a:r>
+          </a:p>
+          <a:p>
+            <a:pPr lvl="4"/>
+            <a:r>
+              <a:rPr lang="en-US" dirty="0"/>
+              <a:t>Fifth level</a:t>
+            </a:r>
+            <a:endParaRPr lang="en-GB" dirty="0"/>
+          </a:p>
+        </p:txBody>
+      </p:sp>
+      <p:sp>
+        <p:nvSpPr>
+          <p:cNvPr id="10" name="Title 1">
+            <a:extLst>
+              <a:ext uri="{FF2B5EF4-FFF2-40B4-BE49-F238E27FC236}">
+                <a16:creationId xmlns:a16="http://schemas.microsoft.com/office/drawing/2014/main" id="{FD1F9657-5C8B-4EEF-A1B6-DCE306850F4C}"/>
+              </a:ext>
+            </a:extLst>
+          </p:cNvPr>
+          <p:cNvSpPr>
+            <a:spLocks noGrp="1"/>
+          </p:cNvSpPr>
+          <p:nvPr>
+            <p:ph type="title"/>
+          </p:nvPr>
+        </p:nvSpPr>
+        <p:spPr>
+          <a:xfrm>
+            <a:off x="346033" y="48210"/>
+            <a:ext cx="11499934" cy="1143000"/>
+          </a:xfrm>
+        </p:spPr>
+        <p:txBody>
+          <a:bodyPr/>
+          <a:lstStyle/>
+          <a:p>
+            <a:r>
+              <a:rPr lang="en-US" dirty="0"/>
+              <a:t>Click to edit Master title style</a:t>
+            </a:r>
+            <a:endParaRPr lang="en-GB" dirty="0"/>
+          </a:p>
+        </p:txBody>
+      </p:sp>
+    </p:spTree>
+    <p:extLst>
+      <p:ext uri="{BB962C8B-B14F-4D97-AF65-F5344CB8AC3E}">
+        <p14:creationId xmlns:p14="http://schemas.microsoft.com/office/powerpoint/2010/main" val="2425145481"/>
+      </p:ext>
+    </p:extLst>
+  </p:cSld>
+  <p:clrMapOvr>
+    <a:masterClrMapping/>
+  </p:clrMapOvr>
+</p:sldLayout>
+</file>
+
+<file path=ppt/slideLayouts/slideLayout47.xml><?xml version="1.0" encoding="utf-8"?>
+<p:sldLayout xmlns:a="http://schemas.openxmlformats.org/drawingml/2006/main" xmlns:r="http://schemas.openxmlformats.org/officeDocument/2006/relationships" xmlns:p="http://schemas.openxmlformats.org/presentationml/2006/main" preserve="1" userDrawn="1">
+  <p:cSld name="Custom Three Content With Header">
+    <p:spTree>
+      <p:nvGrpSpPr>
+        <p:cNvPr id="1" name=""/>
+        <p:cNvGrpSpPr/>
+        <p:nvPr/>
+      </p:nvGrpSpPr>
+      <p:grpSpPr>
+        <a:xfrm>
+          <a:off x="0" y="0"/>
+          <a:ext cx="0" cy="0"/>
+          <a:chOff x="0" y="0"/>
+          <a:chExt cx="0" cy="0"/>
+        </a:xfrm>
+      </p:grpSpPr>
+      <p:sp>
+        <p:nvSpPr>
+          <p:cNvPr id="3" name="Slide Number Placeholder 2">
+            <a:extLst>
+              <a:ext uri="{FF2B5EF4-FFF2-40B4-BE49-F238E27FC236}">
+                <a16:creationId xmlns:a16="http://schemas.microsoft.com/office/drawing/2014/main" id="{38EA215F-E308-4485-BD7A-A7B7B561240F}"/>
+              </a:ext>
+            </a:extLst>
+          </p:cNvPr>
+          <p:cNvSpPr>
+            <a:spLocks noGrp="1"/>
+          </p:cNvSpPr>
+          <p:nvPr>
+            <p:ph type="sldNum" sz="quarter" idx="10"/>
+          </p:nvPr>
+        </p:nvSpPr>
+        <p:spPr/>
+        <p:txBody>
+          <a:bodyPr/>
+          <a:lstStyle/>
+          <a:p>
+            <a:fld id="{C5EF2332-01BF-834F-8236-50238282D533}" type="slidenum">
+              <a:rPr lang="en-US" smtClean="0"/>
+              <a:t>‹#›</a:t>
+            </a:fld>
+            <a:endParaRPr lang="en-US"/>
+          </a:p>
+        </p:txBody>
+      </p:sp>
+      <p:sp>
+        <p:nvSpPr>
+          <p:cNvPr id="4" name="Date Placeholder 3">
+            <a:extLst>
+              <a:ext uri="{FF2B5EF4-FFF2-40B4-BE49-F238E27FC236}">
+                <a16:creationId xmlns:a16="http://schemas.microsoft.com/office/drawing/2014/main" id="{BCA401B4-EA85-450A-9AD6-B22F81704CBF}"/>
+              </a:ext>
+            </a:extLst>
+          </p:cNvPr>
+          <p:cNvSpPr>
+            <a:spLocks noGrp="1"/>
+          </p:cNvSpPr>
+          <p:nvPr>
+            <p:ph type="dt" sz="half" idx="11"/>
+          </p:nvPr>
+        </p:nvSpPr>
+        <p:spPr/>
+        <p:txBody>
+          <a:bodyPr/>
+          <a:lstStyle/>
+          <a:p>
+            <a:fld id="{0BFD1247-DCC1-486C-82A5-541CCEF1F3A5}" type="datetime1">
+              <a:rPr lang="en-US" smtClean="0"/>
+              <a:t>2/11/2026</a:t>
+            </a:fld>
+            <a:endParaRPr lang="en-US"/>
+          </a:p>
+        </p:txBody>
+      </p:sp>
+      <p:sp>
+        <p:nvSpPr>
+          <p:cNvPr id="5" name="Content Placeholder 2">
+            <a:extLst>
+              <a:ext uri="{FF2B5EF4-FFF2-40B4-BE49-F238E27FC236}">
+                <a16:creationId xmlns:a16="http://schemas.microsoft.com/office/drawing/2014/main" id="{314B0D1C-69A9-4DE5-A2EC-3AE23CBAB864}"/>
+              </a:ext>
+            </a:extLst>
+          </p:cNvPr>
+          <p:cNvSpPr>
+            <a:spLocks noGrp="1"/>
+          </p:cNvSpPr>
+          <p:nvPr>
+            <p:ph sz="half" idx="1"/>
+          </p:nvPr>
+        </p:nvSpPr>
+        <p:spPr>
+          <a:xfrm>
+            <a:off x="6176432" y="1670857"/>
+            <a:ext cx="5669535" cy="4956683"/>
+          </a:xfrm>
+        </p:spPr>
+        <p:txBody>
+          <a:bodyPr/>
+          <a:lstStyle>
+            <a:lvl1pPr>
+              <a:defRPr sz="2100" b="0"/>
+            </a:lvl1pPr>
+            <a:lvl2pPr>
+              <a:defRPr sz="1800" b="0"/>
+            </a:lvl2pPr>
+            <a:lvl3pPr>
+              <a:defRPr sz="1500" b="0"/>
+            </a:lvl3pPr>
+            <a:lvl4pPr>
+              <a:defRPr sz="1350" b="0"/>
+            </a:lvl4pPr>
+            <a:lvl5pPr>
+              <a:defRPr sz="1350" b="0"/>
+            </a:lvl5pPr>
+            <a:lvl6pPr>
+              <a:defRPr sz="1350"/>
+            </a:lvl6pPr>
+            <a:lvl7pPr>
+              <a:defRPr sz="1350"/>
+            </a:lvl7pPr>
+            <a:lvl8pPr>
+              <a:defRPr sz="1350"/>
+            </a:lvl8pPr>
+            <a:lvl9pPr>
+              <a:defRPr sz="1350"/>
+            </a:lvl9pPr>
+          </a:lstStyle>
+          <a:p>
+            <a:pPr lvl="0"/>
+            <a:r>
+              <a:rPr lang="en-US" dirty="0"/>
+              <a:t>Edit Master text styles</a:t>
+            </a:r>
+          </a:p>
+          <a:p>
+            <a:pPr lvl="1"/>
+            <a:r>
+              <a:rPr lang="en-US" dirty="0"/>
+              <a:t>Second level</a:t>
+            </a:r>
+          </a:p>
+          <a:p>
+            <a:pPr lvl="2"/>
+            <a:r>
+              <a:rPr lang="en-US" dirty="0"/>
+              <a:t>Third level</a:t>
+            </a:r>
+          </a:p>
+          <a:p>
+            <a:pPr lvl="3"/>
+            <a:r>
+              <a:rPr lang="en-US" dirty="0"/>
+              <a:t>Fourth level</a:t>
+            </a:r>
+          </a:p>
+          <a:p>
+            <a:pPr lvl="4"/>
+            <a:r>
+              <a:rPr lang="en-US" dirty="0"/>
+              <a:t>Fifth level</a:t>
+            </a:r>
+            <a:endParaRPr lang="en-GB" dirty="0"/>
+          </a:p>
+        </p:txBody>
+      </p:sp>
+      <p:sp>
+        <p:nvSpPr>
+          <p:cNvPr id="9" name="Rectangle 8">
+            <a:extLst>
+              <a:ext uri="{FF2B5EF4-FFF2-40B4-BE49-F238E27FC236}">
+                <a16:creationId xmlns:a16="http://schemas.microsoft.com/office/drawing/2014/main" id="{40E36CC0-0CEE-4F7D-BD64-E12742EC33CD}"/>
+              </a:ext>
+            </a:extLst>
+          </p:cNvPr>
+          <p:cNvSpPr/>
+          <p:nvPr userDrawn="1"/>
+        </p:nvSpPr>
+        <p:spPr>
+          <a:xfrm>
+            <a:off x="0" y="5877768"/>
+            <a:ext cx="12192000" cy="980232"/>
+          </a:xfrm>
+          <a:prstGeom prst="rect">
+            <a:avLst/>
+          </a:prstGeom>
+          <a:solidFill>
+            <a:schemeClr val="bg1"/>
+          </a:solidFill>
+          <a:ln>
+            <a:solidFill>
+              <a:schemeClr val="bg1"/>
+            </a:solidFill>
+          </a:ln>
+        </p:spPr>
+        <p:style>
+          <a:lnRef idx="2">
+            <a:schemeClr val="accent1">
+              <a:shade val="50000"/>
+            </a:schemeClr>
+          </a:lnRef>
+          <a:fillRef idx="1">
+            <a:schemeClr val="accent1"/>
+          </a:fillRef>
+          <a:effectRef idx="0">
+            <a:schemeClr val="accent1"/>
+          </a:effectRef>
+          <a:fontRef idx="minor">
+            <a:schemeClr val="lt1"/>
+          </a:fontRef>
+        </p:style>
+        <p:txBody>
+          <a:bodyPr rtlCol="0" anchor="ctr"/>
+          <a:lstStyle/>
+          <a:p>
+            <a:pPr algn="ctr"/>
+            <a:endParaRPr lang="en-FI"/>
+          </a:p>
+        </p:txBody>
+      </p:sp>
+      <p:sp>
+        <p:nvSpPr>
+          <p:cNvPr id="6" name="Content Placeholder 2">
+            <a:extLst>
+              <a:ext uri="{FF2B5EF4-FFF2-40B4-BE49-F238E27FC236}">
+                <a16:creationId xmlns:a16="http://schemas.microsoft.com/office/drawing/2014/main" id="{3D8B041D-E134-4B62-A4BC-A12CE4E35896}"/>
+              </a:ext>
+            </a:extLst>
+          </p:cNvPr>
+          <p:cNvSpPr>
+            <a:spLocks noGrp="1"/>
+          </p:cNvSpPr>
+          <p:nvPr>
+            <p:ph sz="half" idx="12"/>
+          </p:nvPr>
+        </p:nvSpPr>
+        <p:spPr>
+          <a:xfrm>
+            <a:off x="346033" y="1261955"/>
+            <a:ext cx="5669534" cy="1817472"/>
+          </a:xfrm>
+        </p:spPr>
+        <p:txBody>
+          <a:bodyPr/>
+          <a:lstStyle>
+            <a:lvl1pPr>
+              <a:defRPr sz="2100" b="0"/>
+            </a:lvl1pPr>
+            <a:lvl2pPr>
+              <a:defRPr sz="1800" b="0"/>
+            </a:lvl2pPr>
+            <a:lvl3pPr>
+              <a:defRPr sz="1500" b="0"/>
+            </a:lvl3pPr>
+            <a:lvl4pPr>
+              <a:defRPr sz="1350" b="0"/>
+            </a:lvl4pPr>
+            <a:lvl5pPr>
+              <a:defRPr sz="1350" b="0"/>
+            </a:lvl5pPr>
+            <a:lvl6pPr>
+              <a:defRPr sz="1350"/>
+            </a:lvl6pPr>
+            <a:lvl7pPr>
+              <a:defRPr sz="1350"/>
+            </a:lvl7pPr>
+            <a:lvl8pPr>
+              <a:defRPr sz="1350"/>
+            </a:lvl8pPr>
+            <a:lvl9pPr>
+              <a:defRPr sz="1350"/>
+            </a:lvl9pPr>
+          </a:lstStyle>
+          <a:p>
+            <a:pPr lvl="0"/>
+            <a:r>
+              <a:rPr lang="en-US" dirty="0"/>
+              <a:t>Edit Master text styles</a:t>
+            </a:r>
+          </a:p>
+          <a:p>
+            <a:pPr lvl="1"/>
+            <a:r>
+              <a:rPr lang="en-US" dirty="0"/>
+              <a:t>Second level</a:t>
+            </a:r>
+          </a:p>
+          <a:p>
+            <a:pPr lvl="2"/>
+            <a:r>
+              <a:rPr lang="en-US" dirty="0"/>
+              <a:t>Third level</a:t>
+            </a:r>
+          </a:p>
+          <a:p>
+            <a:pPr lvl="3"/>
+            <a:r>
+              <a:rPr lang="en-US" dirty="0"/>
+              <a:t>Fourth level</a:t>
+            </a:r>
+          </a:p>
+          <a:p>
+            <a:pPr lvl="4"/>
+            <a:r>
+              <a:rPr lang="en-US" dirty="0"/>
+              <a:t>Fifth level</a:t>
+            </a:r>
+            <a:endParaRPr lang="en-GB" dirty="0"/>
+          </a:p>
+        </p:txBody>
+      </p:sp>
+      <p:sp>
+        <p:nvSpPr>
+          <p:cNvPr id="7" name="Content Placeholder 2">
+            <a:extLst>
+              <a:ext uri="{FF2B5EF4-FFF2-40B4-BE49-F238E27FC236}">
+                <a16:creationId xmlns:a16="http://schemas.microsoft.com/office/drawing/2014/main" id="{3ECA7F43-0C57-4B08-B5FB-65BC8E5CFF2C}"/>
+              </a:ext>
+            </a:extLst>
+          </p:cNvPr>
+          <p:cNvSpPr>
+            <a:spLocks noGrp="1"/>
+          </p:cNvSpPr>
+          <p:nvPr>
+            <p:ph sz="half" idx="13"/>
+          </p:nvPr>
+        </p:nvSpPr>
+        <p:spPr>
+          <a:xfrm>
+            <a:off x="346033" y="3150172"/>
+            <a:ext cx="5669534" cy="3477370"/>
+          </a:xfrm>
+        </p:spPr>
+        <p:txBody>
+          <a:bodyPr/>
+          <a:lstStyle>
+            <a:lvl1pPr>
+              <a:defRPr sz="2100" b="0"/>
+            </a:lvl1pPr>
+            <a:lvl2pPr>
+              <a:defRPr sz="1800" b="0"/>
+            </a:lvl2pPr>
+            <a:lvl3pPr>
+              <a:defRPr sz="1500" b="0"/>
+            </a:lvl3pPr>
+            <a:lvl4pPr>
+              <a:defRPr sz="1350" b="0"/>
+            </a:lvl4pPr>
+            <a:lvl5pPr>
+              <a:defRPr sz="1350" b="0"/>
+            </a:lvl5pPr>
+            <a:lvl6pPr>
+              <a:defRPr sz="1350"/>
+            </a:lvl6pPr>
+            <a:lvl7pPr>
+              <a:defRPr sz="1350"/>
+            </a:lvl7pPr>
+            <a:lvl8pPr>
+              <a:defRPr sz="1350"/>
+            </a:lvl8pPr>
+            <a:lvl9pPr>
+              <a:defRPr sz="1350"/>
+            </a:lvl9pPr>
+          </a:lstStyle>
+          <a:p>
+            <a:pPr lvl="0"/>
+            <a:r>
+              <a:rPr lang="en-US" dirty="0"/>
+              <a:t>Edit Master text styles</a:t>
+            </a:r>
+          </a:p>
+          <a:p>
+            <a:pPr lvl="1"/>
+            <a:r>
+              <a:rPr lang="en-US" dirty="0"/>
+              <a:t>Second level</a:t>
+            </a:r>
+          </a:p>
+          <a:p>
+            <a:pPr lvl="2"/>
+            <a:r>
+              <a:rPr lang="en-US" dirty="0"/>
+              <a:t>Third level</a:t>
+            </a:r>
+          </a:p>
+          <a:p>
+            <a:pPr lvl="3"/>
+            <a:r>
+              <a:rPr lang="en-US" dirty="0"/>
+              <a:t>Fourth level</a:t>
+            </a:r>
+          </a:p>
+          <a:p>
+            <a:pPr lvl="4"/>
+            <a:r>
+              <a:rPr lang="en-US" dirty="0"/>
+              <a:t>Fifth level</a:t>
+            </a:r>
+            <a:endParaRPr lang="en-GB" dirty="0"/>
+          </a:p>
+        </p:txBody>
+      </p:sp>
+      <p:sp>
+        <p:nvSpPr>
+          <p:cNvPr id="10" name="Title 1">
+            <a:extLst>
+              <a:ext uri="{FF2B5EF4-FFF2-40B4-BE49-F238E27FC236}">
+                <a16:creationId xmlns:a16="http://schemas.microsoft.com/office/drawing/2014/main" id="{FD1F9657-5C8B-4EEF-A1B6-DCE306850F4C}"/>
+              </a:ext>
+            </a:extLst>
+          </p:cNvPr>
+          <p:cNvSpPr>
+            <a:spLocks noGrp="1"/>
+          </p:cNvSpPr>
+          <p:nvPr>
+            <p:ph type="title"/>
+          </p:nvPr>
+        </p:nvSpPr>
+        <p:spPr>
+          <a:xfrm>
+            <a:off x="346033" y="48210"/>
+            <a:ext cx="11499934" cy="1143000"/>
+          </a:xfrm>
+        </p:spPr>
+        <p:txBody>
+          <a:bodyPr/>
+          <a:lstStyle/>
+          <a:p>
+            <a:r>
+              <a:rPr lang="en-US" dirty="0"/>
+              <a:t>Click to edit Master title style</a:t>
+            </a:r>
+            <a:endParaRPr lang="en-GB" dirty="0"/>
+          </a:p>
+        </p:txBody>
+      </p:sp>
+      <p:sp>
+        <p:nvSpPr>
+          <p:cNvPr id="11" name="Text Placeholder 13">
+            <a:extLst>
+              <a:ext uri="{FF2B5EF4-FFF2-40B4-BE49-F238E27FC236}">
+                <a16:creationId xmlns:a16="http://schemas.microsoft.com/office/drawing/2014/main" id="{83B3A65B-C338-407C-869F-D257AB93E55C}"/>
+              </a:ext>
+            </a:extLst>
+          </p:cNvPr>
+          <p:cNvSpPr>
+            <a:spLocks noGrp="1"/>
+          </p:cNvSpPr>
+          <p:nvPr>
+            <p:ph type="body" sz="quarter" idx="14"/>
+          </p:nvPr>
+        </p:nvSpPr>
+        <p:spPr>
+          <a:xfrm>
+            <a:off x="6176432" y="1262063"/>
+            <a:ext cx="5669533" cy="408794"/>
+          </a:xfrm>
+        </p:spPr>
+        <p:txBody>
+          <a:bodyPr/>
+          <a:lstStyle>
+            <a:lvl1pPr marL="0" indent="0">
+              <a:buNone/>
+              <a:defRPr sz="1400" b="1">
+                <a:solidFill>
+                  <a:schemeClr val="tx1"/>
+                </a:solidFill>
+              </a:defRPr>
+            </a:lvl1pPr>
+          </a:lstStyle>
+          <a:p>
+            <a:pPr lvl="0"/>
+            <a:r>
+              <a:rPr lang="en-US" dirty="0"/>
+              <a:t>Click to edit Master text styles</a:t>
+            </a:r>
+            <a:endParaRPr lang="en-FI" dirty="0"/>
+          </a:p>
+        </p:txBody>
+      </p:sp>
+    </p:spTree>
+    <p:extLst>
+      <p:ext uri="{BB962C8B-B14F-4D97-AF65-F5344CB8AC3E}">
+        <p14:creationId xmlns:p14="http://schemas.microsoft.com/office/powerpoint/2010/main" val="2264418320"/>
+      </p:ext>
+    </p:extLst>
+  </p:cSld>
+  <p:clrMapOvr>
+    <a:masterClrMapping/>
+  </p:clrMapOvr>
+</p:sldLayout>
+</file>
+
+<file path=ppt/slideLayouts/slideLayout48.xml><?xml version="1.0" encoding="utf-8"?>
+<p:sldLayout xmlns:a="http://schemas.openxmlformats.org/drawingml/2006/main" xmlns:r="http://schemas.openxmlformats.org/officeDocument/2006/relationships" xmlns:p="http://schemas.openxmlformats.org/presentationml/2006/main" preserve="1" userDrawn="1">
+  <p:cSld name="Custom Two Content">
+    <p:spTree>
+      <p:nvGrpSpPr>
+        <p:cNvPr id="1" name=""/>
+        <p:cNvGrpSpPr/>
+        <p:nvPr/>
+      </p:nvGrpSpPr>
+      <p:grpSpPr>
+        <a:xfrm>
+          <a:off x="0" y="0"/>
+          <a:ext cx="0" cy="0"/>
+          <a:chOff x="0" y="0"/>
+          <a:chExt cx="0" cy="0"/>
+        </a:xfrm>
+      </p:grpSpPr>
+      <p:sp>
+        <p:nvSpPr>
+          <p:cNvPr id="3" name="Slide Number Placeholder 2">
+            <a:extLst>
+              <a:ext uri="{FF2B5EF4-FFF2-40B4-BE49-F238E27FC236}">
+                <a16:creationId xmlns:a16="http://schemas.microsoft.com/office/drawing/2014/main" id="{38EA215F-E308-4485-BD7A-A7B7B561240F}"/>
+              </a:ext>
+            </a:extLst>
+          </p:cNvPr>
+          <p:cNvSpPr>
+            <a:spLocks noGrp="1"/>
+          </p:cNvSpPr>
+          <p:nvPr>
+            <p:ph type="sldNum" sz="quarter" idx="10"/>
+          </p:nvPr>
+        </p:nvSpPr>
+        <p:spPr/>
+        <p:txBody>
+          <a:bodyPr/>
+          <a:lstStyle/>
+          <a:p>
+            <a:fld id="{C5EF2332-01BF-834F-8236-50238282D533}" type="slidenum">
+              <a:rPr lang="en-US" smtClean="0"/>
+              <a:t>‹#›</a:t>
+            </a:fld>
+            <a:endParaRPr lang="en-US"/>
+          </a:p>
+        </p:txBody>
+      </p:sp>
+      <p:sp>
+        <p:nvSpPr>
+          <p:cNvPr id="4" name="Date Placeholder 3">
+            <a:extLst>
+              <a:ext uri="{FF2B5EF4-FFF2-40B4-BE49-F238E27FC236}">
+                <a16:creationId xmlns:a16="http://schemas.microsoft.com/office/drawing/2014/main" id="{BCA401B4-EA85-450A-9AD6-B22F81704CBF}"/>
+              </a:ext>
+            </a:extLst>
+          </p:cNvPr>
+          <p:cNvSpPr>
+            <a:spLocks noGrp="1"/>
+          </p:cNvSpPr>
+          <p:nvPr>
+            <p:ph type="dt" sz="half" idx="11"/>
+          </p:nvPr>
+        </p:nvSpPr>
+        <p:spPr/>
+        <p:txBody>
+          <a:bodyPr/>
+          <a:lstStyle/>
+          <a:p>
+            <a:fld id="{28B0BFEB-9524-4D59-9A4D-06779128F7EF}" type="datetime1">
+              <a:rPr lang="en-US" smtClean="0"/>
+              <a:t>2/11/2026</a:t>
+            </a:fld>
+            <a:endParaRPr lang="en-US"/>
+          </a:p>
+        </p:txBody>
+      </p:sp>
+      <p:sp>
+        <p:nvSpPr>
+          <p:cNvPr id="5" name="Content Placeholder 2">
+            <a:extLst>
+              <a:ext uri="{FF2B5EF4-FFF2-40B4-BE49-F238E27FC236}">
+                <a16:creationId xmlns:a16="http://schemas.microsoft.com/office/drawing/2014/main" id="{314B0D1C-69A9-4DE5-A2EC-3AE23CBAB864}"/>
+              </a:ext>
+            </a:extLst>
+          </p:cNvPr>
+          <p:cNvSpPr>
+            <a:spLocks noGrp="1"/>
+          </p:cNvSpPr>
+          <p:nvPr>
+            <p:ph sz="half" idx="1"/>
+          </p:nvPr>
+        </p:nvSpPr>
+        <p:spPr>
+          <a:xfrm>
+            <a:off x="6176432" y="1262063"/>
+            <a:ext cx="5669535" cy="5365477"/>
+          </a:xfrm>
+        </p:spPr>
+        <p:txBody>
+          <a:bodyPr/>
+          <a:lstStyle>
+            <a:lvl1pPr>
+              <a:defRPr sz="2100" b="0"/>
+            </a:lvl1pPr>
+            <a:lvl2pPr>
+              <a:defRPr sz="1800" b="0"/>
+            </a:lvl2pPr>
+            <a:lvl3pPr>
+              <a:defRPr sz="1500" b="0"/>
+            </a:lvl3pPr>
+            <a:lvl4pPr>
+              <a:defRPr sz="1350" b="0"/>
+            </a:lvl4pPr>
+            <a:lvl5pPr>
+              <a:defRPr sz="1350" b="0"/>
+            </a:lvl5pPr>
+            <a:lvl6pPr>
+              <a:defRPr sz="1350"/>
+            </a:lvl6pPr>
+            <a:lvl7pPr>
+              <a:defRPr sz="1350"/>
+            </a:lvl7pPr>
+            <a:lvl8pPr>
+              <a:defRPr sz="1350"/>
+            </a:lvl8pPr>
+            <a:lvl9pPr>
+              <a:defRPr sz="1350"/>
+            </a:lvl9pPr>
+          </a:lstStyle>
+          <a:p>
+            <a:pPr lvl="0"/>
+            <a:r>
+              <a:rPr lang="en-US" dirty="0"/>
+              <a:t>Edit Master text styles</a:t>
+            </a:r>
+          </a:p>
+          <a:p>
+            <a:pPr lvl="1"/>
+            <a:r>
+              <a:rPr lang="en-US" dirty="0"/>
+              <a:t>Second level</a:t>
+            </a:r>
+          </a:p>
+          <a:p>
+            <a:pPr lvl="2"/>
+            <a:r>
+              <a:rPr lang="en-US" dirty="0"/>
+              <a:t>Third level</a:t>
+            </a:r>
+          </a:p>
+          <a:p>
+            <a:pPr lvl="3"/>
+            <a:r>
+              <a:rPr lang="en-US" dirty="0"/>
+              <a:t>Fourth level</a:t>
+            </a:r>
+          </a:p>
+          <a:p>
+            <a:pPr lvl="4"/>
+            <a:r>
+              <a:rPr lang="en-US" dirty="0"/>
+              <a:t>Fifth level</a:t>
+            </a:r>
+            <a:endParaRPr lang="en-GB" dirty="0"/>
+          </a:p>
+        </p:txBody>
+      </p:sp>
+      <p:sp>
+        <p:nvSpPr>
+          <p:cNvPr id="9" name="Rectangle 8">
+            <a:extLst>
+              <a:ext uri="{FF2B5EF4-FFF2-40B4-BE49-F238E27FC236}">
+                <a16:creationId xmlns:a16="http://schemas.microsoft.com/office/drawing/2014/main" id="{40E36CC0-0CEE-4F7D-BD64-E12742EC33CD}"/>
+              </a:ext>
+            </a:extLst>
+          </p:cNvPr>
+          <p:cNvSpPr/>
+          <p:nvPr userDrawn="1"/>
+        </p:nvSpPr>
+        <p:spPr>
+          <a:xfrm>
+            <a:off x="0" y="5877768"/>
+            <a:ext cx="12192000" cy="980232"/>
+          </a:xfrm>
+          <a:prstGeom prst="rect">
+            <a:avLst/>
+          </a:prstGeom>
+          <a:solidFill>
+            <a:schemeClr val="bg1"/>
+          </a:solidFill>
+          <a:ln>
+            <a:solidFill>
+              <a:schemeClr val="bg1"/>
+            </a:solidFill>
+          </a:ln>
+        </p:spPr>
+        <p:style>
+          <a:lnRef idx="2">
+            <a:schemeClr val="accent1">
+              <a:shade val="50000"/>
+            </a:schemeClr>
+          </a:lnRef>
+          <a:fillRef idx="1">
+            <a:schemeClr val="accent1"/>
+          </a:fillRef>
+          <a:effectRef idx="0">
+            <a:schemeClr val="accent1"/>
+          </a:effectRef>
+          <a:fontRef idx="minor">
+            <a:schemeClr val="lt1"/>
+          </a:fontRef>
+        </p:style>
+        <p:txBody>
+          <a:bodyPr rtlCol="0" anchor="ctr"/>
+          <a:lstStyle/>
+          <a:p>
+            <a:pPr algn="ctr"/>
+            <a:endParaRPr lang="en-FI"/>
+          </a:p>
+        </p:txBody>
+      </p:sp>
+      <p:sp>
+        <p:nvSpPr>
+          <p:cNvPr id="7" name="Content Placeholder 2">
+            <a:extLst>
+              <a:ext uri="{FF2B5EF4-FFF2-40B4-BE49-F238E27FC236}">
+                <a16:creationId xmlns:a16="http://schemas.microsoft.com/office/drawing/2014/main" id="{3ECA7F43-0C57-4B08-B5FB-65BC8E5CFF2C}"/>
+              </a:ext>
+            </a:extLst>
+          </p:cNvPr>
+          <p:cNvSpPr>
+            <a:spLocks noGrp="1"/>
+          </p:cNvSpPr>
+          <p:nvPr>
+            <p:ph sz="half" idx="13"/>
+          </p:nvPr>
+        </p:nvSpPr>
+        <p:spPr>
+          <a:xfrm>
+            <a:off x="346033" y="1262063"/>
+            <a:ext cx="5669534" cy="5365479"/>
+          </a:xfrm>
+        </p:spPr>
+        <p:txBody>
+          <a:bodyPr/>
+          <a:lstStyle>
+            <a:lvl1pPr>
+              <a:defRPr sz="2100" b="0"/>
+            </a:lvl1pPr>
+            <a:lvl2pPr>
+              <a:defRPr sz="1800" b="0"/>
+            </a:lvl2pPr>
+            <a:lvl3pPr>
+              <a:defRPr sz="1500" b="0"/>
+            </a:lvl3pPr>
+            <a:lvl4pPr>
+              <a:defRPr sz="1350" b="0"/>
+            </a:lvl4pPr>
+            <a:lvl5pPr>
+              <a:defRPr sz="1350" b="0"/>
+            </a:lvl5pPr>
+            <a:lvl6pPr>
+              <a:defRPr sz="1350"/>
+            </a:lvl6pPr>
+            <a:lvl7pPr>
+              <a:defRPr sz="1350"/>
+            </a:lvl7pPr>
+            <a:lvl8pPr>
+              <a:defRPr sz="1350"/>
+            </a:lvl8pPr>
+            <a:lvl9pPr>
+              <a:defRPr sz="1350"/>
+            </a:lvl9pPr>
+          </a:lstStyle>
+          <a:p>
+            <a:pPr lvl="0"/>
+            <a:r>
+              <a:rPr lang="en-US" dirty="0"/>
+              <a:t>Edit Master text styles</a:t>
+            </a:r>
+          </a:p>
+          <a:p>
+            <a:pPr lvl="1"/>
+            <a:r>
+              <a:rPr lang="en-US" dirty="0"/>
+              <a:t>Second level</a:t>
+            </a:r>
+          </a:p>
+          <a:p>
+            <a:pPr lvl="2"/>
+            <a:r>
+              <a:rPr lang="en-US" dirty="0"/>
+              <a:t>Third level</a:t>
+            </a:r>
+          </a:p>
+          <a:p>
+            <a:pPr lvl="3"/>
+            <a:r>
+              <a:rPr lang="en-US" dirty="0"/>
+              <a:t>Fourth level</a:t>
+            </a:r>
+          </a:p>
+          <a:p>
+            <a:pPr lvl="4"/>
+            <a:r>
+              <a:rPr lang="en-US" dirty="0"/>
+              <a:t>Fifth level</a:t>
+            </a:r>
+            <a:endParaRPr lang="en-GB" dirty="0"/>
+          </a:p>
+        </p:txBody>
+      </p:sp>
+      <p:sp>
+        <p:nvSpPr>
+          <p:cNvPr id="10" name="Title 1">
+            <a:extLst>
+              <a:ext uri="{FF2B5EF4-FFF2-40B4-BE49-F238E27FC236}">
+                <a16:creationId xmlns:a16="http://schemas.microsoft.com/office/drawing/2014/main" id="{FD1F9657-5C8B-4EEF-A1B6-DCE306850F4C}"/>
+              </a:ext>
+            </a:extLst>
+          </p:cNvPr>
+          <p:cNvSpPr>
+            <a:spLocks noGrp="1"/>
+          </p:cNvSpPr>
+          <p:nvPr>
+            <p:ph type="title"/>
+          </p:nvPr>
+        </p:nvSpPr>
+        <p:spPr>
+          <a:xfrm>
+            <a:off x="346033" y="48210"/>
+            <a:ext cx="11499934" cy="1143000"/>
+          </a:xfrm>
+        </p:spPr>
+        <p:txBody>
+          <a:bodyPr/>
+          <a:lstStyle/>
+          <a:p>
+            <a:r>
+              <a:rPr lang="en-US" dirty="0"/>
+              <a:t>Click to edit Master title style</a:t>
+            </a:r>
+            <a:endParaRPr lang="en-GB" dirty="0"/>
+          </a:p>
+        </p:txBody>
+      </p:sp>
+    </p:spTree>
+    <p:extLst>
+      <p:ext uri="{BB962C8B-B14F-4D97-AF65-F5344CB8AC3E}">
+        <p14:creationId xmlns:p14="http://schemas.microsoft.com/office/powerpoint/2010/main" val="2775328652"/>
+      </p:ext>
+    </p:extLst>
+  </p:cSld>
+  <p:clrMapOvr>
+    <a:masterClrMapping/>
+  </p:clrMapOvr>
+</p:sldLayout>
+</file>
+
+<file path=ppt/slideLayouts/slideLayout49.xml><?xml version="1.0" encoding="utf-8"?>
+<p:sldLayout xmlns:a="http://schemas.openxmlformats.org/drawingml/2006/main" xmlns:r="http://schemas.openxmlformats.org/officeDocument/2006/relationships" xmlns:p="http://schemas.openxmlformats.org/presentationml/2006/main" preserve="1" userDrawn="1">
+  <p:cSld name="Custom Two Content With Header">
+    <p:spTree>
+      <p:nvGrpSpPr>
+        <p:cNvPr id="1" name=""/>
+        <p:cNvGrpSpPr/>
+        <p:nvPr/>
+      </p:nvGrpSpPr>
+      <p:grpSpPr>
+        <a:xfrm>
+          <a:off x="0" y="0"/>
+          <a:ext cx="0" cy="0"/>
+          <a:chOff x="0" y="0"/>
+          <a:chExt cx="0" cy="0"/>
+        </a:xfrm>
+      </p:grpSpPr>
+      <p:sp>
+        <p:nvSpPr>
+          <p:cNvPr id="3" name="Slide Number Placeholder 2">
+            <a:extLst>
+              <a:ext uri="{FF2B5EF4-FFF2-40B4-BE49-F238E27FC236}">
+                <a16:creationId xmlns:a16="http://schemas.microsoft.com/office/drawing/2014/main" id="{38EA215F-E308-4485-BD7A-A7B7B561240F}"/>
+              </a:ext>
+            </a:extLst>
+          </p:cNvPr>
+          <p:cNvSpPr>
+            <a:spLocks noGrp="1"/>
+          </p:cNvSpPr>
+          <p:nvPr>
+            <p:ph type="sldNum" sz="quarter" idx="10"/>
+          </p:nvPr>
+        </p:nvSpPr>
+        <p:spPr/>
+        <p:txBody>
+          <a:bodyPr/>
+          <a:lstStyle/>
+          <a:p>
+            <a:fld id="{C5EF2332-01BF-834F-8236-50238282D533}" type="slidenum">
+              <a:rPr lang="en-US" smtClean="0"/>
+              <a:t>‹#›</a:t>
+            </a:fld>
+            <a:endParaRPr lang="en-US"/>
+          </a:p>
+        </p:txBody>
+      </p:sp>
+      <p:sp>
+        <p:nvSpPr>
+          <p:cNvPr id="4" name="Date Placeholder 3">
+            <a:extLst>
+              <a:ext uri="{FF2B5EF4-FFF2-40B4-BE49-F238E27FC236}">
+                <a16:creationId xmlns:a16="http://schemas.microsoft.com/office/drawing/2014/main" id="{BCA401B4-EA85-450A-9AD6-B22F81704CBF}"/>
+              </a:ext>
+            </a:extLst>
+          </p:cNvPr>
+          <p:cNvSpPr>
+            <a:spLocks noGrp="1"/>
+          </p:cNvSpPr>
+          <p:nvPr>
+            <p:ph type="dt" sz="half" idx="11"/>
+          </p:nvPr>
+        </p:nvSpPr>
+        <p:spPr/>
+        <p:txBody>
+          <a:bodyPr/>
+          <a:lstStyle/>
+          <a:p>
+            <a:fld id="{2053FF58-67C2-42AA-A944-B4637ED5D3E3}" type="datetime1">
+              <a:rPr lang="en-US" smtClean="0"/>
+              <a:t>2/11/2026</a:t>
+            </a:fld>
+            <a:endParaRPr lang="en-US"/>
+          </a:p>
+        </p:txBody>
+      </p:sp>
+      <p:sp>
+        <p:nvSpPr>
+          <p:cNvPr id="5" name="Content Placeholder 2">
+            <a:extLst>
+              <a:ext uri="{FF2B5EF4-FFF2-40B4-BE49-F238E27FC236}">
+                <a16:creationId xmlns:a16="http://schemas.microsoft.com/office/drawing/2014/main" id="{314B0D1C-69A9-4DE5-A2EC-3AE23CBAB864}"/>
+              </a:ext>
+            </a:extLst>
+          </p:cNvPr>
+          <p:cNvSpPr>
+            <a:spLocks noGrp="1"/>
+          </p:cNvSpPr>
+          <p:nvPr>
+            <p:ph sz="half" idx="1"/>
+          </p:nvPr>
+        </p:nvSpPr>
+        <p:spPr>
+          <a:xfrm>
+            <a:off x="6176432" y="1670857"/>
+            <a:ext cx="5669535" cy="4956683"/>
+          </a:xfrm>
+        </p:spPr>
+        <p:txBody>
+          <a:bodyPr/>
+          <a:lstStyle>
+            <a:lvl1pPr>
+              <a:defRPr sz="2100" b="0"/>
+            </a:lvl1pPr>
+            <a:lvl2pPr>
+              <a:defRPr sz="1800" b="0"/>
+            </a:lvl2pPr>
+            <a:lvl3pPr>
+              <a:defRPr sz="1500" b="0"/>
+            </a:lvl3pPr>
+            <a:lvl4pPr>
+              <a:defRPr sz="1350" b="0"/>
+            </a:lvl4pPr>
+            <a:lvl5pPr>
+              <a:defRPr sz="1350" b="0"/>
+            </a:lvl5pPr>
+            <a:lvl6pPr>
+              <a:defRPr sz="1350"/>
+            </a:lvl6pPr>
+            <a:lvl7pPr>
+              <a:defRPr sz="1350"/>
+            </a:lvl7pPr>
+            <a:lvl8pPr>
+              <a:defRPr sz="1350"/>
+            </a:lvl8pPr>
+            <a:lvl9pPr>
+              <a:defRPr sz="1350"/>
+            </a:lvl9pPr>
+          </a:lstStyle>
+          <a:p>
+            <a:pPr lvl="0"/>
+            <a:r>
+              <a:rPr lang="en-US" dirty="0"/>
+              <a:t>Edit Master text styles</a:t>
+            </a:r>
+          </a:p>
+          <a:p>
+            <a:pPr lvl="1"/>
+            <a:r>
+              <a:rPr lang="en-US" dirty="0"/>
+              <a:t>Second level</a:t>
+            </a:r>
+          </a:p>
+          <a:p>
+            <a:pPr lvl="2"/>
+            <a:r>
+              <a:rPr lang="en-US" dirty="0"/>
+              <a:t>Third level</a:t>
+            </a:r>
+          </a:p>
+          <a:p>
+            <a:pPr lvl="3"/>
+            <a:r>
+              <a:rPr lang="en-US" dirty="0"/>
+              <a:t>Fourth level</a:t>
+            </a:r>
+          </a:p>
+          <a:p>
+            <a:pPr lvl="4"/>
+            <a:r>
+              <a:rPr lang="en-US" dirty="0"/>
+              <a:t>Fifth level</a:t>
+            </a:r>
+            <a:endParaRPr lang="en-GB" dirty="0"/>
+          </a:p>
+        </p:txBody>
+      </p:sp>
+      <p:sp>
+        <p:nvSpPr>
+          <p:cNvPr id="9" name="Rectangle 8">
+            <a:extLst>
+              <a:ext uri="{FF2B5EF4-FFF2-40B4-BE49-F238E27FC236}">
+                <a16:creationId xmlns:a16="http://schemas.microsoft.com/office/drawing/2014/main" id="{40E36CC0-0CEE-4F7D-BD64-E12742EC33CD}"/>
+              </a:ext>
+            </a:extLst>
+          </p:cNvPr>
+          <p:cNvSpPr/>
+          <p:nvPr userDrawn="1"/>
+        </p:nvSpPr>
+        <p:spPr>
+          <a:xfrm>
+            <a:off x="0" y="5877768"/>
+            <a:ext cx="12192000" cy="980232"/>
+          </a:xfrm>
+          <a:prstGeom prst="rect">
+            <a:avLst/>
+          </a:prstGeom>
+          <a:solidFill>
+            <a:schemeClr val="bg1"/>
+          </a:solidFill>
+          <a:ln>
+            <a:solidFill>
+              <a:schemeClr val="bg1"/>
+            </a:solidFill>
+          </a:ln>
+        </p:spPr>
+        <p:style>
+          <a:lnRef idx="2">
+            <a:schemeClr val="accent1">
+              <a:shade val="50000"/>
+            </a:schemeClr>
+          </a:lnRef>
+          <a:fillRef idx="1">
+            <a:schemeClr val="accent1"/>
+          </a:fillRef>
+          <a:effectRef idx="0">
+            <a:schemeClr val="accent1"/>
+          </a:effectRef>
+          <a:fontRef idx="minor">
+            <a:schemeClr val="lt1"/>
+          </a:fontRef>
+        </p:style>
+        <p:txBody>
+          <a:bodyPr rtlCol="0" anchor="ctr"/>
+          <a:lstStyle/>
+          <a:p>
+            <a:pPr algn="ctr"/>
+            <a:endParaRPr lang="en-FI"/>
+          </a:p>
+        </p:txBody>
+      </p:sp>
+      <p:sp>
+        <p:nvSpPr>
+          <p:cNvPr id="7" name="Content Placeholder 2">
+            <a:extLst>
+              <a:ext uri="{FF2B5EF4-FFF2-40B4-BE49-F238E27FC236}">
+                <a16:creationId xmlns:a16="http://schemas.microsoft.com/office/drawing/2014/main" id="{3ECA7F43-0C57-4B08-B5FB-65BC8E5CFF2C}"/>
+              </a:ext>
+            </a:extLst>
+          </p:cNvPr>
+          <p:cNvSpPr>
+            <a:spLocks noGrp="1"/>
+          </p:cNvSpPr>
+          <p:nvPr>
+            <p:ph sz="half" idx="13"/>
+          </p:nvPr>
+        </p:nvSpPr>
+        <p:spPr>
+          <a:xfrm>
+            <a:off x="346033" y="1262063"/>
+            <a:ext cx="5669534" cy="5365479"/>
+          </a:xfrm>
+        </p:spPr>
+        <p:txBody>
+          <a:bodyPr/>
+          <a:lstStyle>
+            <a:lvl1pPr>
+              <a:defRPr sz="2100" b="0"/>
+            </a:lvl1pPr>
+            <a:lvl2pPr>
+              <a:defRPr sz="1800" b="0"/>
+            </a:lvl2pPr>
+            <a:lvl3pPr>
+              <a:defRPr sz="1500" b="0"/>
+            </a:lvl3pPr>
+            <a:lvl4pPr>
+              <a:defRPr sz="1350" b="0"/>
+            </a:lvl4pPr>
+            <a:lvl5pPr>
+              <a:defRPr sz="1350" b="0"/>
+            </a:lvl5pPr>
+            <a:lvl6pPr>
+              <a:defRPr sz="1350"/>
+            </a:lvl6pPr>
+            <a:lvl7pPr>
+              <a:defRPr sz="1350"/>
+            </a:lvl7pPr>
+            <a:lvl8pPr>
+              <a:defRPr sz="1350"/>
+            </a:lvl8pPr>
+            <a:lvl9pPr>
+              <a:defRPr sz="1350"/>
+            </a:lvl9pPr>
+          </a:lstStyle>
+          <a:p>
+            <a:pPr lvl="0"/>
+            <a:r>
+              <a:rPr lang="en-US" dirty="0"/>
+              <a:t>Edit Master text styles</a:t>
+            </a:r>
+          </a:p>
+          <a:p>
+            <a:pPr lvl="1"/>
+            <a:r>
+              <a:rPr lang="en-US" dirty="0"/>
+              <a:t>Second level</a:t>
+            </a:r>
+          </a:p>
+          <a:p>
+            <a:pPr lvl="2"/>
+            <a:r>
+              <a:rPr lang="en-US" dirty="0"/>
+              <a:t>Third level</a:t>
+            </a:r>
+          </a:p>
+          <a:p>
+            <a:pPr lvl="3"/>
+            <a:r>
+              <a:rPr lang="en-US" dirty="0"/>
+              <a:t>Fourth level</a:t>
+            </a:r>
+          </a:p>
+          <a:p>
+            <a:pPr lvl="4"/>
+            <a:r>
+              <a:rPr lang="en-US" dirty="0"/>
+              <a:t>Fifth level</a:t>
+            </a:r>
+            <a:endParaRPr lang="en-GB" dirty="0"/>
+          </a:p>
+        </p:txBody>
+      </p:sp>
+      <p:sp>
+        <p:nvSpPr>
+          <p:cNvPr id="10" name="Title 1">
+            <a:extLst>
+              <a:ext uri="{FF2B5EF4-FFF2-40B4-BE49-F238E27FC236}">
+                <a16:creationId xmlns:a16="http://schemas.microsoft.com/office/drawing/2014/main" id="{FD1F9657-5C8B-4EEF-A1B6-DCE306850F4C}"/>
+              </a:ext>
+            </a:extLst>
+          </p:cNvPr>
+          <p:cNvSpPr>
+            <a:spLocks noGrp="1"/>
+          </p:cNvSpPr>
+          <p:nvPr>
+            <p:ph type="title"/>
+          </p:nvPr>
+        </p:nvSpPr>
+        <p:spPr>
+          <a:xfrm>
+            <a:off x="346033" y="48210"/>
+            <a:ext cx="11499934" cy="1143000"/>
+          </a:xfrm>
+        </p:spPr>
+        <p:txBody>
+          <a:bodyPr/>
+          <a:lstStyle/>
+          <a:p>
+            <a:r>
+              <a:rPr lang="en-US" dirty="0"/>
+              <a:t>Click to edit Master title style</a:t>
+            </a:r>
+            <a:endParaRPr lang="en-GB" dirty="0"/>
+          </a:p>
+        </p:txBody>
+      </p:sp>
+      <p:sp>
+        <p:nvSpPr>
+          <p:cNvPr id="11" name="Text Placeholder 13">
+            <a:extLst>
+              <a:ext uri="{FF2B5EF4-FFF2-40B4-BE49-F238E27FC236}">
+                <a16:creationId xmlns:a16="http://schemas.microsoft.com/office/drawing/2014/main" id="{83B3A65B-C338-407C-869F-D257AB93E55C}"/>
+              </a:ext>
+            </a:extLst>
+          </p:cNvPr>
+          <p:cNvSpPr>
+            <a:spLocks noGrp="1"/>
+          </p:cNvSpPr>
+          <p:nvPr>
+            <p:ph type="body" sz="quarter" idx="14"/>
+          </p:nvPr>
+        </p:nvSpPr>
+        <p:spPr>
+          <a:xfrm>
+            <a:off x="6176432" y="1262063"/>
+            <a:ext cx="5669533" cy="408794"/>
+          </a:xfrm>
+        </p:spPr>
+        <p:txBody>
+          <a:bodyPr/>
+          <a:lstStyle>
+            <a:lvl1pPr marL="0" indent="0">
+              <a:buNone/>
+              <a:defRPr sz="1400" b="1">
+                <a:solidFill>
+                  <a:schemeClr val="tx1"/>
+                </a:solidFill>
+              </a:defRPr>
+            </a:lvl1pPr>
+          </a:lstStyle>
+          <a:p>
+            <a:pPr lvl="0"/>
+            <a:r>
+              <a:rPr lang="en-US" dirty="0"/>
+              <a:t>Click to edit Master text styles</a:t>
+            </a:r>
+            <a:endParaRPr lang="en-FI" dirty="0"/>
+          </a:p>
+        </p:txBody>
+      </p:sp>
+    </p:spTree>
+    <p:extLst>
+      <p:ext uri="{BB962C8B-B14F-4D97-AF65-F5344CB8AC3E}">
+        <p14:creationId xmlns:p14="http://schemas.microsoft.com/office/powerpoint/2010/main" val="1138570961"/>
+      </p:ext>
+    </p:extLst>
+  </p:cSld>
+  <p:clrMapOvr>
+    <a:masterClrMapping/>
+  </p:clrMapOvr>
+</p:sldLayout>
+</file>
+
+<file path=ppt/slideLayouts/slideLayout5.xml><?xml version="1.0" encoding="utf-8"?>
+<p:sldLayout xmlns:a="http://schemas.openxmlformats.org/drawingml/2006/main" xmlns:r="http://schemas.openxmlformats.org/officeDocument/2006/relationships" xmlns:p="http://schemas.openxmlformats.org/presentationml/2006/main" preserve="1" userDrawn="1">
+  <p:cSld name="Title and Image Custom">
+    <p:spTree>
+      <p:nvGrpSpPr>
+        <p:cNvPr id="1" name=""/>
+        <p:cNvGrpSpPr/>
+        <p:nvPr/>
+      </p:nvGrpSpPr>
+      <p:grpSpPr>
+        <a:xfrm>
+          <a:off x="0" y="0"/>
+          <a:ext cx="0" cy="0"/>
+          <a:chOff x="0" y="0"/>
+          <a:chExt cx="0" cy="0"/>
+        </a:xfrm>
+      </p:grpSpPr>
+      <p:sp>
+        <p:nvSpPr>
+          <p:cNvPr id="3" name="Content Placeholder 2"/>
+          <p:cNvSpPr>
+            <a:spLocks noGrp="1"/>
+          </p:cNvSpPr>
+          <p:nvPr>
+            <p:ph idx="1"/>
+          </p:nvPr>
+        </p:nvSpPr>
+        <p:spPr>
+          <a:xfrm>
+            <a:off x="609600" y="1036320"/>
+            <a:ext cx="10972800" cy="4924865"/>
+          </a:xfrm>
+        </p:spPr>
+        <p:txBody>
+          <a:bodyPr/>
+          <a:lstStyle>
+            <a:lvl1pPr marL="0" indent="0">
+              <a:buNone/>
+              <a:defRPr sz="1800" b="0">
+                <a:solidFill>
+                  <a:schemeClr val="tx1"/>
+                </a:solidFill>
+              </a:defRPr>
+            </a:lvl1pPr>
+            <a:lvl2pPr>
+              <a:defRPr sz="1500" b="0">
+                <a:solidFill>
+                  <a:schemeClr val="tx1"/>
+                </a:solidFill>
+              </a:defRPr>
+            </a:lvl2pPr>
+            <a:lvl3pPr>
+              <a:defRPr sz="1350" b="0">
+                <a:solidFill>
+                  <a:schemeClr val="tx1"/>
+                </a:solidFill>
+              </a:defRPr>
+            </a:lvl3pPr>
+            <a:lvl4pPr>
+              <a:defRPr>
+                <a:solidFill>
+                  <a:schemeClr val="tx1"/>
+                </a:solidFill>
+              </a:defRPr>
+            </a:lvl4pPr>
+            <a:lvl5pPr>
+              <a:defRPr>
+                <a:solidFill>
+                  <a:schemeClr val="tx1"/>
+                </a:solidFill>
+              </a:defRPr>
+            </a:lvl5pPr>
+          </a:lstStyle>
+          <a:p>
+            <a:pPr lvl="0"/>
+            <a:r>
+              <a:rPr lang="en-US" dirty="0"/>
+              <a:t>Edit Master text styles</a:t>
+            </a:r>
+          </a:p>
+          <a:p>
+            <a:pPr lvl="1"/>
+            <a:r>
+              <a:rPr lang="en-US" dirty="0"/>
+              <a:t>Second level</a:t>
+            </a:r>
+          </a:p>
+          <a:p>
+            <a:pPr lvl="2"/>
+            <a:r>
+              <a:rPr lang="en-US" dirty="0"/>
+              <a:t>Third level</a:t>
+            </a:r>
+          </a:p>
+          <a:p>
+            <a:pPr lvl="3"/>
+            <a:r>
+              <a:rPr lang="en-US" dirty="0"/>
+              <a:t>Fourth level</a:t>
+            </a:r>
+          </a:p>
+          <a:p>
+            <a:pPr lvl="4"/>
+            <a:r>
+              <a:rPr lang="en-US" dirty="0"/>
+              <a:t>Fifth level</a:t>
+            </a:r>
+            <a:endParaRPr lang="en-GB" dirty="0"/>
+          </a:p>
+        </p:txBody>
+      </p:sp>
+      <p:sp>
+        <p:nvSpPr>
+          <p:cNvPr id="4" name="Date Placeholder 3"/>
+          <p:cNvSpPr>
+            <a:spLocks noGrp="1"/>
+          </p:cNvSpPr>
+          <p:nvPr>
+            <p:ph type="dt" sz="half" idx="10"/>
+          </p:nvPr>
+        </p:nvSpPr>
+        <p:spPr>
+          <a:xfrm>
+            <a:off x="8125157" y="1108273"/>
+            <a:ext cx="2844800" cy="365125"/>
+          </a:xfrm>
+          <a:prstGeom prst="rect">
+            <a:avLst/>
+          </a:prstGeom>
+        </p:spPr>
+        <p:txBody>
+          <a:bodyPr/>
+          <a:lstStyle/>
+          <a:p>
+            <a:fld id="{593788E6-9A74-4943-A0AF-90283E3D6202}" type="datetime1">
+              <a:rPr lang="en-US" smtClean="0"/>
+              <a:t>2/11/2026</a:t>
+            </a:fld>
+            <a:endParaRPr lang="en-US"/>
+          </a:p>
+        </p:txBody>
+      </p:sp>
+      <p:sp>
+        <p:nvSpPr>
+          <p:cNvPr id="6" name="Slide Number Placeholder 5"/>
+          <p:cNvSpPr>
+            <a:spLocks noGrp="1"/>
+          </p:cNvSpPr>
+          <p:nvPr>
+            <p:ph type="sldNum" sz="quarter" idx="12"/>
+          </p:nvPr>
+        </p:nvSpPr>
+        <p:spPr/>
+        <p:txBody>
+          <a:bodyPr/>
+          <a:lstStyle/>
+          <a:p>
+            <a:fld id="{C5EF2332-01BF-834F-8236-50238282D533}" type="slidenum">
+              <a:rPr lang="en-US" smtClean="0"/>
+              <a:t>‹#›</a:t>
+            </a:fld>
+            <a:endParaRPr lang="en-US"/>
+          </a:p>
+        </p:txBody>
+      </p:sp>
+      <p:sp>
+        <p:nvSpPr>
+          <p:cNvPr id="7" name="Title 1">
+            <a:extLst>
+              <a:ext uri="{FF2B5EF4-FFF2-40B4-BE49-F238E27FC236}">
+                <a16:creationId xmlns:a16="http://schemas.microsoft.com/office/drawing/2014/main" id="{EDAC0E46-F1A5-4422-A5E2-124A22C145CD}"/>
+              </a:ext>
+            </a:extLst>
+          </p:cNvPr>
+          <p:cNvSpPr>
+            <a:spLocks noGrp="1"/>
+          </p:cNvSpPr>
+          <p:nvPr>
+            <p:ph type="title"/>
+          </p:nvPr>
+        </p:nvSpPr>
+        <p:spPr>
+          <a:xfrm>
+            <a:off x="609600" y="147836"/>
+            <a:ext cx="10972800" cy="1143000"/>
+          </a:xfrm>
+        </p:spPr>
+        <p:txBody>
+          <a:bodyPr/>
+          <a:lstStyle/>
+          <a:p>
+            <a:r>
+              <a:rPr lang="en-US" dirty="0"/>
+              <a:t>Click to edit Master title style</a:t>
+            </a:r>
+            <a:endParaRPr lang="en-FI" dirty="0"/>
+          </a:p>
+        </p:txBody>
+      </p:sp>
+    </p:spTree>
+    <p:custDataLst>
+      <p:tags r:id="rId1"/>
+    </p:custDataLst>
+    <p:extLst>
+      <p:ext uri="{BB962C8B-B14F-4D97-AF65-F5344CB8AC3E}">
+        <p14:creationId xmlns:p14="http://schemas.microsoft.com/office/powerpoint/2010/main" val="3037613738"/>
+      </p:ext>
+    </p:extLst>
+  </p:cSld>
+  <p:clrMapOvr>
+    <a:masterClrMapping/>
+  </p:clrMapOvr>
+</p:sldLayout>
+</file>
+
+<file path=ppt/slideLayouts/slideLayout50.xml><?xml version="1.0" encoding="utf-8"?>
+<p:sldLayout xmlns:a="http://schemas.openxmlformats.org/drawingml/2006/main" xmlns:r="http://schemas.openxmlformats.org/officeDocument/2006/relationships" xmlns:p="http://schemas.openxmlformats.org/presentationml/2006/main" preserve="1" userDrawn="1">
+  <p:cSld name="Title and content large">
+    <p:spTree>
+      <p:nvGrpSpPr>
+        <p:cNvPr id="1" name=""/>
+        <p:cNvGrpSpPr/>
+        <p:nvPr/>
+      </p:nvGrpSpPr>
+      <p:grpSpPr>
+        <a:xfrm>
+          <a:off x="0" y="0"/>
+          <a:ext cx="0" cy="0"/>
+          <a:chOff x="0" y="0"/>
+          <a:chExt cx="0" cy="0"/>
+        </a:xfrm>
+      </p:grpSpPr>
+      <p:sp>
+        <p:nvSpPr>
+          <p:cNvPr id="5" name="Rectangle 4">
+            <a:extLst>
+              <a:ext uri="{FF2B5EF4-FFF2-40B4-BE49-F238E27FC236}">
+                <a16:creationId xmlns:a16="http://schemas.microsoft.com/office/drawing/2014/main" id="{32F60A20-0281-4C43-BE27-B924D0E7ED17}"/>
+              </a:ext>
+            </a:extLst>
+          </p:cNvPr>
+          <p:cNvSpPr/>
+          <p:nvPr userDrawn="1"/>
+        </p:nvSpPr>
+        <p:spPr>
+          <a:xfrm>
+            <a:off x="0" y="5877768"/>
+            <a:ext cx="12192000" cy="980232"/>
+          </a:xfrm>
+          <a:prstGeom prst="rect">
+            <a:avLst/>
+          </a:prstGeom>
+          <a:solidFill>
+            <a:schemeClr val="bg1"/>
+          </a:solidFill>
+          <a:ln>
+            <a:solidFill>
+              <a:schemeClr val="bg1"/>
+            </a:solidFill>
+          </a:ln>
+        </p:spPr>
+        <p:style>
+          <a:lnRef idx="2">
+            <a:schemeClr val="accent1">
+              <a:shade val="50000"/>
+            </a:schemeClr>
+          </a:lnRef>
+          <a:fillRef idx="1">
+            <a:schemeClr val="accent1"/>
+          </a:fillRef>
+          <a:effectRef idx="0">
+            <a:schemeClr val="accent1"/>
+          </a:effectRef>
+          <a:fontRef idx="minor">
+            <a:schemeClr val="lt1"/>
+          </a:fontRef>
+        </p:style>
+        <p:txBody>
+          <a:bodyPr rtlCol="0" anchor="ctr"/>
+          <a:lstStyle/>
+          <a:p>
+            <a:pPr algn="ctr"/>
+            <a:endParaRPr lang="en-FI"/>
+          </a:p>
+        </p:txBody>
+      </p:sp>
+      <p:sp>
+        <p:nvSpPr>
+          <p:cNvPr id="3" name="Slide Number Placeholder 2">
+            <a:extLst>
+              <a:ext uri="{FF2B5EF4-FFF2-40B4-BE49-F238E27FC236}">
+                <a16:creationId xmlns:a16="http://schemas.microsoft.com/office/drawing/2014/main" id="{089F1B26-40E6-4CAE-8C6C-21FFFE4BD390}"/>
+              </a:ext>
+            </a:extLst>
+          </p:cNvPr>
+          <p:cNvSpPr>
+            <a:spLocks noGrp="1"/>
+          </p:cNvSpPr>
+          <p:nvPr>
+            <p:ph type="sldNum" sz="quarter" idx="10"/>
+          </p:nvPr>
+        </p:nvSpPr>
+        <p:spPr/>
+        <p:txBody>
+          <a:bodyPr/>
+          <a:lstStyle/>
+          <a:p>
+            <a:fld id="{C5EF2332-01BF-834F-8236-50238282D533}" type="slidenum">
+              <a:rPr lang="en-US" smtClean="0"/>
+              <a:t>‹#›</a:t>
+            </a:fld>
+            <a:endParaRPr lang="en-US"/>
+          </a:p>
+        </p:txBody>
+      </p:sp>
+      <p:sp>
+        <p:nvSpPr>
+          <p:cNvPr id="4" name="Date Placeholder 3">
+            <a:extLst>
+              <a:ext uri="{FF2B5EF4-FFF2-40B4-BE49-F238E27FC236}">
+                <a16:creationId xmlns:a16="http://schemas.microsoft.com/office/drawing/2014/main" id="{2FD4EB5F-BBDF-43AA-B322-DBC2BE28694D}"/>
+              </a:ext>
+            </a:extLst>
+          </p:cNvPr>
+          <p:cNvSpPr>
+            <a:spLocks noGrp="1"/>
+          </p:cNvSpPr>
+          <p:nvPr>
+            <p:ph type="dt" sz="half" idx="11"/>
+          </p:nvPr>
+        </p:nvSpPr>
+        <p:spPr/>
+        <p:txBody>
+          <a:bodyPr/>
+          <a:lstStyle/>
+          <a:p>
+            <a:fld id="{3A90985E-7D06-474A-B35F-C7E47130AC86}" type="datetime1">
+              <a:rPr lang="en-US" smtClean="0"/>
+              <a:t>2/11/2026</a:t>
+            </a:fld>
+            <a:endParaRPr lang="en-US"/>
+          </a:p>
+        </p:txBody>
+      </p:sp>
+      <p:sp>
+        <p:nvSpPr>
+          <p:cNvPr id="7" name="Content Placeholder 2">
+            <a:extLst>
+              <a:ext uri="{FF2B5EF4-FFF2-40B4-BE49-F238E27FC236}">
+                <a16:creationId xmlns:a16="http://schemas.microsoft.com/office/drawing/2014/main" id="{483863AB-DB4E-4C36-8CA5-17ACC71D4FE8}"/>
+              </a:ext>
+            </a:extLst>
+          </p:cNvPr>
+          <p:cNvSpPr>
+            <a:spLocks noGrp="1"/>
+          </p:cNvSpPr>
+          <p:nvPr>
+            <p:ph idx="1"/>
+          </p:nvPr>
+        </p:nvSpPr>
+        <p:spPr>
+          <a:xfrm>
+            <a:off x="609600" y="1502228"/>
+            <a:ext cx="10972800" cy="5202000"/>
+          </a:xfrm>
+        </p:spPr>
+        <p:txBody>
+          <a:bodyPr/>
+          <a:lstStyle>
+            <a:lvl1pPr>
+              <a:defRPr sz="1800" b="0">
+                <a:solidFill>
+                  <a:schemeClr val="tx1"/>
+                </a:solidFill>
+              </a:defRPr>
+            </a:lvl1pPr>
+            <a:lvl2pPr>
+              <a:defRPr sz="1500" b="0">
+                <a:solidFill>
+                  <a:schemeClr val="tx1"/>
+                </a:solidFill>
+              </a:defRPr>
+            </a:lvl2pPr>
+            <a:lvl3pPr>
+              <a:defRPr sz="1350" b="0">
+                <a:solidFill>
+                  <a:schemeClr val="tx1"/>
+                </a:solidFill>
+              </a:defRPr>
+            </a:lvl3pPr>
+            <a:lvl4pPr>
+              <a:defRPr>
+                <a:solidFill>
+                  <a:schemeClr val="tx1"/>
+                </a:solidFill>
+              </a:defRPr>
+            </a:lvl4pPr>
+            <a:lvl5pPr>
+              <a:defRPr>
+                <a:solidFill>
+                  <a:schemeClr val="tx1"/>
+                </a:solidFill>
+              </a:defRPr>
+            </a:lvl5pPr>
+          </a:lstStyle>
+          <a:p>
+            <a:pPr lvl="0"/>
+            <a:r>
+              <a:rPr lang="en-US"/>
+              <a:t>Edit Master text styles</a:t>
+            </a:r>
+          </a:p>
+          <a:p>
+            <a:pPr lvl="1"/>
+            <a:r>
+              <a:rPr lang="en-US"/>
+              <a:t>Second level</a:t>
+            </a:r>
+          </a:p>
+          <a:p>
+            <a:pPr lvl="2"/>
+            <a:r>
+              <a:rPr lang="en-US"/>
+              <a:t>Third level</a:t>
+            </a:r>
+          </a:p>
+          <a:p>
+            <a:pPr lvl="3"/>
+            <a:r>
+              <a:rPr lang="en-US"/>
+              <a:t>Fourth level</a:t>
+            </a:r>
+          </a:p>
+          <a:p>
+            <a:pPr lvl="4"/>
+            <a:r>
+              <a:rPr lang="en-US"/>
+              <a:t>Fifth level</a:t>
+            </a:r>
+            <a:endParaRPr lang="en-GB" dirty="0"/>
+          </a:p>
+        </p:txBody>
+      </p:sp>
+      <p:sp>
+        <p:nvSpPr>
+          <p:cNvPr id="9" name="Title 1">
+            <a:extLst>
+              <a:ext uri="{FF2B5EF4-FFF2-40B4-BE49-F238E27FC236}">
+                <a16:creationId xmlns:a16="http://schemas.microsoft.com/office/drawing/2014/main" id="{FC9FE2E9-EA17-4993-81DE-DC9234476217}"/>
+              </a:ext>
+            </a:extLst>
+          </p:cNvPr>
+          <p:cNvSpPr>
+            <a:spLocks noGrp="1"/>
+          </p:cNvSpPr>
+          <p:nvPr>
+            <p:ph type="title"/>
+          </p:nvPr>
+        </p:nvSpPr>
+        <p:spPr>
+          <a:xfrm>
+            <a:off x="609600" y="161904"/>
+            <a:ext cx="10972800" cy="1143000"/>
+          </a:xfrm>
+        </p:spPr>
+        <p:txBody>
+          <a:bodyPr/>
+          <a:lstStyle/>
+          <a:p>
+            <a:r>
+              <a:rPr lang="en-US" dirty="0"/>
+              <a:t>Click to edit Master title style</a:t>
+            </a:r>
+            <a:endParaRPr lang="en-FI" dirty="0"/>
+          </a:p>
+        </p:txBody>
+      </p:sp>
+    </p:spTree>
+    <p:extLst>
+      <p:ext uri="{BB962C8B-B14F-4D97-AF65-F5344CB8AC3E}">
+        <p14:creationId xmlns:p14="http://schemas.microsoft.com/office/powerpoint/2010/main" val="826325442"/>
+      </p:ext>
+    </p:extLst>
+  </p:cSld>
+  <p:clrMapOvr>
+    <a:masterClrMapping/>
+  </p:clrMapOvr>
+</p:sldLayout>
+</file>
+
+<file path=ppt/slideLayouts/slideLayout6.xml><?xml version="1.0" encoding="utf-8"?>
+<p:sldLayout xmlns:a="http://schemas.openxmlformats.org/drawingml/2006/main" xmlns:r="http://schemas.openxmlformats.org/officeDocument/2006/relationships" xmlns:p="http://schemas.openxmlformats.org/presentationml/2006/main" type="secHead" preserve="1">
+  <p:cSld name="Section Header">
+    <p:spTree>
+      <p:nvGrpSpPr>
+        <p:cNvPr id="1" name=""/>
+        <p:cNvGrpSpPr/>
+        <p:nvPr/>
+      </p:nvGrpSpPr>
+      <p:grpSpPr>
+        <a:xfrm>
+          <a:off x="0" y="0"/>
+          <a:ext cx="0" cy="0"/>
+          <a:chOff x="0" y="0"/>
+          <a:chExt cx="0" cy="0"/>
+        </a:xfrm>
+      </p:grpSpPr>
+      <p:sp>
+        <p:nvSpPr>
+          <p:cNvPr id="2" name="Title 1"/>
+          <p:cNvSpPr>
+            <a:spLocks noGrp="1"/>
+          </p:cNvSpPr>
+          <p:nvPr>
+            <p:ph type="title"/>
+          </p:nvPr>
+        </p:nvSpPr>
+        <p:spPr>
+          <a:xfrm>
+            <a:off x="963084" y="4406903"/>
+            <a:ext cx="10363200" cy="1362075"/>
+          </a:xfrm>
+          <a:prstGeom prst="rect">
+            <a:avLst/>
+          </a:prstGeom>
+        </p:spPr>
+        <p:txBody>
+          <a:bodyPr anchor="t"/>
+          <a:lstStyle>
+            <a:lvl1pPr algn="l">
+              <a:defRPr sz="3000" b="1" cap="all">
+                <a:solidFill>
+                  <a:srgbClr val="0070C0"/>
+                </a:solidFill>
+              </a:defRPr>
+            </a:lvl1pPr>
+          </a:lstStyle>
+          <a:p>
+            <a:r>
+              <a:rPr lang="en-US"/>
+              <a:t>Click to edit Master title style</a:t>
+            </a:r>
+            <a:endParaRPr lang="en-GB"/>
+          </a:p>
+        </p:txBody>
+      </p:sp>
+      <p:sp>
+        <p:nvSpPr>
+          <p:cNvPr id="3" name="Text Placeholder 2"/>
+          <p:cNvSpPr>
+            <a:spLocks noGrp="1"/>
+          </p:cNvSpPr>
+          <p:nvPr>
+            <p:ph type="body" idx="1"/>
+          </p:nvPr>
+        </p:nvSpPr>
+        <p:spPr>
+          <a:xfrm>
+            <a:off x="963084" y="2906713"/>
+            <a:ext cx="10363200" cy="1500187"/>
+          </a:xfrm>
+        </p:spPr>
+        <p:txBody>
+          <a:bodyPr anchor="b"/>
+          <a:lstStyle>
+            <a:lvl1pPr marL="0" indent="0">
+              <a:buNone/>
+              <a:defRPr sz="1500">
+                <a:solidFill>
+                  <a:schemeClr val="tx1">
+                    <a:tint val="75000"/>
+                  </a:schemeClr>
+                </a:solidFill>
+              </a:defRPr>
+            </a:lvl1pPr>
+            <a:lvl2pPr marL="342900" indent="0">
+              <a:buNone/>
+              <a:defRPr sz="1350">
+                <a:solidFill>
+                  <a:schemeClr val="tx1">
+                    <a:tint val="75000"/>
+                  </a:schemeClr>
+                </a:solidFill>
+              </a:defRPr>
+            </a:lvl2pPr>
+            <a:lvl3pPr marL="685800" indent="0">
+              <a:buNone/>
+              <a:defRPr sz="1200">
+                <a:solidFill>
+                  <a:schemeClr val="tx1">
+                    <a:tint val="75000"/>
+                  </a:schemeClr>
+                </a:solidFill>
+              </a:defRPr>
+            </a:lvl3pPr>
+            <a:lvl4pPr marL="1028700" indent="0">
+              <a:buNone/>
+              <a:defRPr sz="1050">
+                <a:solidFill>
+                  <a:schemeClr val="tx1">
+                    <a:tint val="75000"/>
+                  </a:schemeClr>
+                </a:solidFill>
+              </a:defRPr>
+            </a:lvl4pPr>
+            <a:lvl5pPr marL="1371600" indent="0">
+              <a:buNone/>
+              <a:defRPr sz="1050">
+                <a:solidFill>
+                  <a:schemeClr val="tx1">
+                    <a:tint val="75000"/>
+                  </a:schemeClr>
+                </a:solidFill>
+              </a:defRPr>
+            </a:lvl5pPr>
+            <a:lvl6pPr marL="1714500" indent="0">
+              <a:buNone/>
+              <a:defRPr sz="1050">
+                <a:solidFill>
+                  <a:schemeClr val="tx1">
+                    <a:tint val="75000"/>
+                  </a:schemeClr>
+                </a:solidFill>
+              </a:defRPr>
+            </a:lvl6pPr>
+            <a:lvl7pPr marL="2057400" indent="0">
+              <a:buNone/>
+              <a:defRPr sz="1050">
+                <a:solidFill>
+                  <a:schemeClr val="tx1">
+                    <a:tint val="75000"/>
+                  </a:schemeClr>
+                </a:solidFill>
+              </a:defRPr>
+            </a:lvl7pPr>
+            <a:lvl8pPr marL="2400300" indent="0">
+              <a:buNone/>
+              <a:defRPr sz="1050">
+                <a:solidFill>
+                  <a:schemeClr val="tx1">
+                    <a:tint val="75000"/>
+                  </a:schemeClr>
+                </a:solidFill>
+              </a:defRPr>
+            </a:lvl8pPr>
+            <a:lvl9pPr marL="2743200" indent="0">
+              <a:buNone/>
+              <a:defRPr sz="1050">
+                <a:solidFill>
+                  <a:schemeClr val="tx1">
+                    <a:tint val="75000"/>
+                  </a:schemeClr>
+                </a:solidFill>
+              </a:defRPr>
+            </a:lvl9pPr>
+          </a:lstStyle>
+          <a:p>
+            <a:pPr lvl="0"/>
+            <a:r>
+              <a:rPr lang="en-US"/>
+              <a:t>Edit Master text styles</a:t>
+            </a:r>
+          </a:p>
+        </p:txBody>
+      </p:sp>
+      <p:sp>
+        <p:nvSpPr>
+          <p:cNvPr id="6" name="Slide Number Placeholder 5"/>
+          <p:cNvSpPr>
+            <a:spLocks noGrp="1"/>
+          </p:cNvSpPr>
+          <p:nvPr>
+            <p:ph type="sldNum" sz="quarter" idx="12"/>
+          </p:nvPr>
+        </p:nvSpPr>
+        <p:spPr/>
+        <p:txBody>
+          <a:bodyPr/>
+          <a:lstStyle/>
+          <a:p>
+            <a:fld id="{C5EF2332-01BF-834F-8236-50238282D533}" type="slidenum">
+              <a:rPr lang="en-US" smtClean="0"/>
+              <a:t>‹#›</a:t>
+            </a:fld>
+            <a:endParaRPr lang="en-US"/>
+          </a:p>
+        </p:txBody>
+      </p:sp>
+    </p:spTree>
+    <p:extLst>
+      <p:ext uri="{BB962C8B-B14F-4D97-AF65-F5344CB8AC3E}">
+        <p14:creationId xmlns:p14="http://schemas.microsoft.com/office/powerpoint/2010/main" val="1525264900"/>
+      </p:ext>
+    </p:extLst>
+  </p:cSld>
+  <p:clrMapOvr>
+    <a:masterClrMapping/>
+  </p:clrMapOvr>
+</p:sldLayout>
+</file>
+
+<file path=ppt/slideLayouts/slideLayout7.xml><?xml version="1.0" encoding="utf-8"?>
+<p:sldLayout xmlns:a="http://schemas.openxmlformats.org/drawingml/2006/main" xmlns:r="http://schemas.openxmlformats.org/officeDocument/2006/relationships" xmlns:p="http://schemas.openxmlformats.org/presentationml/2006/main" preserve="1" userDrawn="1">
+  <p:cSld name="Two Content">
+    <p:spTree>
+      <p:nvGrpSpPr>
+        <p:cNvPr id="1" name=""/>
+        <p:cNvGrpSpPr/>
+        <p:nvPr/>
+      </p:nvGrpSpPr>
+      <p:grpSpPr>
+        <a:xfrm>
+          <a:off x="0" y="0"/>
+          <a:ext cx="0" cy="0"/>
+          <a:chOff x="0" y="0"/>
+          <a:chExt cx="0" cy="0"/>
+        </a:xfrm>
+      </p:grpSpPr>
+      <p:sp>
+        <p:nvSpPr>
+          <p:cNvPr id="3" name="Content Placeholder 2"/>
+          <p:cNvSpPr>
+            <a:spLocks noGrp="1"/>
+          </p:cNvSpPr>
+          <p:nvPr>
+            <p:ph sz="half" idx="1"/>
+          </p:nvPr>
+        </p:nvSpPr>
+        <p:spPr>
+          <a:xfrm>
+            <a:off x="609600" y="1600203"/>
+            <a:ext cx="5384800" cy="4525963"/>
+          </a:xfrm>
+        </p:spPr>
+        <p:txBody>
+          <a:bodyPr/>
+          <a:lstStyle>
+            <a:lvl1pPr>
+              <a:defRPr sz="2100"/>
+            </a:lvl1pPr>
+            <a:lvl2pPr>
+              <a:defRPr sz="1800"/>
+            </a:lvl2pPr>
+            <a:lvl3pPr>
+              <a:defRPr sz="1500"/>
+            </a:lvl3pPr>
+            <a:lvl4pPr>
+              <a:defRPr sz="1350"/>
+            </a:lvl4pPr>
+            <a:lvl5pPr>
+              <a:defRPr sz="1350"/>
+            </a:lvl5pPr>
+            <a:lvl6pPr>
+              <a:defRPr sz="1350"/>
+            </a:lvl6pPr>
+            <a:lvl7pPr>
+              <a:defRPr sz="1350"/>
+            </a:lvl7pPr>
+            <a:lvl8pPr>
+              <a:defRPr sz="1350"/>
+            </a:lvl8pPr>
+            <a:lvl9pPr>
+              <a:defRPr sz="1350"/>
+            </a:lvl9pPr>
+          </a:lstStyle>
+          <a:p>
+            <a:pPr lvl="0"/>
+            <a:r>
+              <a:rPr lang="en-US" dirty="0"/>
+              <a:t>Edit Master text styles</a:t>
+            </a:r>
+          </a:p>
+          <a:p>
+            <a:pPr lvl="1"/>
+            <a:r>
+              <a:rPr lang="en-US" dirty="0"/>
+              <a:t>Second level</a:t>
+            </a:r>
+          </a:p>
+          <a:p>
+            <a:pPr lvl="2"/>
+            <a:r>
+              <a:rPr lang="en-US" dirty="0"/>
+              <a:t>Third level</a:t>
+            </a:r>
+          </a:p>
+          <a:p>
+            <a:pPr lvl="3"/>
+            <a:r>
+              <a:rPr lang="en-US" dirty="0"/>
+              <a:t>Fourth level</a:t>
+            </a:r>
+          </a:p>
+          <a:p>
+            <a:pPr lvl="4"/>
+            <a:r>
+              <a:rPr lang="en-US" dirty="0"/>
+              <a:t>Fifth level</a:t>
+            </a:r>
+            <a:endParaRPr lang="en-GB" dirty="0"/>
+          </a:p>
+        </p:txBody>
+      </p:sp>
+      <p:sp>
+        <p:nvSpPr>
+          <p:cNvPr id="4" name="Content Placeholder 3"/>
+          <p:cNvSpPr>
+            <a:spLocks noGrp="1"/>
+          </p:cNvSpPr>
+          <p:nvPr>
+            <p:ph sz="half" idx="2"/>
+          </p:nvPr>
+        </p:nvSpPr>
+        <p:spPr>
+          <a:xfrm>
+            <a:off x="6197600" y="1600203"/>
+            <a:ext cx="5384800" cy="4525963"/>
+          </a:xfrm>
+        </p:spPr>
+        <p:txBody>
+          <a:bodyPr/>
+          <a:lstStyle>
+            <a:lvl1pPr>
+              <a:defRPr sz="2100"/>
+            </a:lvl1pPr>
+            <a:lvl2pPr>
+              <a:defRPr sz="1800"/>
+            </a:lvl2pPr>
+            <a:lvl3pPr>
+              <a:defRPr sz="1500"/>
+            </a:lvl3pPr>
+            <a:lvl4pPr>
+              <a:defRPr sz="1350"/>
+            </a:lvl4pPr>
+            <a:lvl5pPr>
+              <a:defRPr sz="1350"/>
+            </a:lvl5pPr>
+            <a:lvl6pPr>
+              <a:defRPr sz="1350"/>
+            </a:lvl6pPr>
+            <a:lvl7pPr>
+              <a:defRPr sz="1350"/>
+            </a:lvl7pPr>
+            <a:lvl8pPr>
+              <a:defRPr sz="1350"/>
+            </a:lvl8pPr>
+            <a:lvl9pPr>
+              <a:defRPr sz="1350"/>
+            </a:lvl9pPr>
+          </a:lstStyle>
+          <a:p>
+            <a:pPr lvl="0"/>
+            <a:r>
+              <a:rPr lang="en-US"/>
+              <a:t>Edit Master text styles</a:t>
+            </a:r>
+          </a:p>
+          <a:p>
+            <a:pPr lvl="1"/>
+            <a:r>
+              <a:rPr lang="en-US"/>
+              <a:t>Second level</a:t>
+            </a:r>
+          </a:p>
+          <a:p>
+            <a:pPr lvl="2"/>
+            <a:r>
+              <a:rPr lang="en-US"/>
+              <a:t>Third level</a:t>
+            </a:r>
+          </a:p>
+          <a:p>
+            <a:pPr lvl="3"/>
+            <a:r>
+              <a:rPr lang="en-US"/>
+              <a:t>Fourth level</a:t>
+            </a:r>
+          </a:p>
+          <a:p>
+            <a:pPr lvl="4"/>
+            <a:r>
+              <a:rPr lang="en-US"/>
+              <a:t>Fifth level</a:t>
+            </a:r>
+            <a:endParaRPr lang="en-GB"/>
+          </a:p>
+        </p:txBody>
+      </p:sp>
+      <p:sp>
+        <p:nvSpPr>
+          <p:cNvPr id="5" name="Date Placeholder 4"/>
+          <p:cNvSpPr>
+            <a:spLocks noGrp="1"/>
+          </p:cNvSpPr>
+          <p:nvPr>
+            <p:ph type="dt" sz="half" idx="10"/>
+          </p:nvPr>
+        </p:nvSpPr>
+        <p:spPr>
+          <a:xfrm>
+            <a:off x="8880000" y="36001"/>
+            <a:ext cx="2844800" cy="365125"/>
+          </a:xfrm>
+          <a:prstGeom prst="rect">
+            <a:avLst/>
+          </a:prstGeom>
+        </p:spPr>
+        <p:txBody>
+          <a:bodyPr/>
+          <a:lstStyle/>
+          <a:p>
+            <a:fld id="{C820DED6-3765-4534-B532-0657F89EB4C9}" type="datetime1">
+              <a:rPr lang="en-US" smtClean="0"/>
+              <a:t>2/11/2026</a:t>
             </a:fld>
             <a:endParaRPr lang="en-US"/>
           </a:p>
@@ -6817,7 +13559,7 @@
           <a:p>
             <a:fld id="{3BEE57D4-7D8E-4CAC-A6F8-EA8D2D023BF8}" type="datetime1">
               <a:rPr lang="en-US" smtClean="0"/>
-              <a:t>11/4/2025</a:t>
+              <a:t>2/11/2026</a:t>
             </a:fld>
             <a:endParaRPr lang="en-US"/>
           </a:p>
@@ -7105,7 +13847,7 @@
           <a:p>
             <a:fld id="{36DC5657-96FF-4603-9E96-6547A1338115}" type="datetime1">
               <a:rPr lang="en-US" smtClean="0"/>
-              <a:t>11/4/2025</a:t>
+              <a:t>2/11/2026</a:t>
             </a:fld>
             <a:endParaRPr lang="en-US"/>
           </a:p>
@@ -7182,7 +13924,7 @@
 </file>
 
 <file path=ppt/slideMasters/slideMaster1.xml><?xml version="1.0" encoding="utf-8"?>
-<p:sldMaster xmlns:a="http://schemas.openxmlformats.org/drawingml/2006/main" xmlns:r="http://schemas.openxmlformats.org/officeDocument/2006/relationships" xmlns:p="http://schemas.openxmlformats.org/presentationml/2006/main">
+<p:sldMaster xmlns:a="http://schemas.openxmlformats.org/drawingml/2006/main" xmlns:r="http://schemas.openxmlformats.org/officeDocument/2006/relationships" xmlns:p="http://schemas.openxmlformats.org/presentationml/2006/main" preserve="1">
   <p:cSld>
     <p:bg>
       <p:bgRef idx="1001">
@@ -7379,7 +14121,7 @@
             <a:avLst/>
           </a:prstGeom>
           <a:solidFill>
-            <a:srgbClr val="1E7FB8"/>
+            <a:srgbClr val="003366"/>
           </a:solidFill>
           <a:ln>
             <a:noFill/>
@@ -7679,7 +14421,7 @@
           <a:p>
             <a:fld id="{6C0063D3-2A43-4DB9-8D47-89A6771FB05A}" type="datetime1">
               <a:rPr lang="en-US" smtClean="0"/>
-              <a:t>11/4/2025</a:t>
+              <a:t>2/11/2026</a:t>
             </a:fld>
             <a:endParaRPr lang="en-US"/>
           </a:p>
@@ -7717,35 +14459,6 @@
       </p:pic>
       <p:pic>
         <p:nvPicPr>
-          <p:cNvPr id="4" name="Picture 3">
-            <a:extLst>
-              <a:ext uri="{FF2B5EF4-FFF2-40B4-BE49-F238E27FC236}">
-                <a16:creationId xmlns:a16="http://schemas.microsoft.com/office/drawing/2014/main" id="{4A2F782E-36A4-707A-F29B-7B736222CBCA}"/>
-              </a:ext>
-            </a:extLst>
-          </p:cNvPr>
-          <p:cNvPicPr>
-            <a:picLocks noChangeAspect="1"/>
-          </p:cNvPicPr>
-          <p:nvPr userDrawn="1"/>
-        </p:nvPicPr>
-        <p:blipFill rotWithShape="1">
-          <a:blip r:embed="rId28"/>
-          <a:srcRect l="78846" b="55168"/>
-          <a:stretch/>
-        </p:blipFill>
-        <p:spPr>
-          <a:xfrm>
-            <a:off x="8726227" y="-45243"/>
-            <a:ext cx="3465773" cy="639761"/>
-          </a:xfrm>
-          <a:prstGeom prst="rect">
-            <a:avLst/>
-          </a:prstGeom>
-        </p:spPr>
-      </p:pic>
-      <p:pic>
-        <p:nvPicPr>
           <p:cNvPr id="17" name="Picture 16" descr="Text&#10;&#10;Description automatically generated">
             <a:extLst>
               <a:ext uri="{FF2B5EF4-FFF2-40B4-BE49-F238E27FC236}">
@@ -7759,7 +14472,7 @@
           <p:nvPr userDrawn="1"/>
         </p:nvPicPr>
         <p:blipFill rotWithShape="1">
-          <a:blip r:embed="rId29">
+          <a:blip r:embed="rId28">
             <a:extLst>
               <a:ext uri="{28A0092B-C50C-407E-A947-70E740481C1C}">
                 <a14:useLocalDpi xmlns:a14="http://schemas.microsoft.com/office/drawing/2010/main" val="0"/>
@@ -7779,6 +14492,48 @@
           </a:prstGeom>
         </p:spPr>
       </p:pic>
+      <p:sp>
+        <p:nvSpPr>
+          <p:cNvPr id="8" name="TextBox 7">
+            <a:extLst>
+              <a:ext uri="{FF2B5EF4-FFF2-40B4-BE49-F238E27FC236}">
+                <a16:creationId xmlns:a16="http://schemas.microsoft.com/office/drawing/2014/main" id="{2D05F786-D587-7EAB-95BB-A3147BCCEEFA}"/>
+              </a:ext>
+            </a:extLst>
+          </p:cNvPr>
+          <p:cNvSpPr txBox="1"/>
+          <p:nvPr userDrawn="1"/>
+        </p:nvSpPr>
+        <p:spPr>
+          <a:xfrm>
+            <a:off x="9867899" y="-8807"/>
+            <a:ext cx="2324101" cy="307777"/>
+          </a:xfrm>
+          <a:prstGeom prst="rect">
+            <a:avLst/>
+          </a:prstGeom>
+          <a:solidFill>
+            <a:srgbClr val="003366"/>
+          </a:solidFill>
+        </p:spPr>
+        <p:txBody>
+          <a:bodyPr wrap="square" rtlCol="0">
+            <a:spAutoFit/>
+          </a:bodyPr>
+          <a:lstStyle/>
+          <a:p>
+            <a:r>
+              <a:rPr lang="en-US" sz="1400" b="1" dirty="0">
+                <a:solidFill>
+                  <a:srgbClr val="FF0000"/>
+                </a:solidFill>
+                <a:latin typeface="+mj-lt"/>
+              </a:rPr>
+              <a:t>Confidential, not for sharing</a:t>
+            </a:r>
+          </a:p>
+        </p:txBody>
+      </p:sp>
     </p:spTree>
     <p:extLst>
       <p:ext uri="{BB962C8B-B14F-4D97-AF65-F5344CB8AC3E}">
@@ -8083,6 +14838,864 @@
 </p:sldMaster>
 </file>
 
+<file path=ppt/slideMasters/slideMaster2.xml><?xml version="1.0" encoding="utf-8"?>
+<p:sldMaster xmlns:a="http://schemas.openxmlformats.org/drawingml/2006/main" xmlns:r="http://schemas.openxmlformats.org/officeDocument/2006/relationships" xmlns:p="http://schemas.openxmlformats.org/presentationml/2006/main" preserve="1">
+  <p:cSld>
+    <p:bg>
+      <p:bgRef idx="1001">
+        <a:schemeClr val="bg1"/>
+      </p:bgRef>
+    </p:bg>
+    <p:spTree>
+      <p:nvGrpSpPr>
+        <p:cNvPr id="1" name=""/>
+        <p:cNvGrpSpPr/>
+        <p:nvPr/>
+      </p:nvGrpSpPr>
+      <p:grpSpPr>
+        <a:xfrm>
+          <a:off x="0" y="0"/>
+          <a:ext cx="0" cy="0"/>
+          <a:chOff x="0" y="0"/>
+          <a:chExt cx="0" cy="0"/>
+        </a:xfrm>
+      </p:grpSpPr>
+      <p:sp>
+        <p:nvSpPr>
+          <p:cNvPr id="3" name="Text Placeholder 2"/>
+          <p:cNvSpPr>
+            <a:spLocks noGrp="1"/>
+          </p:cNvSpPr>
+          <p:nvPr>
+            <p:ph type="body" idx="1"/>
+          </p:nvPr>
+        </p:nvSpPr>
+        <p:spPr>
+          <a:xfrm>
+            <a:off x="609600" y="1600203"/>
+            <a:ext cx="10972800" cy="4525963"/>
+          </a:xfrm>
+          <a:prstGeom prst="rect">
+            <a:avLst/>
+          </a:prstGeom>
+        </p:spPr>
+        <p:txBody>
+          <a:bodyPr vert="horz" lIns="91440" tIns="45720" rIns="91440" bIns="45720" rtlCol="0">
+            <a:normAutofit/>
+          </a:bodyPr>
+          <a:lstStyle/>
+          <a:p>
+            <a:pPr lvl="0"/>
+            <a:r>
+              <a:rPr lang="en-US" dirty="0"/>
+              <a:t>Edit Master text styles</a:t>
+            </a:r>
+          </a:p>
+          <a:p>
+            <a:pPr lvl="1"/>
+            <a:r>
+              <a:rPr lang="en-US" dirty="0"/>
+              <a:t>Second level</a:t>
+            </a:r>
+          </a:p>
+          <a:p>
+            <a:pPr lvl="2"/>
+            <a:r>
+              <a:rPr lang="en-US" dirty="0"/>
+              <a:t>Third level</a:t>
+            </a:r>
+          </a:p>
+          <a:p>
+            <a:pPr lvl="3"/>
+            <a:r>
+              <a:rPr lang="en-US" dirty="0"/>
+              <a:t>Fourth level</a:t>
+            </a:r>
+          </a:p>
+          <a:p>
+            <a:pPr lvl="4"/>
+            <a:r>
+              <a:rPr lang="en-US" dirty="0"/>
+              <a:t>Fifth level</a:t>
+            </a:r>
+            <a:endParaRPr lang="en-GB" dirty="0"/>
+          </a:p>
+        </p:txBody>
+      </p:sp>
+      <p:sp>
+        <p:nvSpPr>
+          <p:cNvPr id="6" name="Slide Number Placeholder 5"/>
+          <p:cNvSpPr>
+            <a:spLocks noGrp="1"/>
+          </p:cNvSpPr>
+          <p:nvPr>
+            <p:ph type="sldNum" sz="quarter" idx="4"/>
+          </p:nvPr>
+        </p:nvSpPr>
+        <p:spPr>
+          <a:xfrm>
+            <a:off x="9184413" y="6348368"/>
+            <a:ext cx="2844800" cy="365125"/>
+          </a:xfrm>
+          <a:prstGeom prst="rect">
+            <a:avLst/>
+          </a:prstGeom>
+        </p:spPr>
+        <p:txBody>
+          <a:bodyPr vert="horz" lIns="91440" tIns="45720" rIns="91440" bIns="45720" rtlCol="0" anchor="ctr"/>
+          <a:lstStyle>
+            <a:lvl1pPr algn="r">
+              <a:defRPr sz="1800">
+                <a:solidFill>
+                  <a:schemeClr val="tx1">
+                    <a:tint val="75000"/>
+                  </a:schemeClr>
+                </a:solidFill>
+              </a:defRPr>
+            </a:lvl1pPr>
+          </a:lstStyle>
+          <a:p>
+            <a:fld id="{C5EF2332-01BF-834F-8236-50238282D533}" type="slidenum">
+              <a:rPr lang="en-US" smtClean="0"/>
+              <a:pPr/>
+              <a:t>‹#›</a:t>
+            </a:fld>
+            <a:endParaRPr lang="en-US" dirty="0"/>
+          </a:p>
+        </p:txBody>
+      </p:sp>
+      <p:sp>
+        <p:nvSpPr>
+          <p:cNvPr id="7" name="Rectangle 6"/>
+          <p:cNvSpPr/>
+          <p:nvPr/>
+        </p:nvSpPr>
+        <p:spPr>
+          <a:xfrm>
+            <a:off x="0" y="-27384"/>
+            <a:ext cx="12192000" cy="1196817"/>
+          </a:xfrm>
+          <a:prstGeom prst="rect">
+            <a:avLst/>
+          </a:prstGeom>
+          <a:solidFill>
+            <a:srgbClr val="003366"/>
+          </a:solidFill>
+          <a:ln>
+            <a:noFill/>
+          </a:ln>
+        </p:spPr>
+        <p:style>
+          <a:lnRef idx="2">
+            <a:schemeClr val="accent1">
+              <a:shade val="50000"/>
+            </a:schemeClr>
+          </a:lnRef>
+          <a:fillRef idx="1">
+            <a:schemeClr val="accent1"/>
+          </a:fillRef>
+          <a:effectRef idx="0">
+            <a:schemeClr val="accent1"/>
+          </a:effectRef>
+          <a:fontRef idx="minor">
+            <a:schemeClr val="lt1"/>
+          </a:fontRef>
+        </p:style>
+        <p:txBody>
+          <a:bodyPr rtlCol="0" anchor="ctr"/>
+          <a:lstStyle/>
+          <a:p>
+            <a:pPr algn="ctr" eaLnBrk="1" fontAlgn="auto" hangingPunct="1">
+              <a:spcBef>
+                <a:spcPts val="0"/>
+              </a:spcBef>
+              <a:spcAft>
+                <a:spcPts val="0"/>
+              </a:spcAft>
+            </a:pPr>
+            <a:endParaRPr lang="en-GB" sz="1350" dirty="0">
+              <a:solidFill>
+                <a:prstClr val="white"/>
+              </a:solidFill>
+            </a:endParaRPr>
+          </a:p>
+        </p:txBody>
+      </p:sp>
+      <p:grpSp>
+        <p:nvGrpSpPr>
+          <p:cNvPr id="9" name="Group 8"/>
+          <p:cNvGrpSpPr/>
+          <p:nvPr/>
+        </p:nvGrpSpPr>
+        <p:grpSpPr>
+          <a:xfrm>
+            <a:off x="9315613" y="6269496"/>
+            <a:ext cx="2515543" cy="527387"/>
+            <a:chOff x="5525840" y="3530278"/>
+            <a:chExt cx="1886657" cy="527387"/>
+          </a:xfrm>
+        </p:grpSpPr>
+        <p:sp>
+          <p:nvSpPr>
+            <p:cNvPr id="10" name="TextBox 9"/>
+            <p:cNvSpPr txBox="1"/>
+            <p:nvPr/>
+          </p:nvSpPr>
+          <p:spPr>
+            <a:xfrm>
+              <a:off x="5540240" y="3530278"/>
+              <a:ext cx="1872257" cy="207749"/>
+            </a:xfrm>
+            <a:prstGeom prst="rect">
+              <a:avLst/>
+            </a:prstGeom>
+            <a:noFill/>
+          </p:spPr>
+          <p:txBody>
+            <a:bodyPr wrap="square" rtlCol="0">
+              <a:spAutoFit/>
+            </a:bodyPr>
+            <a:lstStyle/>
+            <a:p>
+              <a:pPr eaLnBrk="1" fontAlgn="auto" hangingPunct="1">
+                <a:spcBef>
+                  <a:spcPts val="0"/>
+                </a:spcBef>
+                <a:spcAft>
+                  <a:spcPts val="0"/>
+                </a:spcAft>
+              </a:pPr>
+              <a:r>
+                <a:rPr lang="en-GB" sz="750" cap="all" dirty="0">
+                  <a:solidFill>
+                    <a:srgbClr val="1E7FB8"/>
+                  </a:solidFill>
+                  <a:latin typeface="Corbel" panose="020B0503020204020204" pitchFamily="34" charset="0"/>
+                  <a:cs typeface="+mn-cs"/>
+                </a:rPr>
+                <a:t>Health</a:t>
+              </a:r>
+            </a:p>
+          </p:txBody>
+        </p:sp>
+        <p:grpSp>
+          <p:nvGrpSpPr>
+            <p:cNvPr id="11" name="Group 10"/>
+            <p:cNvGrpSpPr/>
+            <p:nvPr/>
+          </p:nvGrpSpPr>
+          <p:grpSpPr>
+            <a:xfrm>
+              <a:off x="5525840" y="3618320"/>
+              <a:ext cx="1879457" cy="439345"/>
+              <a:chOff x="5525840" y="3618320"/>
+              <a:chExt cx="1879457" cy="439345"/>
+            </a:xfrm>
+          </p:grpSpPr>
+          <p:sp>
+            <p:nvSpPr>
+              <p:cNvPr id="12" name="TextBox 11"/>
+              <p:cNvSpPr txBox="1"/>
+              <p:nvPr/>
+            </p:nvSpPr>
+            <p:spPr>
+              <a:xfrm>
+                <a:off x="6494240" y="3838374"/>
+                <a:ext cx="889168" cy="219291"/>
+              </a:xfrm>
+              <a:prstGeom prst="rect">
+                <a:avLst/>
+              </a:prstGeom>
+              <a:noFill/>
+            </p:spPr>
+            <p:txBody>
+              <a:bodyPr wrap="square" rtlCol="0">
+                <a:spAutoFit/>
+              </a:bodyPr>
+              <a:lstStyle/>
+              <a:p>
+                <a:pPr eaLnBrk="1" fontAlgn="auto" hangingPunct="1">
+                  <a:spcBef>
+                    <a:spcPts val="0"/>
+                  </a:spcBef>
+                  <a:spcAft>
+                    <a:spcPts val="0"/>
+                  </a:spcAft>
+                </a:pPr>
+                <a:r>
+                  <a:rPr lang="en-GB" sz="825" spc="-60" dirty="0">
+                    <a:solidFill>
+                      <a:srgbClr val="1E7FB8"/>
+                    </a:solidFill>
+                    <a:latin typeface="Corbel" panose="020B0503020204020204" pitchFamily="34" charset="0"/>
+                    <a:cs typeface="+mn-cs"/>
+                  </a:rPr>
+                  <a:t>programme</a:t>
+                </a:r>
+              </a:p>
+            </p:txBody>
+          </p:sp>
+          <p:sp>
+            <p:nvSpPr>
+              <p:cNvPr id="13" name="TextBox 12"/>
+              <p:cNvSpPr txBox="1"/>
+              <p:nvPr/>
+            </p:nvSpPr>
+            <p:spPr>
+              <a:xfrm>
+                <a:off x="5525840" y="3618320"/>
+                <a:ext cx="1879457" cy="323165"/>
+              </a:xfrm>
+              <a:prstGeom prst="rect">
+                <a:avLst/>
+              </a:prstGeom>
+              <a:noFill/>
+            </p:spPr>
+            <p:txBody>
+              <a:bodyPr wrap="square" rtlCol="0">
+                <a:spAutoFit/>
+              </a:bodyPr>
+              <a:lstStyle/>
+              <a:p>
+                <a:pPr eaLnBrk="1" fontAlgn="auto" hangingPunct="1">
+                  <a:spcBef>
+                    <a:spcPts val="0"/>
+                  </a:spcBef>
+                  <a:spcAft>
+                    <a:spcPts val="0"/>
+                  </a:spcAft>
+                </a:pPr>
+                <a:r>
+                  <a:rPr lang="en-GB" sz="1500" b="1" cap="all" spc="-60" dirty="0">
+                    <a:solidFill>
+                      <a:srgbClr val="1E7FB8"/>
+                    </a:solidFill>
+                    <a:latin typeface="Leelawadee" panose="020B0502040204020203" pitchFamily="34" charset="-34"/>
+                    <a:ea typeface="Lato Heavy" panose="020F0502020204030203" pitchFamily="34" charset="0"/>
+                    <a:cs typeface="Leelawadee" panose="020B0502040204020203" pitchFamily="34" charset="-34"/>
+                  </a:rPr>
+                  <a:t>emergencies</a:t>
+                </a:r>
+              </a:p>
+            </p:txBody>
+          </p:sp>
+        </p:grpSp>
+      </p:grpSp>
+      <p:sp>
+        <p:nvSpPr>
+          <p:cNvPr id="2" name="Title Placeholder 1"/>
+          <p:cNvSpPr>
+            <a:spLocks noGrp="1"/>
+          </p:cNvSpPr>
+          <p:nvPr>
+            <p:ph type="title"/>
+          </p:nvPr>
+        </p:nvSpPr>
+        <p:spPr>
+          <a:xfrm>
+            <a:off x="609600" y="274638"/>
+            <a:ext cx="10972800" cy="1143000"/>
+          </a:xfrm>
+          <a:prstGeom prst="rect">
+            <a:avLst/>
+          </a:prstGeom>
+        </p:spPr>
+        <p:txBody>
+          <a:bodyPr vert="horz" lIns="91440" tIns="45720" rIns="91440" bIns="45720" rtlCol="0" anchor="ctr">
+            <a:normAutofit/>
+          </a:bodyPr>
+          <a:lstStyle/>
+          <a:p>
+            <a:r>
+              <a:rPr lang="en-US"/>
+              <a:t>Click to edit Master title style</a:t>
+            </a:r>
+            <a:endParaRPr lang="en-GB" dirty="0"/>
+          </a:p>
+        </p:txBody>
+      </p:sp>
+      <p:cxnSp>
+        <p:nvCxnSpPr>
+          <p:cNvPr id="16" name="Straight Connector 15"/>
+          <p:cNvCxnSpPr/>
+          <p:nvPr/>
+        </p:nvCxnSpPr>
+        <p:spPr>
+          <a:xfrm>
+            <a:off x="-12288" y="6215809"/>
+            <a:ext cx="12204288" cy="0"/>
+          </a:xfrm>
+          <a:prstGeom prst="line">
+            <a:avLst/>
+          </a:prstGeom>
+          <a:ln w="25400"/>
+        </p:spPr>
+        <p:style>
+          <a:lnRef idx="1">
+            <a:schemeClr val="accent1"/>
+          </a:lnRef>
+          <a:fillRef idx="0">
+            <a:schemeClr val="accent1"/>
+          </a:fillRef>
+          <a:effectRef idx="0">
+            <a:schemeClr val="accent1"/>
+          </a:effectRef>
+          <a:fontRef idx="minor">
+            <a:schemeClr val="tx1"/>
+          </a:fontRef>
+        </p:style>
+      </p:cxnSp>
+      <p:sp>
+        <p:nvSpPr>
+          <p:cNvPr id="18" name="Date Placeholder 17"/>
+          <p:cNvSpPr>
+            <a:spLocks noGrp="1"/>
+          </p:cNvSpPr>
+          <p:nvPr>
+            <p:ph type="dt" sz="half" idx="2"/>
+          </p:nvPr>
+        </p:nvSpPr>
+        <p:spPr>
+          <a:xfrm>
+            <a:off x="8880000" y="36001"/>
+            <a:ext cx="2844800" cy="365125"/>
+          </a:xfrm>
+          <a:prstGeom prst="rect">
+            <a:avLst/>
+          </a:prstGeom>
+        </p:spPr>
+        <p:txBody>
+          <a:bodyPr vert="horz" lIns="91440" tIns="45720" rIns="91440" bIns="45720" rtlCol="0" anchor="ctr"/>
+          <a:lstStyle>
+            <a:lvl1pPr algn="r">
+              <a:defRPr sz="900">
+                <a:solidFill>
+                  <a:schemeClr val="bg1"/>
+                </a:solidFill>
+                <a:latin typeface="Segoe Condensed" panose="020B0606040200020203" pitchFamily="34" charset="0"/>
+              </a:defRPr>
+            </a:lvl1pPr>
+          </a:lstStyle>
+          <a:p>
+            <a:fld id="{6C0063D3-2A43-4DB9-8D47-89A6771FB05A}" type="datetime1">
+              <a:rPr lang="en-US" smtClean="0"/>
+              <a:t>2/11/2026</a:t>
+            </a:fld>
+            <a:endParaRPr lang="en-US"/>
+          </a:p>
+        </p:txBody>
+      </p:sp>
+      <p:pic>
+        <p:nvPicPr>
+          <p:cNvPr id="15" name="Picture 14">
+            <a:extLst>
+              <a:ext uri="{FF2B5EF4-FFF2-40B4-BE49-F238E27FC236}">
+                <a16:creationId xmlns:a16="http://schemas.microsoft.com/office/drawing/2014/main" id="{80D29B7D-47C4-4640-9003-C8A639EDE5BC}"/>
+              </a:ext>
+            </a:extLst>
+          </p:cNvPr>
+          <p:cNvPicPr>
+            <a:picLocks noChangeAspect="1"/>
+          </p:cNvPicPr>
+          <p:nvPr userDrawn="1"/>
+        </p:nvPicPr>
+        <p:blipFill>
+          <a:blip r:embed="rId27"/>
+          <a:stretch>
+            <a:fillRect/>
+          </a:stretch>
+        </p:blipFill>
+        <p:spPr>
+          <a:xfrm>
+            <a:off x="465513" y="6308731"/>
+            <a:ext cx="1498204" cy="458558"/>
+          </a:xfrm>
+          <a:prstGeom prst="rect">
+            <a:avLst/>
+          </a:prstGeom>
+        </p:spPr>
+      </p:pic>
+      <p:pic>
+        <p:nvPicPr>
+          <p:cNvPr id="17" name="Picture 16" descr="Text&#10;&#10;Description automatically generated">
+            <a:extLst>
+              <a:ext uri="{FF2B5EF4-FFF2-40B4-BE49-F238E27FC236}">
+                <a16:creationId xmlns:a16="http://schemas.microsoft.com/office/drawing/2014/main" id="{35E5C65A-8841-41E0-83A7-2AD328E1B1F1}"/>
+              </a:ext>
+            </a:extLst>
+          </p:cNvPr>
+          <p:cNvPicPr>
+            <a:picLocks noChangeAspect="1"/>
+          </p:cNvPicPr>
+          <p:nvPr userDrawn="1"/>
+        </p:nvPicPr>
+        <p:blipFill rotWithShape="1">
+          <a:blip r:embed="rId28">
+            <a:extLst>
+              <a:ext uri="{28A0092B-C50C-407E-A947-70E740481C1C}">
+                <a14:useLocalDpi xmlns:a14="http://schemas.microsoft.com/office/drawing/2010/main" val="0"/>
+              </a:ext>
+            </a:extLst>
+          </a:blip>
+          <a:srcRect l="7316" t="36544" r="11732" b="26452"/>
+          <a:stretch/>
+        </p:blipFill>
+        <p:spPr>
+          <a:xfrm>
+            <a:off x="4564853" y="6339489"/>
+            <a:ext cx="3050006" cy="397042"/>
+          </a:xfrm>
+          <a:prstGeom prst="rect">
+            <a:avLst/>
+          </a:prstGeom>
+        </p:spPr>
+      </p:pic>
+      <p:sp>
+        <p:nvSpPr>
+          <p:cNvPr id="8" name="TextBox 7">
+            <a:extLst>
+              <a:ext uri="{FF2B5EF4-FFF2-40B4-BE49-F238E27FC236}">
+                <a16:creationId xmlns:a16="http://schemas.microsoft.com/office/drawing/2014/main" id="{2D05F786-D587-7EAB-95BB-A3147BCCEEFA}"/>
+              </a:ext>
+            </a:extLst>
+          </p:cNvPr>
+          <p:cNvSpPr txBox="1"/>
+          <p:nvPr userDrawn="1"/>
+        </p:nvSpPr>
+        <p:spPr>
+          <a:xfrm>
+            <a:off x="9867899" y="-8807"/>
+            <a:ext cx="2324101" cy="307777"/>
+          </a:xfrm>
+          <a:prstGeom prst="rect">
+            <a:avLst/>
+          </a:prstGeom>
+          <a:solidFill>
+            <a:srgbClr val="003366"/>
+          </a:solidFill>
+        </p:spPr>
+        <p:txBody>
+          <a:bodyPr wrap="square" rtlCol="0">
+            <a:spAutoFit/>
+          </a:bodyPr>
+          <a:lstStyle/>
+          <a:p>
+            <a:r>
+              <a:rPr lang="en-US" sz="1400" b="1" dirty="0">
+                <a:solidFill>
+                  <a:srgbClr val="FF0000"/>
+                </a:solidFill>
+                <a:latin typeface="+mj-lt"/>
+              </a:rPr>
+              <a:t>Confidential, not for sharing</a:t>
+            </a:r>
+          </a:p>
+        </p:txBody>
+      </p:sp>
+    </p:spTree>
+    <p:extLst>
+      <p:ext uri="{BB962C8B-B14F-4D97-AF65-F5344CB8AC3E}">
+        <p14:creationId xmlns:p14="http://schemas.microsoft.com/office/powerpoint/2010/main" val="682135731"/>
+      </p:ext>
+    </p:extLst>
+  </p:cSld>
+  <p:clrMap bg1="lt1" tx1="dk1" bg2="lt2" tx2="dk2" accent1="accent1" accent2="accent2" accent3="accent3" accent4="accent4" accent5="accent5" accent6="accent6" hlink="hlink" folHlink="folHlink"/>
+  <p:sldLayoutIdLst>
+    <p:sldLayoutId id="2147483692" r:id="rId1"/>
+    <p:sldLayoutId id="2147483693" r:id="rId2"/>
+    <p:sldLayoutId id="2147483694" r:id="rId3"/>
+    <p:sldLayoutId id="2147483695" r:id="rId4"/>
+    <p:sldLayoutId id="2147483696" r:id="rId5"/>
+    <p:sldLayoutId id="2147483697" r:id="rId6"/>
+    <p:sldLayoutId id="2147483698" r:id="rId7"/>
+    <p:sldLayoutId id="2147483699" r:id="rId8"/>
+    <p:sldLayoutId id="2147483700" r:id="rId9"/>
+    <p:sldLayoutId id="2147483701" r:id="rId10"/>
+    <p:sldLayoutId id="2147483702" r:id="rId11"/>
+    <p:sldLayoutId id="2147483703" r:id="rId12"/>
+    <p:sldLayoutId id="2147483704" r:id="rId13"/>
+    <p:sldLayoutId id="2147483705" r:id="rId14"/>
+    <p:sldLayoutId id="2147483706" r:id="rId15"/>
+    <p:sldLayoutId id="2147483707" r:id="rId16"/>
+    <p:sldLayoutId id="2147483708" r:id="rId17"/>
+    <p:sldLayoutId id="2147483709" r:id="rId18"/>
+    <p:sldLayoutId id="2147483710" r:id="rId19"/>
+    <p:sldLayoutId id="2147483711" r:id="rId20"/>
+    <p:sldLayoutId id="2147483712" r:id="rId21"/>
+    <p:sldLayoutId id="2147483713" r:id="rId22"/>
+    <p:sldLayoutId id="2147483714" r:id="rId23"/>
+    <p:sldLayoutId id="2147483715" r:id="rId24"/>
+    <p:sldLayoutId id="2147483716" r:id="rId25"/>
+  </p:sldLayoutIdLst>
+  <p:hf hdr="0" ftr="0" dt="0"/>
+  <p:txStyles>
+    <p:titleStyle>
+      <a:lvl1pPr algn="l" defTabSz="685800" rtl="0" eaLnBrk="1" latinLnBrk="0" hangingPunct="1">
+        <a:spcBef>
+          <a:spcPct val="0"/>
+        </a:spcBef>
+        <a:buNone/>
+        <a:defRPr sz="3300" b="1" kern="1200">
+          <a:solidFill>
+            <a:schemeClr val="bg1"/>
+          </a:solidFill>
+          <a:latin typeface="Segoe Condensed" panose="020B0606040200020203" pitchFamily="34" charset="0"/>
+          <a:ea typeface="+mj-ea"/>
+          <a:cs typeface="+mj-cs"/>
+        </a:defRPr>
+      </a:lvl1pPr>
+    </p:titleStyle>
+    <p:bodyStyle>
+      <a:lvl1pPr marL="257175" indent="-257175" algn="l" defTabSz="685800" rtl="0" eaLnBrk="1" latinLnBrk="0" hangingPunct="1">
+        <a:spcBef>
+          <a:spcPct val="20000"/>
+        </a:spcBef>
+        <a:buFont typeface="Arial" panose="020B0604020202020204" pitchFamily="34" charset="0"/>
+        <a:buChar char="•"/>
+        <a:defRPr sz="2400" b="1" kern="1200">
+          <a:solidFill>
+            <a:schemeClr val="tx1">
+              <a:lumMod val="50000"/>
+              <a:lumOff val="50000"/>
+            </a:schemeClr>
+          </a:solidFill>
+          <a:latin typeface="Segoe Condensed" panose="020B0606040200020203" pitchFamily="34" charset="0"/>
+          <a:ea typeface="+mn-ea"/>
+          <a:cs typeface="+mn-cs"/>
+        </a:defRPr>
+      </a:lvl1pPr>
+      <a:lvl2pPr marL="557213" indent="-214313" algn="l" defTabSz="685800" rtl="0" eaLnBrk="1" latinLnBrk="0" hangingPunct="1">
+        <a:spcBef>
+          <a:spcPct val="20000"/>
+        </a:spcBef>
+        <a:buFont typeface="Arial" panose="020B0604020202020204" pitchFamily="34" charset="0"/>
+        <a:buChar char="–"/>
+        <a:defRPr sz="2100" b="1" kern="1200">
+          <a:solidFill>
+            <a:schemeClr val="tx1">
+              <a:lumMod val="50000"/>
+              <a:lumOff val="50000"/>
+            </a:schemeClr>
+          </a:solidFill>
+          <a:latin typeface="Segoe Condensed" panose="020B0606040200020203" pitchFamily="34" charset="0"/>
+          <a:ea typeface="+mn-ea"/>
+          <a:cs typeface="+mn-cs"/>
+        </a:defRPr>
+      </a:lvl2pPr>
+      <a:lvl3pPr marL="857250" indent="-171450" algn="l" defTabSz="685800" rtl="0" eaLnBrk="1" latinLnBrk="0" hangingPunct="1">
+        <a:spcBef>
+          <a:spcPct val="20000"/>
+        </a:spcBef>
+        <a:buFont typeface="Arial" panose="020B0604020202020204" pitchFamily="34" charset="0"/>
+        <a:buChar char="•"/>
+        <a:defRPr sz="1800" b="1" kern="1200">
+          <a:solidFill>
+            <a:schemeClr val="tx1">
+              <a:lumMod val="50000"/>
+              <a:lumOff val="50000"/>
+            </a:schemeClr>
+          </a:solidFill>
+          <a:latin typeface="Segoe Condensed" panose="020B0606040200020203" pitchFamily="34" charset="0"/>
+          <a:ea typeface="+mn-ea"/>
+          <a:cs typeface="+mn-cs"/>
+        </a:defRPr>
+      </a:lvl3pPr>
+      <a:lvl4pPr marL="1200150" indent="-171450" algn="l" defTabSz="685800" rtl="0" eaLnBrk="1" latinLnBrk="0" hangingPunct="1">
+        <a:spcBef>
+          <a:spcPct val="20000"/>
+        </a:spcBef>
+        <a:buFont typeface="Arial" panose="020B0604020202020204" pitchFamily="34" charset="0"/>
+        <a:buChar char="–"/>
+        <a:defRPr sz="1500" b="1" kern="1200">
+          <a:solidFill>
+            <a:schemeClr val="tx1">
+              <a:lumMod val="50000"/>
+              <a:lumOff val="50000"/>
+            </a:schemeClr>
+          </a:solidFill>
+          <a:latin typeface="Segoe Condensed" panose="020B0606040200020203" pitchFamily="34" charset="0"/>
+          <a:ea typeface="+mn-ea"/>
+          <a:cs typeface="+mn-cs"/>
+        </a:defRPr>
+      </a:lvl4pPr>
+      <a:lvl5pPr marL="1543050" indent="-171450" algn="l" defTabSz="685800" rtl="0" eaLnBrk="1" latinLnBrk="0" hangingPunct="1">
+        <a:spcBef>
+          <a:spcPct val="20000"/>
+        </a:spcBef>
+        <a:buFont typeface="Arial" panose="020B0604020202020204" pitchFamily="34" charset="0"/>
+        <a:buChar char="»"/>
+        <a:defRPr sz="1500" b="1" kern="1200">
+          <a:solidFill>
+            <a:schemeClr val="tx1">
+              <a:lumMod val="50000"/>
+              <a:lumOff val="50000"/>
+            </a:schemeClr>
+          </a:solidFill>
+          <a:latin typeface="Segoe Condensed" panose="020B0606040200020203" pitchFamily="34" charset="0"/>
+          <a:ea typeface="+mn-ea"/>
+          <a:cs typeface="+mn-cs"/>
+        </a:defRPr>
+      </a:lvl5pPr>
+      <a:lvl6pPr marL="1885950" indent="-171450" algn="l" defTabSz="685800" rtl="0" eaLnBrk="1" latinLnBrk="0" hangingPunct="1">
+        <a:spcBef>
+          <a:spcPct val="20000"/>
+        </a:spcBef>
+        <a:buFont typeface="Arial" panose="020B0604020202020204" pitchFamily="34" charset="0"/>
+        <a:buChar char="•"/>
+        <a:defRPr sz="1500" kern="1200">
+          <a:solidFill>
+            <a:schemeClr val="tx1"/>
+          </a:solidFill>
+          <a:latin typeface="+mn-lt"/>
+          <a:ea typeface="+mn-ea"/>
+          <a:cs typeface="+mn-cs"/>
+        </a:defRPr>
+      </a:lvl6pPr>
+      <a:lvl7pPr marL="2228850" indent="-171450" algn="l" defTabSz="685800" rtl="0" eaLnBrk="1" latinLnBrk="0" hangingPunct="1">
+        <a:spcBef>
+          <a:spcPct val="20000"/>
+        </a:spcBef>
+        <a:buFont typeface="Arial" panose="020B0604020202020204" pitchFamily="34" charset="0"/>
+        <a:buChar char="•"/>
+        <a:defRPr sz="1500" kern="1200">
+          <a:solidFill>
+            <a:schemeClr val="tx1"/>
+          </a:solidFill>
+          <a:latin typeface="+mn-lt"/>
+          <a:ea typeface="+mn-ea"/>
+          <a:cs typeface="+mn-cs"/>
+        </a:defRPr>
+      </a:lvl7pPr>
+      <a:lvl8pPr marL="2571750" indent="-171450" algn="l" defTabSz="685800" rtl="0" eaLnBrk="1" latinLnBrk="0" hangingPunct="1">
+        <a:spcBef>
+          <a:spcPct val="20000"/>
+        </a:spcBef>
+        <a:buFont typeface="Arial" panose="020B0604020202020204" pitchFamily="34" charset="0"/>
+        <a:buChar char="•"/>
+        <a:defRPr sz="1500" kern="1200">
+          <a:solidFill>
+            <a:schemeClr val="tx1"/>
+          </a:solidFill>
+          <a:latin typeface="+mn-lt"/>
+          <a:ea typeface="+mn-ea"/>
+          <a:cs typeface="+mn-cs"/>
+        </a:defRPr>
+      </a:lvl8pPr>
+      <a:lvl9pPr marL="2914650" indent="-171450" algn="l" defTabSz="685800" rtl="0" eaLnBrk="1" latinLnBrk="0" hangingPunct="1">
+        <a:spcBef>
+          <a:spcPct val="20000"/>
+        </a:spcBef>
+        <a:buFont typeface="Arial" panose="020B0604020202020204" pitchFamily="34" charset="0"/>
+        <a:buChar char="•"/>
+        <a:defRPr sz="1500" kern="1200">
+          <a:solidFill>
+            <a:schemeClr val="tx1"/>
+          </a:solidFill>
+          <a:latin typeface="+mn-lt"/>
+          <a:ea typeface="+mn-ea"/>
+          <a:cs typeface="+mn-cs"/>
+        </a:defRPr>
+      </a:lvl9pPr>
+    </p:bodyStyle>
+    <p:otherStyle>
+      <a:defPPr>
+        <a:defRPr lang="en-US"/>
+      </a:defPPr>
+      <a:lvl1pPr marL="0" algn="l" defTabSz="685800" rtl="0" eaLnBrk="1" latinLnBrk="0" hangingPunct="1">
+        <a:defRPr sz="1350" kern="1200">
+          <a:solidFill>
+            <a:schemeClr val="tx1"/>
+          </a:solidFill>
+          <a:latin typeface="+mn-lt"/>
+          <a:ea typeface="+mn-ea"/>
+          <a:cs typeface="+mn-cs"/>
+        </a:defRPr>
+      </a:lvl1pPr>
+      <a:lvl2pPr marL="342900" algn="l" defTabSz="685800" rtl="0" eaLnBrk="1" latinLnBrk="0" hangingPunct="1">
+        <a:defRPr sz="1350" kern="1200">
+          <a:solidFill>
+            <a:schemeClr val="tx1"/>
+          </a:solidFill>
+          <a:latin typeface="+mn-lt"/>
+          <a:ea typeface="+mn-ea"/>
+          <a:cs typeface="+mn-cs"/>
+        </a:defRPr>
+      </a:lvl2pPr>
+      <a:lvl3pPr marL="685800" algn="l" defTabSz="685800" rtl="0" eaLnBrk="1" latinLnBrk="0" hangingPunct="1">
+        <a:defRPr sz="1350" kern="1200">
+          <a:solidFill>
+            <a:schemeClr val="tx1"/>
+          </a:solidFill>
+          <a:latin typeface="+mn-lt"/>
+          <a:ea typeface="+mn-ea"/>
+          <a:cs typeface="+mn-cs"/>
+        </a:defRPr>
+      </a:lvl3pPr>
+      <a:lvl4pPr marL="1028700" algn="l" defTabSz="685800" rtl="0" eaLnBrk="1" latinLnBrk="0" hangingPunct="1">
+        <a:defRPr sz="1350" kern="1200">
+          <a:solidFill>
+            <a:schemeClr val="tx1"/>
+          </a:solidFill>
+          <a:latin typeface="+mn-lt"/>
+          <a:ea typeface="+mn-ea"/>
+          <a:cs typeface="+mn-cs"/>
+        </a:defRPr>
+      </a:lvl4pPr>
+      <a:lvl5pPr marL="1371600" algn="l" defTabSz="685800" rtl="0" eaLnBrk="1" latinLnBrk="0" hangingPunct="1">
+        <a:defRPr sz="1350" kern="1200">
+          <a:solidFill>
+            <a:schemeClr val="tx1"/>
+          </a:solidFill>
+          <a:latin typeface="+mn-lt"/>
+          <a:ea typeface="+mn-ea"/>
+          <a:cs typeface="+mn-cs"/>
+        </a:defRPr>
+      </a:lvl5pPr>
+      <a:lvl6pPr marL="1714500" algn="l" defTabSz="685800" rtl="0" eaLnBrk="1" latinLnBrk="0" hangingPunct="1">
+        <a:defRPr sz="1350" kern="1200">
+          <a:solidFill>
+            <a:schemeClr val="tx1"/>
+          </a:solidFill>
+          <a:latin typeface="+mn-lt"/>
+          <a:ea typeface="+mn-ea"/>
+          <a:cs typeface="+mn-cs"/>
+        </a:defRPr>
+      </a:lvl6pPr>
+      <a:lvl7pPr marL="2057400" algn="l" defTabSz="685800" rtl="0" eaLnBrk="1" latinLnBrk="0" hangingPunct="1">
+        <a:defRPr sz="1350" kern="1200">
+          <a:solidFill>
+            <a:schemeClr val="tx1"/>
+          </a:solidFill>
+          <a:latin typeface="+mn-lt"/>
+          <a:ea typeface="+mn-ea"/>
+          <a:cs typeface="+mn-cs"/>
+        </a:defRPr>
+      </a:lvl7pPr>
+      <a:lvl8pPr marL="2400300" algn="l" defTabSz="685800" rtl="0" eaLnBrk="1" latinLnBrk="0" hangingPunct="1">
+        <a:defRPr sz="1350" kern="1200">
+          <a:solidFill>
+            <a:schemeClr val="tx1"/>
+          </a:solidFill>
+          <a:latin typeface="+mn-lt"/>
+          <a:ea typeface="+mn-ea"/>
+          <a:cs typeface="+mn-cs"/>
+        </a:defRPr>
+      </a:lvl8pPr>
+      <a:lvl9pPr marL="2743200" algn="l" defTabSz="685800" rtl="0" eaLnBrk="1" latinLnBrk="0" hangingPunct="1">
+        <a:defRPr sz="1350" kern="1200">
+          <a:solidFill>
+            <a:schemeClr val="tx1"/>
+          </a:solidFill>
+          <a:latin typeface="+mn-lt"/>
+          <a:ea typeface="+mn-ea"/>
+          <a:cs typeface="+mn-cs"/>
+        </a:defRPr>
+      </a:lvl9pPr>
+    </p:otherStyle>
+  </p:txStyles>
+</p:sldMaster>
+</file>
+
 <file path=ppt/slides/slide1.xml><?xml version="1.0" encoding="utf-8"?>
 <p:sld xmlns:a="http://schemas.openxmlformats.org/drawingml/2006/main" xmlns:r="http://schemas.openxmlformats.org/officeDocument/2006/relationships" xmlns:p="http://schemas.openxmlformats.org/presentationml/2006/main" show="0">
   <p:cSld>
@@ -8102,7 +15715,96 @@
       </p:grpSpPr>
       <p:sp>
         <p:nvSpPr>
-          <p:cNvPr id="2" name="Title 1">
+          <p:cNvPr id="2" name="Content Placeholder 2">
+            <a:extLst>
+              <a:ext uri="{FF2B5EF4-FFF2-40B4-BE49-F238E27FC236}">
+                <a16:creationId xmlns:a16="http://schemas.microsoft.com/office/drawing/2014/main" id="{F06207D2-CACC-44E7-87C2-03B2C7DD4303}"/>
+              </a:ext>
+            </a:extLst>
+          </p:cNvPr>
+          <p:cNvSpPr>
+            <a:spLocks noGrp="1"/>
+          </p:cNvSpPr>
+          <p:nvPr>
+            <p:ph idx="1"/>
+          </p:nvPr>
+        </p:nvSpPr>
+        <p:spPr/>
+        <p:txBody>
+          <a:bodyPr vert="horz" lIns="91440" tIns="45720" rIns="91440" bIns="45720" rtlCol="0" anchor="t">
+            <a:normAutofit/>
+          </a:bodyPr>
+          <a:lstStyle/>
+          <a:p>
+            <a:r>
+              <a:rPr lang="en-US" sz="2200" dirty="0">
+                <a:latin typeface="Segoe Condensed"/>
+              </a:rPr>
+              <a:t>The following slides are not final and are produced solely for the purposes of informing operations. All information in this slide deck should be treated as confidential and provisional, and </a:t>
+            </a:r>
+            <a:r>
+              <a:rPr lang="en-US" sz="2200" b="1" dirty="0">
+                <a:latin typeface="Segoe Condensed"/>
+              </a:rPr>
+              <a:t>should not be shared or used for any outward facing products</a:t>
+            </a:r>
+            <a:r>
+              <a:rPr lang="en-US" sz="2200" dirty="0">
+                <a:latin typeface="Segoe Condensed"/>
+              </a:rPr>
+              <a:t>.</a:t>
+            </a:r>
+          </a:p>
+          <a:p>
+            <a:r>
+              <a:rPr lang="en-US" sz="2200" dirty="0">
+                <a:latin typeface="Segoe Condensed"/>
+              </a:rPr>
+              <a:t>Caution must be taken when interpreting all data presented. Differences between information products published by WHO, national public health authorities, and other sources using different inclusion criteria and different data cut-off times are to be expected. While steps are taken to ensure accuracy and reliability, all data are subject to continuous verification and change. Counts are subject to variations in case detection, definitions, laboratory testing, and reporting strategies and capacities between countries, states and territories.​</a:t>
+            </a:r>
+          </a:p>
+          <a:p>
+            <a:r>
+              <a:rPr lang="en-GB" sz="2200" dirty="0">
+                <a:latin typeface="Segoe Condensed"/>
+              </a:rPr>
+              <a:t>The signals and/or events presented here may not be recorded in EMS or on the emergency dashboard.</a:t>
+            </a:r>
+          </a:p>
+        </p:txBody>
+      </p:sp>
+      <p:sp>
+        <p:nvSpPr>
+          <p:cNvPr id="3" name="Slide Number Placeholder 3">
+            <a:extLst>
+              <a:ext uri="{FF2B5EF4-FFF2-40B4-BE49-F238E27FC236}">
+                <a16:creationId xmlns:a16="http://schemas.microsoft.com/office/drawing/2014/main" id="{7BE90D03-66B0-4F8A-B8A2-906D47416595}"/>
+              </a:ext>
+            </a:extLst>
+          </p:cNvPr>
+          <p:cNvSpPr>
+            <a:spLocks noGrp="1"/>
+          </p:cNvSpPr>
+          <p:nvPr>
+            <p:ph type="sldNum" sz="quarter" idx="12"/>
+          </p:nvPr>
+        </p:nvSpPr>
+        <p:spPr/>
+        <p:txBody>
+          <a:bodyPr/>
+          <a:lstStyle/>
+          <a:p>
+            <a:fld id="{C5EF2332-01BF-834F-8236-50238282D533}" type="slidenum">
+              <a:rPr lang="en-US" smtClean="0"/>
+              <a:t>1</a:t>
+            </a:fld>
+            <a:endParaRPr lang="en-US"/>
+          </a:p>
+        </p:txBody>
+      </p:sp>
+      <p:sp>
+        <p:nvSpPr>
+          <p:cNvPr id="4" name="Title 1">
             <a:extLst>
               <a:ext uri="{FF2B5EF4-FFF2-40B4-BE49-F238E27FC236}">
                 <a16:creationId xmlns:a16="http://schemas.microsoft.com/office/drawing/2014/main" id="{3AB0EFD9-403D-42E6-B2FE-352751760579}"/>
@@ -8126,100 +15828,6 @@
               <a:t>Preface</a:t>
             </a:r>
             <a:endParaRPr lang="en-US" dirty="0"/>
-          </a:p>
-        </p:txBody>
-      </p:sp>
-      <p:sp>
-        <p:nvSpPr>
-          <p:cNvPr id="3" name="Content Placeholder 2">
-            <a:extLst>
-              <a:ext uri="{FF2B5EF4-FFF2-40B4-BE49-F238E27FC236}">
-                <a16:creationId xmlns:a16="http://schemas.microsoft.com/office/drawing/2014/main" id="{F06207D2-CACC-44E7-87C2-03B2C7DD4303}"/>
-              </a:ext>
-            </a:extLst>
-          </p:cNvPr>
-          <p:cNvSpPr>
-            <a:spLocks noGrp="1"/>
-          </p:cNvSpPr>
-          <p:nvPr>
-            <p:ph idx="1"/>
-          </p:nvPr>
-        </p:nvSpPr>
-        <p:spPr>
-          <a:xfrm>
-            <a:off x="609600" y="1384543"/>
-            <a:ext cx="10972800" cy="4525963"/>
-          </a:xfrm>
-        </p:spPr>
-        <p:txBody>
-          <a:bodyPr vert="horz" lIns="91440" tIns="45720" rIns="91440" bIns="45720" rtlCol="0" anchor="t">
-            <a:normAutofit/>
-          </a:bodyPr>
-          <a:lstStyle/>
-          <a:p>
-            <a:r>
-              <a:rPr lang="en-US" sz="2200" dirty="0">
-                <a:latin typeface="Segoe Condensed"/>
-              </a:rPr>
-              <a:t>The following slides are not final and are produced solely for the purposes of informing operations. All information in this slide deck should be treated as confidential and provisional, and </a:t>
-            </a:r>
-            <a:r>
-              <a:rPr lang="en-US" sz="2200" b="1" dirty="0">
-                <a:latin typeface="Segoe Condensed"/>
-              </a:rPr>
-              <a:t>should not be shared or used for any outward facing products</a:t>
-            </a:r>
-            <a:r>
-              <a:rPr lang="en-US" sz="2200" dirty="0">
-                <a:latin typeface="Segoe Condensed"/>
-              </a:rPr>
-              <a:t>.</a:t>
-            </a:r>
-          </a:p>
-          <a:p>
-            <a:r>
-              <a:rPr lang="en-US" sz="2200" dirty="0">
-                <a:latin typeface="Segoe Condensed"/>
-              </a:rPr>
-              <a:t>Caution must be taken when interpreting all data presented. Differences between information products published by WHO, national public health authorities, and other sources using different inclusion criteria and different data cut-off times are to be expected. While steps are taken to ensure accuracy and reliability, all data are subject to continuous verification and change. Counts are subject to variations in case detection, definitions, laboratory testing, and reporting strategies and capacities between countries, states and territories.​</a:t>
-            </a:r>
-          </a:p>
-          <a:p>
-            <a:r>
-              <a:rPr lang="en-GB" sz="2200" dirty="0">
-                <a:latin typeface="Segoe Condensed"/>
-              </a:rPr>
-              <a:t>The signals and/or events presented here may not be recorded in EMS or on the emergency dashboard.</a:t>
-            </a:r>
-          </a:p>
-        </p:txBody>
-      </p:sp>
-      <p:sp>
-        <p:nvSpPr>
-          <p:cNvPr id="4" name="Slide Number Placeholder 3">
-            <a:extLst>
-              <a:ext uri="{FF2B5EF4-FFF2-40B4-BE49-F238E27FC236}">
-                <a16:creationId xmlns:a16="http://schemas.microsoft.com/office/drawing/2014/main" id="{7BE90D03-66B0-4F8A-B8A2-906D47416595}"/>
-              </a:ext>
-            </a:extLst>
-          </p:cNvPr>
-          <p:cNvSpPr>
-            <a:spLocks noGrp="1"/>
-          </p:cNvSpPr>
-          <p:nvPr>
-            <p:ph type="sldNum" sz="quarter" idx="12"/>
-          </p:nvPr>
-        </p:nvSpPr>
-        <p:spPr/>
-        <p:txBody>
-          <a:bodyPr/>
-          <a:lstStyle/>
-          <a:p>
-            <a:fld id="{C5EF2332-01BF-834F-8236-50238282D533}" type="slidenum">
-              <a:rPr lang="en-US" smtClean="0"/>
-              <a:t>1</a:t>
-            </a:fld>
-            <a:endParaRPr lang="en-US"/>
           </a:p>
         </p:txBody>
       </p:sp>
@@ -8253,42 +15861,9 @@
           <a:chExt cx="0" cy="0"/>
         </a:xfrm>
       </p:grpSpPr>
-      <p:sp>
-        <p:nvSpPr>
-          <p:cNvPr id="2" name="Title 1">
-            <a:extLst>
-              <a:ext uri="{FF2B5EF4-FFF2-40B4-BE49-F238E27FC236}">
-                <a16:creationId xmlns:a16="http://schemas.microsoft.com/office/drawing/2014/main" id="{B6CC0878-C8E5-4FF4-B70A-5717E35795E8}"/>
-              </a:ext>
-            </a:extLst>
-          </p:cNvPr>
-          <p:cNvSpPr>
-            <a:spLocks noGrp="1"/>
-          </p:cNvSpPr>
-          <p:nvPr>
-            <p:ph type="title"/>
-          </p:nvPr>
-        </p:nvSpPr>
-        <p:spPr/>
-        <p:txBody>
-          <a:bodyPr>
-            <a:normAutofit/>
-          </a:bodyPr>
-          <a:lstStyle/>
-          <a:p>
-            <a:r>
-              <a:rPr lang="en-GB" sz="2800">
-                <a:latin typeface="Segoe Condensed"/>
-              </a:rPr>
-              <a:t>Detection, verification, risk assessment, communication and response process</a:t>
-            </a:r>
-            <a:endParaRPr lang="en-US" sz="2800"/>
-          </a:p>
-        </p:txBody>
-      </p:sp>
       <p:pic>
         <p:nvPicPr>
-          <p:cNvPr id="3" name="Content Placeholder 7">
+          <p:cNvPr id="2" name="Content Placeholder 7">
             <a:extLst>
               <a:ext uri="{FF2B5EF4-FFF2-40B4-BE49-F238E27FC236}">
                 <a16:creationId xmlns:a16="http://schemas.microsoft.com/office/drawing/2014/main" id="{033D863D-6444-4ECB-AE0C-42B92516DC34}"/>
@@ -8310,14 +15885,14 @@
         </p:blipFill>
         <p:spPr>
           <a:xfrm>
-            <a:off x="2964196" y="1422107"/>
+            <a:off x="2775660" y="1600200"/>
             <a:ext cx="6640679" cy="4525963"/>
           </a:xfrm>
         </p:spPr>
       </p:pic>
       <p:sp>
         <p:nvSpPr>
-          <p:cNvPr id="4" name="Slide Number Placeholder 8">
+          <p:cNvPr id="3" name="Slide Number Placeholder 8">
             <a:extLst>
               <a:ext uri="{FF2B5EF4-FFF2-40B4-BE49-F238E27FC236}">
                 <a16:creationId xmlns:a16="http://schemas.microsoft.com/office/drawing/2014/main" id="{3F415774-0DEE-48C3-BFB1-708BC8B200DA}"/>
@@ -8341,6 +15916,39 @@
               <a:t>2</a:t>
             </a:fld>
             <a:endParaRPr lang="en-US"/>
+          </a:p>
+        </p:txBody>
+      </p:sp>
+      <p:sp>
+        <p:nvSpPr>
+          <p:cNvPr id="4" name="Title 1">
+            <a:extLst>
+              <a:ext uri="{FF2B5EF4-FFF2-40B4-BE49-F238E27FC236}">
+                <a16:creationId xmlns:a16="http://schemas.microsoft.com/office/drawing/2014/main" id="{B6CC0878-C8E5-4FF4-B70A-5717E35795E8}"/>
+              </a:ext>
+            </a:extLst>
+          </p:cNvPr>
+          <p:cNvSpPr>
+            <a:spLocks noGrp="1"/>
+          </p:cNvSpPr>
+          <p:nvPr>
+            <p:ph type="title"/>
+          </p:nvPr>
+        </p:nvSpPr>
+        <p:spPr/>
+        <p:txBody>
+          <a:bodyPr>
+            <a:normAutofit/>
+          </a:bodyPr>
+          <a:lstStyle/>
+          <a:p>
+            <a:r>
+              <a:rPr lang="en-GB" sz="2800">
+                <a:latin typeface="Segoe Condensed"/>
+              </a:rPr>
+              <a:t>Detection, verification, risk assessment, communication and response process</a:t>
+            </a:r>
+            <a:endParaRPr lang="en-US" sz="2800"/>
           </a:p>
         </p:txBody>
       </p:sp>
@@ -8376,7 +15984,7 @@
       </p:grpSpPr>
       <p:sp>
         <p:nvSpPr>
-          <p:cNvPr id="3" name="Slide Number Placeholder 2">
+          <p:cNvPr id="2" name="Slide Number Placeholder 2">
             <a:extLst>
               <a:ext uri="{FF2B5EF4-FFF2-40B4-BE49-F238E27FC236}">
                 <a16:creationId xmlns:a16="http://schemas.microsoft.com/office/drawing/2014/main" id="{F8B747CF-767E-769E-2FCC-1D4A38EDAF1A}"/>
@@ -8405,7 +16013,7 @@
       </p:sp>
       <p:sp>
         <p:nvSpPr>
-          <p:cNvPr id="4" name="Title 3">
+          <p:cNvPr id="3" name="Title 3">
             <a:extLst>
               <a:ext uri="{FF2B5EF4-FFF2-40B4-BE49-F238E27FC236}">
                 <a16:creationId xmlns:a16="http://schemas.microsoft.com/office/drawing/2014/main" id="{240AD5C5-3083-97FD-51A2-1B385ED982F3}"/>
@@ -8436,7 +16044,7 @@
       </p:sp>
       <p:pic>
         <p:nvPicPr>
-          <p:cNvPr id="9" name="Picture 8">
+          <p:cNvPr id="4" name="Picture 8">
             <a:extLst>
               <a:ext uri="{FF2B5EF4-FFF2-40B4-BE49-F238E27FC236}">
                 <a16:creationId xmlns:a16="http://schemas.microsoft.com/office/drawing/2014/main" id="{025C2684-9F35-22C8-3475-F6D862DD31B9}"/>
@@ -8466,7 +16074,7 @@
       </p:pic>
       <p:pic>
         <p:nvPicPr>
-          <p:cNvPr id="11" name="Picture 10">
+          <p:cNvPr id="5" name="Picture 10">
             <a:extLst>
               <a:ext uri="{FF2B5EF4-FFF2-40B4-BE49-F238E27FC236}">
                 <a16:creationId xmlns:a16="http://schemas.microsoft.com/office/drawing/2014/main" id="{12874C9A-456C-FAB3-6232-572029F8215A}"/>
@@ -8512,7 +16120,13 @@
   <p:cSld>
     <p:spTree>
       <p:nvGrpSpPr>
-        <p:cNvPr id="1" name=""/>
+        <p:cNvPr id="1" name="">
+          <a:extLst>
+            <a:ext uri="{FF2B5EF4-FFF2-40B4-BE49-F238E27FC236}">
+              <a16:creationId xmlns:a16="http://schemas.microsoft.com/office/drawing/2014/main" id="{0CD2EDE8-393F-E898-1E71-EBFBC49A954A}"/>
+            </a:ext>
+          </a:extLst>
+        </p:cNvPr>
         <p:cNvGrpSpPr/>
         <p:nvPr/>
       </p:nvGrpSpPr>
@@ -8529,7 +16143,7 @@
           <p:cNvPr id="2" name="Text Placeholder 7">
             <a:extLst>
               <a:ext uri="{FF2B5EF4-FFF2-40B4-BE49-F238E27FC236}">
-                <a16:creationId xmlns:a16="http://schemas.microsoft.com/office/drawing/2014/main" id="{916DA2E9-D0E8-42E6-4581-F0457AD49AAA}"/>
+                <a16:creationId xmlns:a16="http://schemas.microsoft.com/office/drawing/2014/main" id="{5834A62E-09B5-7CA3-9B7D-FF50327FAF57}"/>
               </a:ext>
             </a:extLst>
           </p:cNvPr>
@@ -8542,8 +16156,8 @@
         </p:nvSpPr>
         <p:spPr>
           <a:xfrm>
-            <a:off x="465221" y="1160650"/>
-            <a:ext cx="9292389" cy="639762"/>
+            <a:off x="609600" y="1499255"/>
+            <a:ext cx="9502588" cy="417557"/>
           </a:xfrm>
         </p:spPr>
         <p:txBody>
@@ -8565,7 +16179,7 @@
           <p:cNvPr id="3" name="Content Placeholder 1">
             <a:extLst>
               <a:ext uri="{FF2B5EF4-FFF2-40B4-BE49-F238E27FC236}">
-                <a16:creationId xmlns:a16="http://schemas.microsoft.com/office/drawing/2014/main" id="{061F52C1-FD5B-2850-943B-B60A4F5EDF69}"/>
+                <a16:creationId xmlns:a16="http://schemas.microsoft.com/office/drawing/2014/main" id="{1F721F75-C571-E837-B127-C017C51CFC2D}"/>
               </a:ext>
             </a:extLst>
           </p:cNvPr>
@@ -8578,8 +16192,8 @@
         </p:nvSpPr>
         <p:spPr>
           <a:xfrm>
-            <a:off x="609599" y="1847830"/>
-            <a:ext cx="10724147" cy="2336967"/>
+            <a:off x="609600" y="1922228"/>
+            <a:ext cx="10972802" cy="3951288"/>
           </a:xfrm>
         </p:spPr>
         <p:txBody>
@@ -8813,10 +16427,46 @@
       </p:sp>
       <p:sp>
         <p:nvSpPr>
-          <p:cNvPr id="4" name="Slide Number Placeholder 3">
+          <p:cNvPr id="4" name="Text Placeholder 8">
             <a:extLst>
               <a:ext uri="{FF2B5EF4-FFF2-40B4-BE49-F238E27FC236}">
-                <a16:creationId xmlns:a16="http://schemas.microsoft.com/office/drawing/2014/main" id="{740A8240-DC3F-10BB-22C9-CBE9DE4B7667}"/>
+                <a16:creationId xmlns:a16="http://schemas.microsoft.com/office/drawing/2014/main" id="{4752E828-782F-A11A-0887-256BEA188C6F}"/>
+              </a:ext>
+            </a:extLst>
+          </p:cNvPr>
+          <p:cNvSpPr>
+            <a:spLocks noGrp="1"/>
+          </p:cNvSpPr>
+          <p:nvPr>
+            <p:ph type="body" sz="quarter" idx="3"/>
+          </p:nvPr>
+        </p:nvSpPr>
+        <p:spPr>
+          <a:xfrm>
+            <a:off x="609600" y="4261302"/>
+            <a:ext cx="5389033" cy="639762"/>
+          </a:xfrm>
+        </p:spPr>
+        <p:txBody>
+          <a:bodyPr/>
+          <a:lstStyle/>
+          <a:p>
+            <a:r>
+              <a:rPr lang="en-US" dirty="0"/>
+              <a:t>From signal to event</a:t>
+            </a:r>
+          </a:p>
+          <a:p>
+            <a:endParaRPr lang="en-US" dirty="0"/>
+          </a:p>
+        </p:txBody>
+      </p:sp>
+      <p:sp>
+        <p:nvSpPr>
+          <p:cNvPr id="5" name="Slide Number Placeholder 3">
+            <a:extLst>
+              <a:ext uri="{FF2B5EF4-FFF2-40B4-BE49-F238E27FC236}">
+                <a16:creationId xmlns:a16="http://schemas.microsoft.com/office/drawing/2014/main" id="{DCF76CDD-C428-42CD-4E84-A64654483DE2}"/>
               </a:ext>
             </a:extLst>
           </p:cNvPr>
@@ -8842,10 +16492,10 @@
       </p:sp>
       <p:sp>
         <p:nvSpPr>
-          <p:cNvPr id="5" name="Title 1">
+          <p:cNvPr id="6" name="Title 1">
             <a:extLst>
               <a:ext uri="{FF2B5EF4-FFF2-40B4-BE49-F238E27FC236}">
-                <a16:creationId xmlns:a16="http://schemas.microsoft.com/office/drawing/2014/main" id="{153D010C-65ED-9E94-1600-75351F868F59}"/>
+                <a16:creationId xmlns:a16="http://schemas.microsoft.com/office/drawing/2014/main" id="{D6CDED18-B446-CC6D-D620-2CB95B177C66}"/>
               </a:ext>
             </a:extLst>
           </p:cNvPr>
@@ -8856,58 +16506,17 @@
             <p:ph type="title"/>
           </p:nvPr>
         </p:nvSpPr>
-        <p:spPr>
-          <a:xfrm>
-            <a:off x="609600" y="161925"/>
-            <a:ext cx="10972800" cy="1143000"/>
-          </a:xfrm>
-        </p:spPr>
+        <p:spPr/>
         <p:txBody>
           <a:bodyPr/>
           <a:lstStyle/>
           <a:p>
             <a:r>
-              <a:rPr lang="en-GB">
+              <a:rPr lang="en-GB" dirty="0">
                 <a:latin typeface="Segoe Condensed"/>
               </a:rPr>
               <a:t>Detection and Verification Process</a:t>
             </a:r>
-            <a:endParaRPr lang="en-US"/>
-          </a:p>
-        </p:txBody>
-      </p:sp>
-      <p:sp>
-        <p:nvSpPr>
-          <p:cNvPr id="6" name="Text Placeholder 8">
-            <a:extLst>
-              <a:ext uri="{FF2B5EF4-FFF2-40B4-BE49-F238E27FC236}">
-                <a16:creationId xmlns:a16="http://schemas.microsoft.com/office/drawing/2014/main" id="{D48BF65A-D79D-C586-BFA2-B2F7F3B6B5BF}"/>
-              </a:ext>
-            </a:extLst>
-          </p:cNvPr>
-          <p:cNvSpPr>
-            <a:spLocks noGrp="1"/>
-          </p:cNvSpPr>
-          <p:nvPr>
-            <p:ph type="body" sz="quarter" idx="3"/>
-          </p:nvPr>
-        </p:nvSpPr>
-        <p:spPr>
-          <a:xfrm>
-            <a:off x="465221" y="4184797"/>
-            <a:ext cx="10724147" cy="639762"/>
-          </a:xfrm>
-        </p:spPr>
-        <p:txBody>
-          <a:bodyPr/>
-          <a:lstStyle/>
-          <a:p>
-            <a:r>
-              <a:rPr lang="en-US" dirty="0"/>
-              <a:t>From signal to event</a:t>
-            </a:r>
-          </a:p>
-          <a:p>
             <a:endParaRPr lang="en-US" dirty="0"/>
           </a:p>
         </p:txBody>
@@ -8917,7 +16526,7 @@
           <p:cNvPr id="7" name="TextBox 13">
             <a:extLst>
               <a:ext uri="{FF2B5EF4-FFF2-40B4-BE49-F238E27FC236}">
-                <a16:creationId xmlns:a16="http://schemas.microsoft.com/office/drawing/2014/main" id="{507A8C82-5ED0-B3F1-A88B-D982D84E74C9}"/>
+                <a16:creationId xmlns:a16="http://schemas.microsoft.com/office/drawing/2014/main" id="{F1E71ACF-DD33-96CB-9DCE-3429307D6ACD}"/>
               </a:ext>
             </a:extLst>
           </p:cNvPr>
@@ -8926,7 +16535,7 @@
         </p:nvSpPr>
         <p:spPr>
           <a:xfrm>
-            <a:off x="609599" y="4504678"/>
+            <a:off x="609599" y="4622695"/>
             <a:ext cx="10972800" cy="1400383"/>
           </a:xfrm>
           <a:prstGeom prst="rect">
@@ -9013,7 +16622,7 @@
     </p:spTree>
     <p:extLst>
       <p:ext uri="{BB962C8B-B14F-4D97-AF65-F5344CB8AC3E}">
-        <p14:creationId xmlns:p14="http://schemas.microsoft.com/office/powerpoint/2010/main" val="2172501289"/>
+        <p14:creationId xmlns:p14="http://schemas.microsoft.com/office/powerpoint/2010/main" val="773111375"/>
       </p:ext>
     </p:extLst>
   </p:cSld>
@@ -9053,15 +16662,10 @@
             <a:spLocks noGrp="1"/>
           </p:cNvSpPr>
           <p:nvPr>
-            <p:ph sz="half" idx="2"/>
-          </p:nvPr>
-        </p:nvSpPr>
-        <p:spPr>
-          <a:xfrm>
-            <a:off x="512905" y="1304925"/>
-            <a:ext cx="11069495" cy="3951288"/>
-          </a:xfrm>
-        </p:spPr>
+            <p:ph type="body" orient="vert" idx="1"/>
+          </p:nvPr>
+        </p:nvSpPr>
+        <p:spPr/>
         <p:txBody>
           <a:bodyPr vert="horz" lIns="91440" tIns="45720" rIns="91440" bIns="45720" rtlCol="0" anchor="t">
             <a:noAutofit/>
@@ -9185,10 +16789,11 @@
             <a:pPr marL="371475" indent="-285750" algn="just">
               <a:defRPr/>
             </a:pPr>
-            <a:endParaRPr lang="en-US" dirty="0">
+            <a:endParaRPr lang="en-US" sz="1700" dirty="0">
               <a:solidFill>
-                <a:srgbClr val="FF0000"/>
+                <a:prstClr val="black"/>
               </a:solidFill>
+              <a:latin typeface="Segoe Condensed"/>
             </a:endParaRPr>
           </a:p>
           <a:p>
@@ -9196,40 +16801,28 @@
               <a:defRPr/>
             </a:pPr>
             <a:r>
-              <a:rPr lang="en-US" dirty="0">
+              <a:rPr lang="en-US" sz="1700" dirty="0">
                 <a:solidFill>
-                  <a:schemeClr val="tx1"/>
+                  <a:prstClr val="black"/>
                 </a:solidFill>
+                <a:latin typeface="Segoe Condensed"/>
               </a:rPr>
               <a:t>Signal: </a:t>
             </a:r>
             <a:r>
-              <a:rPr lang="en-US" b="0" dirty="0">
+              <a:rPr lang="en-US" sz="1700" b="0" dirty="0">
                 <a:solidFill>
-                  <a:schemeClr val="tx1"/>
+                  <a:prstClr val="black"/>
                 </a:solidFill>
+                <a:latin typeface="Segoe Condensed"/>
               </a:rPr>
-              <a:t>is d</a:t>
-            </a:r>
-            <a:r>
-              <a:rPr lang="en-US" sz="1800" b="0" i="0" dirty="0">
-                <a:solidFill>
-                  <a:schemeClr val="tx1"/>
-                </a:solidFill>
-                <a:effectLst/>
-              </a:rPr>
-              <a:t>ata and/or information detected that has been triangulated, assessed, triaged, and categorized using a multidisciplinary and PHI-specific lens, and determined to represent a potential acute risk to human health, encompassing all-hazard considerations. Signals may consist of reports of cases or deaths (individual or aggregated), potential exposure of human beings to biological, chemical or radiological and nuclear hazards, or the occurrence of natural or human-made disasters. Signals can be detected from a variety of sources and through a range of approaches. </a:t>
-            </a:r>
-            <a:endParaRPr lang="en-GB" sz="1700" b="0" i="0" u="none" strike="noStrike" kern="1200" cap="none" spc="0" normalizeH="0" baseline="0" noProof="0" dirty="0">
-              <a:ln>
-                <a:noFill/>
-              </a:ln>
+              <a:t>is data and/or information detected that has been triangulated, assessed, triaged, and categorized using a multidisciplinary and PHI-specific lens, and determined to represent a potential acute risk to human health, encompassing all-hazard considerations. Signals may consist of reports of cases or deaths (individual or aggregated), potential exposure of human beings to biological, chemical or radiological and nuclear hazards, or the occurrence of natural or human-made disasters. Signals can be detected from a variety of sources and through a range of approaches. </a:t>
+            </a:r>
+            <a:endParaRPr lang="en-GB" sz="1700" b="0" dirty="0">
               <a:solidFill>
-                <a:schemeClr val="tx1"/>
+                <a:prstClr val="black"/>
               </a:solidFill>
-              <a:effectLst/>
-              <a:uLnTx/>
-              <a:uFillTx/>
+              <a:latin typeface="Segoe Condensed"/>
             </a:endParaRPr>
           </a:p>
           <a:p>
@@ -9285,12 +16878,7 @@
             <p:ph type="title"/>
           </p:nvPr>
         </p:nvSpPr>
-        <p:spPr>
-          <a:xfrm>
-            <a:off x="609600" y="161925"/>
-            <a:ext cx="10972800" cy="1143000"/>
-          </a:xfrm>
-        </p:spPr>
+        <p:spPr/>
         <p:txBody>
           <a:bodyPr/>
           <a:lstStyle/>
@@ -9309,6 +16897,378 @@
     <p:extLst>
       <p:ext uri="{BB962C8B-B14F-4D97-AF65-F5344CB8AC3E}">
         <p14:creationId xmlns:p14="http://schemas.microsoft.com/office/powerpoint/2010/main" val="1733617640"/>
+      </p:ext>
+    </p:extLst>
+  </p:cSld>
+  <p:clrMapOvr>
+    <a:masterClrMapping/>
+  </p:clrMapOvr>
+</p:sld>
+</file>
+
+<file path=ppt/slides/slide6.xml><?xml version="1.0" encoding="utf-8"?>
+<p:sld xmlns:a="http://schemas.openxmlformats.org/drawingml/2006/main" xmlns:r="http://schemas.openxmlformats.org/officeDocument/2006/relationships" xmlns:p="http://schemas.openxmlformats.org/presentationml/2006/main" show="0">
+  <p:cSld>
+    <p:spTree>
+      <p:nvGrpSpPr>
+        <p:cNvPr id="1" name=""/>
+        <p:cNvGrpSpPr/>
+        <p:nvPr/>
+      </p:nvGrpSpPr>
+      <p:grpSpPr>
+        <a:xfrm>
+          <a:off x="0" y="0"/>
+          <a:ext cx="0" cy="0"/>
+          <a:chOff x="0" y="0"/>
+          <a:chExt cx="0" cy="0"/>
+        </a:xfrm>
+      </p:grpSpPr>
+      <p:sp>
+        <p:nvSpPr>
+          <p:cNvPr id="2" name="Content Placeholder 2">
+            <a:extLst>
+              <a:ext uri="{FF2B5EF4-FFF2-40B4-BE49-F238E27FC236}">
+                <a16:creationId xmlns:a16="http://schemas.microsoft.com/office/drawing/2014/main" id="{F06207D2-CACC-44E7-87C2-03B2C7DD4303}"/>
+              </a:ext>
+            </a:extLst>
+          </p:cNvPr>
+          <p:cNvSpPr>
+            <a:spLocks noGrp="1"/>
+          </p:cNvSpPr>
+          <p:nvPr>
+            <p:ph idx="1"/>
+          </p:nvPr>
+        </p:nvSpPr>
+        <p:spPr>
+          <a:xfrm>
+            <a:off x="609600" y="1411254"/>
+            <a:ext cx="10972800" cy="4726310"/>
+          </a:xfrm>
+        </p:spPr>
+        <p:txBody>
+          <a:bodyPr vert="horz" lIns="91440" tIns="45720" rIns="91440" bIns="45720" rtlCol="0" anchor="t">
+            <a:normAutofit fontScale="85000" lnSpcReduction="20000"/>
+          </a:bodyPr>
+          <a:lstStyle/>
+          <a:p>
+            <a:pPr>
+              <a:lnSpc>
+                <a:spcPct val="110000"/>
+              </a:lnSpc>
+            </a:pPr>
+            <a:r>
+              <a:rPr lang="en-US" sz="2000" u="sng" dirty="0">
+                <a:solidFill>
+                  <a:srgbClr val="000000"/>
+                </a:solidFill>
+              </a:rPr>
+              <a:t>Verification</a:t>
+            </a:r>
+            <a:r>
+              <a:rPr lang="en-US" sz="2000" dirty="0">
+                <a:solidFill>
+                  <a:srgbClr val="000000"/>
+                </a:solidFill>
+              </a:rPr>
+              <a:t>: a signal triaged for verification requires additional information for the purpose of verification from the IHR NFP via the respective RO. </a:t>
+            </a:r>
+          </a:p>
+          <a:p>
+            <a:pPr>
+              <a:lnSpc>
+                <a:spcPct val="110000"/>
+              </a:lnSpc>
+            </a:pPr>
+            <a:r>
+              <a:rPr lang="en-US" sz="2000" u="sng" dirty="0">
+                <a:solidFill>
+                  <a:srgbClr val="000000"/>
+                </a:solidFill>
+              </a:rPr>
+              <a:t>Request for information (RFI):</a:t>
+            </a:r>
+            <a:r>
+              <a:rPr lang="en-US" sz="2000" dirty="0">
+                <a:solidFill>
+                  <a:srgbClr val="000000"/>
+                </a:solidFill>
+              </a:rPr>
+              <a:t> a signal triaged for RFI requires additional information for risk assessment. This information may be required from the respective RO, TT or relevant partners (e.g., GLEWS+, UNICEF, GOARN).</a:t>
+            </a:r>
+            <a:endParaRPr lang="en-US" sz="2000" u="sng" dirty="0"/>
+          </a:p>
+          <a:p>
+            <a:pPr>
+              <a:lnSpc>
+                <a:spcPct val="110000"/>
+              </a:lnSpc>
+            </a:pPr>
+            <a:r>
+              <a:rPr lang="en-US" sz="2000" u="sng" dirty="0">
+                <a:solidFill>
+                  <a:srgbClr val="000000"/>
+                </a:solidFill>
+              </a:rPr>
+              <a:t>Real-time monitoring (RTM)</a:t>
+            </a:r>
+            <a:r>
+              <a:rPr lang="en-US" sz="2000" dirty="0">
+                <a:solidFill>
+                  <a:srgbClr val="000000"/>
+                </a:solidFill>
+              </a:rPr>
+              <a:t>: a potential-signal triaged for RTM is shared with the hazard focal points within PHI unit and the hazard focal points will reassess status at least weekly based on targeted search.</a:t>
+            </a:r>
+            <a:endParaRPr lang="en-US" sz="2000" strike="sngStrike" dirty="0">
+              <a:cs typeface="Calibri"/>
+            </a:endParaRPr>
+          </a:p>
+          <a:p>
+            <a:pPr>
+              <a:lnSpc>
+                <a:spcPct val="110000"/>
+              </a:lnSpc>
+            </a:pPr>
+            <a:r>
+              <a:rPr lang="en-US" sz="2000" u="sng" dirty="0">
+                <a:solidFill>
+                  <a:srgbClr val="000000"/>
+                </a:solidFill>
+              </a:rPr>
+              <a:t>Shared for awareness (SFA)</a:t>
+            </a:r>
+            <a:r>
+              <a:rPr lang="en-US" sz="2000" dirty="0">
+                <a:solidFill>
+                  <a:srgbClr val="000000"/>
+                </a:solidFill>
+              </a:rPr>
+              <a:t>: a signal triaged for SFA is shared with TT, RO, and/or relevant partners and requires no further action for HQ PHI – examples include the sharing of information about substandard or falsified medicines with the rapid alert team or sharing of information about a signal affecting children with UNICEF. This may also include an IHR notification received via the RO that is then shared onward for TT awareness.</a:t>
+            </a:r>
+          </a:p>
+          <a:p>
+            <a:pPr>
+              <a:lnSpc>
+                <a:spcPct val="110000"/>
+              </a:lnSpc>
+            </a:pPr>
+            <a:r>
+              <a:rPr lang="en-US" sz="2000" u="sng" dirty="0">
+                <a:solidFill>
+                  <a:srgbClr val="000000"/>
+                </a:solidFill>
+                <a:latin typeface="Segoe Condensed"/>
+                <a:cs typeface="Calibri"/>
+              </a:rPr>
+              <a:t>Monitored elsewhere (ROs, WCOs, MS, partners) – No HQ PHI escalation needed currently (MENE</a:t>
+            </a:r>
+            <a:r>
+              <a:rPr lang="en-US" sz="2000" dirty="0">
+                <a:solidFill>
+                  <a:srgbClr val="000000"/>
+                </a:solidFill>
+                <a:latin typeface="Segoe Condensed"/>
+                <a:cs typeface="Calibri"/>
+              </a:rPr>
+              <a:t>): </a:t>
+            </a:r>
+            <a:r>
+              <a:rPr lang="en-US" sz="2000" dirty="0">
+                <a:solidFill>
+                  <a:srgbClr val="000000"/>
+                </a:solidFill>
+                <a:latin typeface="Segoe Condensed"/>
+              </a:rPr>
+              <a:t>a signal triaged for MENE is one that does not require any </a:t>
+            </a:r>
+            <a:r>
+              <a:rPr lang="en-US" sz="2100" dirty="0">
+                <a:solidFill>
+                  <a:srgbClr val="000000"/>
+                </a:solidFill>
+                <a:latin typeface="Segoe Condensed"/>
+              </a:rPr>
+              <a:t>monitoring or escalation by HQ PHI, at the time of detection, as the signal is already being monitored closely by the RO, WCO, Member State, partners, HQ technical team, or an IMST</a:t>
+            </a:r>
+            <a:r>
+              <a:rPr lang="en-US" sz="2000" dirty="0">
+                <a:solidFill>
+                  <a:srgbClr val="000000"/>
+                </a:solidFill>
+                <a:latin typeface="Segoe Condensed"/>
+              </a:rPr>
+              <a:t>. </a:t>
+            </a:r>
+            <a:endParaRPr lang="en-US" sz="2000" dirty="0">
+              <a:latin typeface="Segoe Condensed"/>
+              <a:cs typeface="Calibri"/>
+            </a:endParaRPr>
+          </a:p>
+          <a:p>
+            <a:pPr>
+              <a:lnSpc>
+                <a:spcPct val="110000"/>
+              </a:lnSpc>
+            </a:pPr>
+            <a:r>
+              <a:rPr lang="en-US" sz="2000" u="sng" dirty="0">
+                <a:solidFill>
+                  <a:srgbClr val="000000"/>
+                </a:solidFill>
+                <a:latin typeface="Segoe Condensed"/>
+              </a:rPr>
+              <a:t>Discard for HQ PHI (DHQP)</a:t>
+            </a:r>
+            <a:r>
+              <a:rPr lang="en-US" sz="2000" dirty="0">
+                <a:solidFill>
+                  <a:srgbClr val="000000"/>
+                </a:solidFill>
+                <a:latin typeface="Segoe Condensed"/>
+              </a:rPr>
+              <a:t>: </a:t>
+            </a:r>
+            <a:r>
+              <a:rPr lang="en-US" sz="2100" dirty="0">
+                <a:solidFill>
+                  <a:srgbClr val="000000"/>
+                </a:solidFill>
+                <a:latin typeface="Segoe Condensed"/>
+              </a:rPr>
+              <a:t>Signals that are already known through official channels, related to animal health only, clearly irrelevant, erroneous, outdated or negative test results (e.g., translation errors, duplicate reports, old articles) should be discarded. Importantly, discarding a signal related to an ongoing event does not imply that the event itself is discarded—only that the specific signal is not considered pertinent at the time of assessment.</a:t>
+            </a:r>
+          </a:p>
+        </p:txBody>
+      </p:sp>
+      <p:sp>
+        <p:nvSpPr>
+          <p:cNvPr id="3" name="Slide Number Placeholder 3">
+            <a:extLst>
+              <a:ext uri="{FF2B5EF4-FFF2-40B4-BE49-F238E27FC236}">
+                <a16:creationId xmlns:a16="http://schemas.microsoft.com/office/drawing/2014/main" id="{7BE90D03-66B0-4F8A-B8A2-906D47416595}"/>
+              </a:ext>
+            </a:extLst>
+          </p:cNvPr>
+          <p:cNvSpPr>
+            <a:spLocks noGrp="1"/>
+          </p:cNvSpPr>
+          <p:nvPr>
+            <p:ph type="sldNum" sz="quarter" idx="12"/>
+          </p:nvPr>
+        </p:nvSpPr>
+        <p:spPr/>
+        <p:txBody>
+          <a:bodyPr/>
+          <a:lstStyle/>
+          <a:p>
+            <a:pPr marL="0" marR="0" lvl="0" indent="0" algn="r" defTabSz="914400" rtl="0" eaLnBrk="1" fontAlgn="auto" latinLnBrk="0" hangingPunct="1">
+              <a:lnSpc>
+                <a:spcPct val="100000"/>
+              </a:lnSpc>
+              <a:spcBef>
+                <a:spcPts val="0"/>
+              </a:spcBef>
+              <a:spcAft>
+                <a:spcPts val="0"/>
+              </a:spcAft>
+              <a:buClrTx/>
+              <a:buSzTx/>
+              <a:buFontTx/>
+              <a:buNone/>
+              <a:tabLst/>
+              <a:defRPr/>
+            </a:pPr>
+            <a:fld id="{C5EF2332-01BF-834F-8236-50238282D533}" type="slidenum">
+              <a:rPr kumimoji="0" lang="en-US" sz="1800" b="0" i="0" u="none" strike="noStrike" kern="1200" cap="none" spc="0" normalizeH="0" baseline="0" noProof="0" smtClean="0">
+                <a:ln>
+                  <a:noFill/>
+                </a:ln>
+                <a:solidFill>
+                  <a:prstClr val="black">
+                    <a:tint val="75000"/>
+                  </a:prstClr>
+                </a:solidFill>
+                <a:effectLst/>
+                <a:uLnTx/>
+                <a:uFillTx/>
+                <a:latin typeface="Calibri"/>
+                <a:ea typeface="+mn-ea"/>
+                <a:cs typeface="+mn-cs"/>
+              </a:rPr>
+              <a:pPr marL="0" marR="0" lvl="0" indent="0" algn="r" defTabSz="914400" rtl="0" eaLnBrk="1" fontAlgn="auto" latinLnBrk="0" hangingPunct="1">
+                <a:lnSpc>
+                  <a:spcPct val="100000"/>
+                </a:lnSpc>
+                <a:spcBef>
+                  <a:spcPts val="0"/>
+                </a:spcBef>
+                <a:spcAft>
+                  <a:spcPts val="0"/>
+                </a:spcAft>
+                <a:buClrTx/>
+                <a:buSzTx/>
+                <a:buFontTx/>
+                <a:buNone/>
+                <a:tabLst/>
+                <a:defRPr/>
+              </a:pPr>
+              <a:t>6</a:t>
+            </a:fld>
+            <a:endParaRPr kumimoji="0" lang="en-US" sz="1800" b="0" i="0" u="none" strike="noStrike" kern="1200" cap="none" spc="0" normalizeH="0" baseline="0" noProof="0">
+              <a:ln>
+                <a:noFill/>
+              </a:ln>
+              <a:solidFill>
+                <a:prstClr val="black">
+                  <a:tint val="75000"/>
+                </a:prstClr>
+              </a:solidFill>
+              <a:effectLst/>
+              <a:uLnTx/>
+              <a:uFillTx/>
+              <a:latin typeface="Calibri"/>
+              <a:ea typeface="+mn-ea"/>
+              <a:cs typeface="+mn-cs"/>
+            </a:endParaRPr>
+          </a:p>
+        </p:txBody>
+      </p:sp>
+      <p:sp>
+        <p:nvSpPr>
+          <p:cNvPr id="4" name="Title 1">
+            <a:extLst>
+              <a:ext uri="{FF2B5EF4-FFF2-40B4-BE49-F238E27FC236}">
+                <a16:creationId xmlns:a16="http://schemas.microsoft.com/office/drawing/2014/main" id="{3AB0EFD9-403D-42E6-B2FE-352751760579}"/>
+              </a:ext>
+            </a:extLst>
+          </p:cNvPr>
+          <p:cNvSpPr>
+            <a:spLocks noGrp="1"/>
+          </p:cNvSpPr>
+          <p:nvPr>
+            <p:ph type="title"/>
+          </p:nvPr>
+        </p:nvSpPr>
+        <p:spPr/>
+        <p:txBody>
+          <a:bodyPr/>
+          <a:lstStyle/>
+          <a:p>
+            <a:r>
+              <a:rPr lang="en-US" dirty="0">
+                <a:solidFill>
+                  <a:srgbClr val="FFFFFF"/>
+                </a:solidFill>
+              </a:rPr>
+              <a:t>Categorization definitions</a:t>
+            </a:r>
+          </a:p>
+        </p:txBody>
+      </p:sp>
+    </p:spTree>
+    <p:extLst>
+      <p:ext uri="{BB962C8B-B14F-4D97-AF65-F5344CB8AC3E}">
+        <p14:creationId xmlns:p14="http://schemas.microsoft.com/office/powerpoint/2010/main" val="277676615"/>
       </p:ext>
     </p:extLst>
   </p:cSld>
@@ -9345,6 +17305,30 @@
 </file>
 
 <file path=ppt/tags/tag5.xml><?xml version="1.0" encoding="utf-8"?>
+<p:tagLst xmlns:a="http://schemas.openxmlformats.org/drawingml/2006/main" xmlns:r="http://schemas.openxmlformats.org/officeDocument/2006/relationships" xmlns:p="http://schemas.openxmlformats.org/presentationml/2006/main">
+  <p:tag name="ARTICULATE_SLIDE_THUMBNAIL_REFRESH" val="1"/>
+</p:tagLst>
+</file>
+
+<file path=ppt/tags/tag6.xml><?xml version="1.0" encoding="utf-8"?>
+<p:tagLst xmlns:a="http://schemas.openxmlformats.org/drawingml/2006/main" xmlns:r="http://schemas.openxmlformats.org/officeDocument/2006/relationships" xmlns:p="http://schemas.openxmlformats.org/presentationml/2006/main">
+  <p:tag name="ARTICULATE_SLIDE_THUMBNAIL_REFRESH" val="1"/>
+</p:tagLst>
+</file>
+
+<file path=ppt/tags/tag7.xml><?xml version="1.0" encoding="utf-8"?>
+<p:tagLst xmlns:a="http://schemas.openxmlformats.org/drawingml/2006/main" xmlns:r="http://schemas.openxmlformats.org/officeDocument/2006/relationships" xmlns:p="http://schemas.openxmlformats.org/presentationml/2006/main">
+  <p:tag name="ARTICULATE_SLIDE_THUMBNAIL_REFRESH" val="1"/>
+</p:tagLst>
+</file>
+
+<file path=ppt/tags/tag8.xml><?xml version="1.0" encoding="utf-8"?>
+<p:tagLst xmlns:a="http://schemas.openxmlformats.org/drawingml/2006/main" xmlns:r="http://schemas.openxmlformats.org/officeDocument/2006/relationships" xmlns:p="http://schemas.openxmlformats.org/presentationml/2006/main">
+  <p:tag name="ARTICULATE_SLIDE_THUMBNAIL_REFRESH" val="1"/>
+</p:tagLst>
+</file>
+
+<file path=ppt/tags/tag9.xml><?xml version="1.0" encoding="utf-8"?>
 <p:tagLst xmlns:a="http://schemas.openxmlformats.org/drawingml/2006/main" xmlns:r="http://schemas.openxmlformats.org/officeDocument/2006/relationships" xmlns:p="http://schemas.openxmlformats.org/presentationml/2006/main">
   <p:tag name="ARTICULATE_SLIDE_THUMBNAIL_REFRESH" val="1"/>
 </p:tagLst>
@@ -9641,6 +17625,296 @@
 </file>
 
 <file path=ppt/theme/theme2.xml><?xml version="1.0" encoding="utf-8"?>
+<a:theme xmlns:a="http://schemas.openxmlformats.org/drawingml/2006/main" name="1_WHE">
+  <a:themeElements>
+    <a:clrScheme name="Custom 15">
+      <a:dk1>
+        <a:sysClr val="windowText" lastClr="000000"/>
+      </a:dk1>
+      <a:lt1>
+        <a:sysClr val="window" lastClr="FFFFFF"/>
+      </a:lt1>
+      <a:dk2>
+        <a:srgbClr val="1F497D"/>
+      </a:dk2>
+      <a:lt2>
+        <a:srgbClr val="EEECE1"/>
+      </a:lt2>
+      <a:accent1>
+        <a:srgbClr val="4F81BD"/>
+      </a:accent1>
+      <a:accent2>
+        <a:srgbClr val="C0504D"/>
+      </a:accent2>
+      <a:accent3>
+        <a:srgbClr val="9BBB59"/>
+      </a:accent3>
+      <a:accent4>
+        <a:srgbClr val="8064A2"/>
+      </a:accent4>
+      <a:accent5>
+        <a:srgbClr val="4BACC6"/>
+      </a:accent5>
+      <a:accent6>
+        <a:srgbClr val="F79646"/>
+      </a:accent6>
+      <a:hlink>
+        <a:srgbClr val="7F7F7F"/>
+      </a:hlink>
+      <a:folHlink>
+        <a:srgbClr val="800080"/>
+      </a:folHlink>
+    </a:clrScheme>
+    <a:fontScheme name="Office">
+      <a:majorFont>
+        <a:latin typeface="Calibri"/>
+        <a:ea typeface=""/>
+        <a:cs typeface=""/>
+        <a:font script="Jpan" typeface="ＭＳ Ｐゴシック"/>
+        <a:font script="Hang" typeface="맑은 고딕"/>
+        <a:font script="Hans" typeface="宋体"/>
+        <a:font script="Hant" typeface="新細明體"/>
+        <a:font script="Arab" typeface="Times New Roman"/>
+        <a:font script="Hebr" typeface="Times New Roman"/>
+        <a:font script="Thai" typeface="Angsana New"/>
+        <a:font script="Ethi" typeface="Nyala"/>
+        <a:font script="Beng" typeface="Vrinda"/>
+        <a:font script="Gujr" typeface="Shruti"/>
+        <a:font script="Khmr" typeface="MoolBoran"/>
+        <a:font script="Knda" typeface="Tunga"/>
+        <a:font script="Guru" typeface="Raavi"/>
+        <a:font script="Cans" typeface="Euphemia"/>
+        <a:font script="Cher" typeface="Plantagenet Cherokee"/>
+        <a:font script="Yiii" typeface="Microsoft Yi Baiti"/>
+        <a:font script="Tibt" typeface="Microsoft Himalaya"/>
+        <a:font script="Thaa" typeface="MV Boli"/>
+        <a:font script="Deva" typeface="Mangal"/>
+        <a:font script="Telu" typeface="Gautami"/>
+        <a:font script="Taml" typeface="Latha"/>
+        <a:font script="Syrc" typeface="Estrangelo Edessa"/>
+        <a:font script="Orya" typeface="Kalinga"/>
+        <a:font script="Mlym" typeface="Kartika"/>
+        <a:font script="Laoo" typeface="DokChampa"/>
+        <a:font script="Sinh" typeface="Iskoola Pota"/>
+        <a:font script="Mong" typeface="Mongolian Baiti"/>
+        <a:font script="Viet" typeface="Times New Roman"/>
+        <a:font script="Uigh" typeface="Microsoft Uighur"/>
+        <a:font script="Geor" typeface="Sylfaen"/>
+      </a:majorFont>
+      <a:minorFont>
+        <a:latin typeface="Calibri"/>
+        <a:ea typeface=""/>
+        <a:cs typeface=""/>
+        <a:font script="Jpan" typeface="ＭＳ Ｐゴシック"/>
+        <a:font script="Hang" typeface="맑은 고딕"/>
+        <a:font script="Hans" typeface="宋体"/>
+        <a:font script="Hant" typeface="新細明體"/>
+        <a:font script="Arab" typeface="Arial"/>
+        <a:font script="Hebr" typeface="Arial"/>
+        <a:font script="Thai" typeface="Cordia New"/>
+        <a:font script="Ethi" typeface="Nyala"/>
+        <a:font script="Beng" typeface="Vrinda"/>
+        <a:font script="Gujr" typeface="Shruti"/>
+        <a:font script="Khmr" typeface="DaunPenh"/>
+        <a:font script="Knda" typeface="Tunga"/>
+        <a:font script="Guru" typeface="Raavi"/>
+        <a:font script="Cans" typeface="Euphemia"/>
+        <a:font script="Cher" typeface="Plantagenet Cherokee"/>
+        <a:font script="Yiii" typeface="Microsoft Yi Baiti"/>
+        <a:font script="Tibt" typeface="Microsoft Himalaya"/>
+        <a:font script="Thaa" typeface="MV Boli"/>
+        <a:font script="Deva" typeface="Mangal"/>
+        <a:font script="Telu" typeface="Gautami"/>
+        <a:font script="Taml" typeface="Latha"/>
+        <a:font script="Syrc" typeface="Estrangelo Edessa"/>
+        <a:font script="Orya" typeface="Kalinga"/>
+        <a:font script="Mlym" typeface="Kartika"/>
+        <a:font script="Laoo" typeface="DokChampa"/>
+        <a:font script="Sinh" typeface="Iskoola Pota"/>
+        <a:font script="Mong" typeface="Mongolian Baiti"/>
+        <a:font script="Viet" typeface="Arial"/>
+        <a:font script="Uigh" typeface="Microsoft Uighur"/>
+        <a:font script="Geor" typeface="Sylfaen"/>
+      </a:minorFont>
+    </a:fontScheme>
+    <a:fmtScheme name="Office">
+      <a:fillStyleLst>
+        <a:solidFill>
+          <a:schemeClr val="phClr"/>
+        </a:solidFill>
+        <a:gradFill rotWithShape="1">
+          <a:gsLst>
+            <a:gs pos="0">
+              <a:schemeClr val="phClr">
+                <a:tint val="50000"/>
+                <a:satMod val="300000"/>
+              </a:schemeClr>
+            </a:gs>
+            <a:gs pos="35000">
+              <a:schemeClr val="phClr">
+                <a:tint val="37000"/>
+                <a:satMod val="300000"/>
+              </a:schemeClr>
+            </a:gs>
+            <a:gs pos="100000">
+              <a:schemeClr val="phClr">
+                <a:tint val="15000"/>
+                <a:satMod val="350000"/>
+              </a:schemeClr>
+            </a:gs>
+          </a:gsLst>
+          <a:lin ang="16200000" scaled="1"/>
+        </a:gradFill>
+        <a:gradFill rotWithShape="1">
+          <a:gsLst>
+            <a:gs pos="0">
+              <a:schemeClr val="phClr">
+                <a:shade val="51000"/>
+                <a:satMod val="130000"/>
+              </a:schemeClr>
+            </a:gs>
+            <a:gs pos="80000">
+              <a:schemeClr val="phClr">
+                <a:shade val="93000"/>
+                <a:satMod val="130000"/>
+              </a:schemeClr>
+            </a:gs>
+            <a:gs pos="100000">
+              <a:schemeClr val="phClr">
+                <a:shade val="94000"/>
+                <a:satMod val="135000"/>
+              </a:schemeClr>
+            </a:gs>
+          </a:gsLst>
+          <a:lin ang="16200000" scaled="0"/>
+        </a:gradFill>
+      </a:fillStyleLst>
+      <a:lnStyleLst>
+        <a:ln w="9525" cap="flat" cmpd="sng" algn="ctr">
+          <a:solidFill>
+            <a:schemeClr val="phClr">
+              <a:shade val="95000"/>
+              <a:satMod val="105000"/>
+            </a:schemeClr>
+          </a:solidFill>
+          <a:prstDash val="solid"/>
+        </a:ln>
+        <a:ln w="25400" cap="flat" cmpd="sng" algn="ctr">
+          <a:solidFill>
+            <a:schemeClr val="phClr"/>
+          </a:solidFill>
+          <a:prstDash val="solid"/>
+        </a:ln>
+        <a:ln w="38100" cap="flat" cmpd="sng" algn="ctr">
+          <a:solidFill>
+            <a:schemeClr val="phClr"/>
+          </a:solidFill>
+          <a:prstDash val="solid"/>
+        </a:ln>
+      </a:lnStyleLst>
+      <a:effectStyleLst>
+        <a:effectStyle>
+          <a:effectLst>
+            <a:outerShdw blurRad="40000" dist="20000" dir="5400000" rotWithShape="0">
+              <a:srgbClr val="000000">
+                <a:alpha val="38000"/>
+              </a:srgbClr>
+            </a:outerShdw>
+          </a:effectLst>
+        </a:effectStyle>
+        <a:effectStyle>
+          <a:effectLst>
+            <a:outerShdw blurRad="40000" dist="23000" dir="5400000" rotWithShape="0">
+              <a:srgbClr val="000000">
+                <a:alpha val="35000"/>
+              </a:srgbClr>
+            </a:outerShdw>
+          </a:effectLst>
+        </a:effectStyle>
+        <a:effectStyle>
+          <a:effectLst>
+            <a:outerShdw blurRad="40000" dist="23000" dir="5400000" rotWithShape="0">
+              <a:srgbClr val="000000">
+                <a:alpha val="35000"/>
+              </a:srgbClr>
+            </a:outerShdw>
+          </a:effectLst>
+          <a:scene3d>
+            <a:camera prst="orthographicFront">
+              <a:rot lat="0" lon="0" rev="0"/>
+            </a:camera>
+            <a:lightRig rig="threePt" dir="t">
+              <a:rot lat="0" lon="0" rev="1200000"/>
+            </a:lightRig>
+          </a:scene3d>
+          <a:sp3d>
+            <a:bevelT w="63500" h="25400"/>
+          </a:sp3d>
+        </a:effectStyle>
+      </a:effectStyleLst>
+      <a:bgFillStyleLst>
+        <a:solidFill>
+          <a:schemeClr val="phClr"/>
+        </a:solidFill>
+        <a:gradFill rotWithShape="1">
+          <a:gsLst>
+            <a:gs pos="0">
+              <a:schemeClr val="phClr">
+                <a:tint val="40000"/>
+                <a:satMod val="350000"/>
+              </a:schemeClr>
+            </a:gs>
+            <a:gs pos="40000">
+              <a:schemeClr val="phClr">
+                <a:tint val="45000"/>
+                <a:shade val="99000"/>
+                <a:satMod val="350000"/>
+              </a:schemeClr>
+            </a:gs>
+            <a:gs pos="100000">
+              <a:schemeClr val="phClr">
+                <a:shade val="20000"/>
+                <a:satMod val="255000"/>
+              </a:schemeClr>
+            </a:gs>
+          </a:gsLst>
+          <a:path path="circle">
+            <a:fillToRect l="50000" t="-80000" r="50000" b="180000"/>
+          </a:path>
+        </a:gradFill>
+        <a:gradFill rotWithShape="1">
+          <a:gsLst>
+            <a:gs pos="0">
+              <a:schemeClr val="phClr">
+                <a:tint val="80000"/>
+                <a:satMod val="300000"/>
+              </a:schemeClr>
+            </a:gs>
+            <a:gs pos="100000">
+              <a:schemeClr val="phClr">
+                <a:shade val="30000"/>
+                <a:satMod val="200000"/>
+              </a:schemeClr>
+            </a:gs>
+          </a:gsLst>
+          <a:path path="circle">
+            <a:fillToRect l="50000" t="50000" r="50000" b="50000"/>
+          </a:path>
+        </a:gradFill>
+      </a:bgFillStyleLst>
+    </a:fmtScheme>
+  </a:themeElements>
+  <a:objectDefaults/>
+  <a:extraClrSchemeLst/>
+  <a:extLst>
+    <a:ext uri="{05A4C25C-085E-4340-85A3-A5531E510DB2}">
+      <thm15:themeFamily xmlns:thm15="http://schemas.microsoft.com/office/thememl/2012/main" name="DVA_nCoV_Template.potx [Read-Only]" id="{03170B1E-CD00-4BBB-82B6-0A34E7E71D33}" vid="{785DD861-4870-4038-A967-56C57AC43D45}"/>
+    </a:ext>
+  </a:extLst>
+</a:theme>
+</file>
+
+<file path=ppt/theme/theme3.xml><?xml version="1.0" encoding="utf-8"?>
 <a:theme xmlns:a="http://schemas.openxmlformats.org/drawingml/2006/main" name="Office Theme">
   <a:themeElements>
     <a:clrScheme name="Office">
@@ -9936,6 +18210,15 @@
 </file>
 
 <file path=customXml/item1.xml><?xml version="1.0" encoding="utf-8"?>
+<?mso-contentType ?>
+<FormTemplates xmlns="http://schemas.microsoft.com/sharepoint/v3/contenttype/forms">
+  <Display>DocumentLibraryForm</Display>
+  <Edit>DocumentLibraryForm</Edit>
+  <New>DocumentLibraryForm</New>
+</FormTemplates>
+</file>
+
+<file path=customXml/item2.xml><?xml version="1.0" encoding="utf-8"?>
 <p:properties xmlns:p="http://schemas.microsoft.com/office/2006/metadata/properties" xmlns:xsi="http://www.w3.org/2001/XMLSchema-instance" xmlns:pc="http://schemas.microsoft.com/office/infopath/2007/PartnerControls">
   <documentManagement>
     <TaxCatchAll xmlns="b2f4e7dc-877a-4ed9-a52f-e1cf0df97ff5" xsi:nil="true"/>
@@ -9945,15 +18228,6 @@
     <_Flow_SignoffStatus xmlns="a09e9d82-a4a6-4b9b-911d-2666e311eede" xsi:nil="true"/>
   </documentManagement>
 </p:properties>
-</file>
-
-<file path=customXml/item2.xml><?xml version="1.0" encoding="utf-8"?>
-<?mso-contentType ?>
-<FormTemplates xmlns="http://schemas.microsoft.com/sharepoint/v3/contenttype/forms">
-  <Display>DocumentLibraryForm</Display>
-  <Edit>DocumentLibraryForm</Edit>
-  <New>DocumentLibraryForm</New>
-</FormTemplates>
 </file>
 
 <file path=customXml/item3.xml><?xml version="1.0" encoding="utf-8"?>
@@ -10218,6 +18492,14 @@
 </file>
 
 <file path=customXml/itemProps1.xml><?xml version="1.0" encoding="utf-8"?>
+<ds:datastoreItem xmlns:ds="http://schemas.openxmlformats.org/officeDocument/2006/customXml" ds:itemID="{2350DA3F-FE47-49EC-9149-12F59676D1A7}">
+  <ds:schemaRefs>
+    <ds:schemaRef ds:uri="http://schemas.microsoft.com/sharepoint/v3/contenttype/forms"/>
+  </ds:schemaRefs>
+</ds:datastoreItem>
+</file>
+
+<file path=customXml/itemProps2.xml><?xml version="1.0" encoding="utf-8"?>
 <ds:datastoreItem xmlns:ds="http://schemas.openxmlformats.org/officeDocument/2006/customXml" ds:itemID="{E35E4285-A42E-4477-BACD-839674D390A7}">
   <ds:schemaRefs>
     <ds:schemaRef ds:uri="http://www.w3.org/XML/1998/namespace"/>
@@ -10230,14 +18512,6 @@
     <ds:schemaRef ds:uri="http://schemas.microsoft.com/office/2006/metadata/properties"/>
     <ds:schemaRef ds:uri="b2f4e7dc-877a-4ed9-a52f-e1cf0df97ff5"/>
     <ds:schemaRef ds:uri="http://purl.org/dc/terms/"/>
-  </ds:schemaRefs>
-</ds:datastoreItem>
-</file>
-
-<file path=customXml/itemProps2.xml><?xml version="1.0" encoding="utf-8"?>
-<ds:datastoreItem xmlns:ds="http://schemas.openxmlformats.org/officeDocument/2006/customXml" ds:itemID="{2350DA3F-FE47-49EC-9149-12F59676D1A7}">
-  <ds:schemaRefs>
-    <ds:schemaRef ds:uri="http://schemas.microsoft.com/sharepoint/v3/contenttype/forms"/>
   </ds:schemaRefs>
 </ds:datastoreItem>
 </file>
